--- a/docs/GhostQPU_QHack_India26.pptx
+++ b/docs/GhostQPU_QHack_India26.pptx
@@ -1,31 +1,27 @@
 
 <file path=ppt/presentation.xml><?xml version="1.0" encoding="utf-8"?>
-<p:presentation xmlns:a="http://schemas.openxmlformats.org/drawingml/2006/main" xmlns:r="http://schemas.openxmlformats.org/officeDocument/2006/relationships" xmlns:p="http://schemas.openxmlformats.org/presentationml/2006/main" saveSubsetFonts="1" embedTrueTypeFonts="true">
+<p:presentation xmlns:a="http://schemas.openxmlformats.org/drawingml/2006/main" xmlns:r="http://schemas.openxmlformats.org/officeDocument/2006/relationships" xmlns:p="http://schemas.openxmlformats.org/presentationml/2006/main" embedTrueTypeFonts="1" saveSubsetFonts="1">
   <p:sldMasterIdLst>
     <p:sldMasterId id="2147483648" r:id="rId1"/>
   </p:sldMasterIdLst>
   <p:sldIdLst>
-    <p:sldId id="256" r:id="rId6"/>
-    <p:sldId id="257" r:id="rId7"/>
-    <p:sldId id="258" r:id="rId8"/>
-    <p:sldId id="259" r:id="rId9"/>
-    <p:sldId id="260" r:id="rId10"/>
-    <p:sldId id="261" r:id="rId11"/>
-    <p:sldId id="262" r:id="rId12"/>
-    <p:sldId id="263" r:id="rId13"/>
-    <p:sldId id="264" r:id="rId14"/>
-    <p:sldId id="265" r:id="rId15"/>
+    <p:sldId id="256" r:id="rId2"/>
+    <p:sldId id="257" r:id="rId3"/>
+    <p:sldId id="258" r:id="rId4"/>
+    <p:sldId id="259" r:id="rId5"/>
+    <p:sldId id="260" r:id="rId6"/>
+    <p:sldId id="261" r:id="rId7"/>
+    <p:sldId id="262" r:id="rId8"/>
+    <p:sldId id="263" r:id="rId9"/>
+    <p:sldId id="264" r:id="rId10"/>
+    <p:sldId id="265" r:id="rId11"/>
   </p:sldIdLst>
   <p:sldSz cx="18288000" cy="10287000"/>
   <p:notesSz cx="6858000" cy="9144000"/>
   <p:embeddedFontLst>
     <p:embeddedFont>
-      <p:font typeface="IBM Plex Sans" charset="1" panose="020B0503050203000203"/>
-      <p:regular r:id="rId16"/>
-    </p:embeddedFont>
-    <p:embeddedFont>
-      <p:font typeface="IBM Plex Sans Bold" charset="1" panose="020B0803050203000203"/>
-      <p:regular r:id="rId17"/>
+      <p:font typeface="IBM Plex Sans" panose="020B0503050203000203" pitchFamily="34" charset="0"/>
+      <p:regular r:id="rId12"/>
     </p:embeddedFont>
   </p:embeddedFontLst>
   <p:defaultTextStyle>
@@ -123,6 +119,22 @@
       </a:defRPr>
     </a:lvl9pPr>
   </p:defaultTextStyle>
+  <p:extLst>
+    <p:ext uri="{EFAFB233-063F-42B5-8137-9DF3F51BA10A}">
+      <p15:sldGuideLst xmlns:p15="http://schemas.microsoft.com/office/powerpoint/2012/main">
+        <p15:guide id="1" orient="horz" pos="2160">
+          <p15:clr>
+            <a:srgbClr val="A4A3A4"/>
+          </p15:clr>
+        </p15:guide>
+        <p15:guide id="2" pos="2880">
+          <p15:clr>
+            <a:srgbClr val="A4A3A4"/>
+          </p15:clr>
+        </p15:guide>
+      </p15:sldGuideLst>
+    </p:ext>
+  </p:extLst>
 </p:presentation>
 </file>
 
@@ -164,10 +176,9 @@
           <a:lstStyle/>
           <a:p>
             <a:r>
-              <a:rPr lang="en-US" smtClean="0"/>
+              <a:rPr lang="en-US"/>
               <a:t>Click to edit Master title style</a:t>
             </a:r>
-            <a:endParaRPr lang="en-US"/>
           </a:p>
         </p:txBody>
       </p:sp>
@@ -283,10 +294,9 @@
           </a:lstStyle>
           <a:p>
             <a:r>
-              <a:rPr lang="en-US" smtClean="0"/>
+              <a:rPr lang="en-US"/>
               <a:t>Click to edit Master subtitle style</a:t>
             </a:r>
-            <a:endParaRPr lang="en-US"/>
           </a:p>
         </p:txBody>
       </p:sp>
@@ -308,7 +318,7 @@
             <a:fld id="{1D8BD707-D9CF-40AE-B4C6-C98DA3205C09}" type="datetimeFigureOut">
               <a:rPr lang="en-US" smtClean="0"/>
               <a:pPr/>
-              <a:t>8/1/2011</a:t>
+              <a:t>10/10/2026</a:t>
             </a:fld>
             <a:endParaRPr lang="en-US"/>
           </a:p>
@@ -398,10 +408,9 @@
           <a:lstStyle/>
           <a:p>
             <a:r>
-              <a:rPr lang="en-US" smtClean="0"/>
+              <a:rPr lang="en-US"/>
               <a:t>Click to edit Master title style</a:t>
             </a:r>
-            <a:endParaRPr lang="en-US"/>
           </a:p>
         </p:txBody>
       </p:sp>
@@ -422,38 +431,37 @@
           <a:p>
             <a:pPr lvl="0"/>
             <a:r>
-              <a:rPr lang="en-US" smtClean="0"/>
+              <a:rPr lang="en-US"/>
               <a:t>Click to edit Master text styles</a:t>
             </a:r>
           </a:p>
           <a:p>
             <a:pPr lvl="1"/>
             <a:r>
-              <a:rPr lang="en-US" smtClean="0"/>
+              <a:rPr lang="en-US"/>
               <a:t>Second level</a:t>
             </a:r>
           </a:p>
           <a:p>
             <a:pPr lvl="2"/>
             <a:r>
-              <a:rPr lang="en-US" smtClean="0"/>
+              <a:rPr lang="en-US"/>
               <a:t>Third level</a:t>
             </a:r>
           </a:p>
           <a:p>
             <a:pPr lvl="3"/>
             <a:r>
-              <a:rPr lang="en-US" smtClean="0"/>
+              <a:rPr lang="en-US"/>
               <a:t>Fourth level</a:t>
             </a:r>
           </a:p>
           <a:p>
             <a:pPr lvl="4"/>
             <a:r>
-              <a:rPr lang="en-US" smtClean="0"/>
+              <a:rPr lang="en-US"/>
               <a:t>Fifth level</a:t>
             </a:r>
-            <a:endParaRPr lang="en-US"/>
           </a:p>
         </p:txBody>
       </p:sp>
@@ -475,7 +483,7 @@
             <a:fld id="{1D8BD707-D9CF-40AE-B4C6-C98DA3205C09}" type="datetimeFigureOut">
               <a:rPr lang="en-US" smtClean="0"/>
               <a:pPr/>
-              <a:t>8/1/2011</a:t>
+              <a:t>10/10/2026</a:t>
             </a:fld>
             <a:endParaRPr lang="en-US"/>
           </a:p>
@@ -570,10 +578,9 @@
           <a:lstStyle/>
           <a:p>
             <a:r>
-              <a:rPr lang="en-US" smtClean="0"/>
+              <a:rPr lang="en-US"/>
               <a:t>Click to edit Master title style</a:t>
             </a:r>
-            <a:endParaRPr lang="en-US"/>
           </a:p>
         </p:txBody>
       </p:sp>
@@ -599,38 +606,37 @@
           <a:p>
             <a:pPr lvl="0"/>
             <a:r>
-              <a:rPr lang="en-US" smtClean="0"/>
+              <a:rPr lang="en-US"/>
               <a:t>Click to edit Master text styles</a:t>
             </a:r>
           </a:p>
           <a:p>
             <a:pPr lvl="1"/>
             <a:r>
-              <a:rPr lang="en-US" smtClean="0"/>
+              <a:rPr lang="en-US"/>
               <a:t>Second level</a:t>
             </a:r>
           </a:p>
           <a:p>
             <a:pPr lvl="2"/>
             <a:r>
-              <a:rPr lang="en-US" smtClean="0"/>
+              <a:rPr lang="en-US"/>
               <a:t>Third level</a:t>
             </a:r>
           </a:p>
           <a:p>
             <a:pPr lvl="3"/>
             <a:r>
-              <a:rPr lang="en-US" smtClean="0"/>
+              <a:rPr lang="en-US"/>
               <a:t>Fourth level</a:t>
             </a:r>
           </a:p>
           <a:p>
             <a:pPr lvl="4"/>
             <a:r>
-              <a:rPr lang="en-US" smtClean="0"/>
+              <a:rPr lang="en-US"/>
               <a:t>Fifth level</a:t>
             </a:r>
-            <a:endParaRPr lang="en-US"/>
           </a:p>
         </p:txBody>
       </p:sp>
@@ -652,7 +658,7 @@
             <a:fld id="{1D8BD707-D9CF-40AE-B4C6-C98DA3205C09}" type="datetimeFigureOut">
               <a:rPr lang="en-US" smtClean="0"/>
               <a:pPr/>
-              <a:t>8/1/2011</a:t>
+              <a:t>10/10/2026</a:t>
             </a:fld>
             <a:endParaRPr lang="en-US"/>
           </a:p>
@@ -742,10 +748,9 @@
           <a:lstStyle/>
           <a:p>
             <a:r>
-              <a:rPr lang="en-US" smtClean="0"/>
+              <a:rPr lang="en-US"/>
               <a:t>Click to edit Master title style</a:t>
             </a:r>
-            <a:endParaRPr lang="en-US"/>
           </a:p>
         </p:txBody>
       </p:sp>
@@ -766,38 +771,37 @@
           <a:p>
             <a:pPr lvl="0"/>
             <a:r>
-              <a:rPr lang="en-US" smtClean="0"/>
+              <a:rPr lang="en-US"/>
               <a:t>Click to edit Master text styles</a:t>
             </a:r>
           </a:p>
           <a:p>
             <a:pPr lvl="1"/>
             <a:r>
-              <a:rPr lang="en-US" smtClean="0"/>
+              <a:rPr lang="en-US"/>
               <a:t>Second level</a:t>
             </a:r>
           </a:p>
           <a:p>
             <a:pPr lvl="2"/>
             <a:r>
-              <a:rPr lang="en-US" smtClean="0"/>
+              <a:rPr lang="en-US"/>
               <a:t>Third level</a:t>
             </a:r>
           </a:p>
           <a:p>
             <a:pPr lvl="3"/>
             <a:r>
-              <a:rPr lang="en-US" smtClean="0"/>
+              <a:rPr lang="en-US"/>
               <a:t>Fourth level</a:t>
             </a:r>
           </a:p>
           <a:p>
             <a:pPr lvl="4"/>
             <a:r>
-              <a:rPr lang="en-US" smtClean="0"/>
+              <a:rPr lang="en-US"/>
               <a:t>Fifth level</a:t>
             </a:r>
-            <a:endParaRPr lang="en-US"/>
           </a:p>
         </p:txBody>
       </p:sp>
@@ -819,7 +823,7 @@
             <a:fld id="{1D8BD707-D9CF-40AE-B4C6-C98DA3205C09}" type="datetimeFigureOut">
               <a:rPr lang="en-US" smtClean="0"/>
               <a:pPr/>
-              <a:t>8/1/2011</a:t>
+              <a:t>10/10/2026</a:t>
             </a:fld>
             <a:endParaRPr lang="en-US"/>
           </a:p>
@@ -918,10 +922,9 @@
           </a:lstStyle>
           <a:p>
             <a:r>
-              <a:rPr lang="en-US" smtClean="0"/>
+              <a:rPr lang="en-US"/>
               <a:t>Click to edit Master title style</a:t>
             </a:r>
-            <a:endParaRPr lang="en-US"/>
           </a:p>
         </p:txBody>
       </p:sp>
@@ -1038,7 +1041,7 @@
           <a:p>
             <a:pPr lvl="0"/>
             <a:r>
-              <a:rPr lang="en-US" smtClean="0"/>
+              <a:rPr lang="en-US"/>
               <a:t>Click to edit Master text styles</a:t>
             </a:r>
           </a:p>
@@ -1062,7 +1065,7 @@
             <a:fld id="{1D8BD707-D9CF-40AE-B4C6-C98DA3205C09}" type="datetimeFigureOut">
               <a:rPr lang="en-US" smtClean="0"/>
               <a:pPr/>
-              <a:t>8/1/2011</a:t>
+              <a:t>10/10/2026</a:t>
             </a:fld>
             <a:endParaRPr lang="en-US"/>
           </a:p>
@@ -1152,10 +1155,9 @@
           <a:lstStyle/>
           <a:p>
             <a:r>
-              <a:rPr lang="en-US" smtClean="0"/>
+              <a:rPr lang="en-US"/>
               <a:t>Click to edit Master title style</a:t>
             </a:r>
-            <a:endParaRPr lang="en-US"/>
           </a:p>
         </p:txBody>
       </p:sp>
@@ -1209,38 +1211,37 @@
           <a:p>
             <a:pPr lvl="0"/>
             <a:r>
-              <a:rPr lang="en-US" smtClean="0"/>
+              <a:rPr lang="en-US"/>
               <a:t>Click to edit Master text styles</a:t>
             </a:r>
           </a:p>
           <a:p>
             <a:pPr lvl="1"/>
             <a:r>
-              <a:rPr lang="en-US" smtClean="0"/>
+              <a:rPr lang="en-US"/>
               <a:t>Second level</a:t>
             </a:r>
           </a:p>
           <a:p>
             <a:pPr lvl="2"/>
             <a:r>
-              <a:rPr lang="en-US" smtClean="0"/>
+              <a:rPr lang="en-US"/>
               <a:t>Third level</a:t>
             </a:r>
           </a:p>
           <a:p>
             <a:pPr lvl="3"/>
             <a:r>
-              <a:rPr lang="en-US" smtClean="0"/>
+              <a:rPr lang="en-US"/>
               <a:t>Fourth level</a:t>
             </a:r>
           </a:p>
           <a:p>
             <a:pPr lvl="4"/>
             <a:r>
-              <a:rPr lang="en-US" smtClean="0"/>
+              <a:rPr lang="en-US"/>
               <a:t>Fifth level</a:t>
             </a:r>
-            <a:endParaRPr lang="en-US"/>
           </a:p>
         </p:txBody>
       </p:sp>
@@ -1294,38 +1295,37 @@
           <a:p>
             <a:pPr lvl="0"/>
             <a:r>
-              <a:rPr lang="en-US" smtClean="0"/>
+              <a:rPr lang="en-US"/>
               <a:t>Click to edit Master text styles</a:t>
             </a:r>
           </a:p>
           <a:p>
             <a:pPr lvl="1"/>
             <a:r>
-              <a:rPr lang="en-US" smtClean="0"/>
+              <a:rPr lang="en-US"/>
               <a:t>Second level</a:t>
             </a:r>
           </a:p>
           <a:p>
             <a:pPr lvl="2"/>
             <a:r>
-              <a:rPr lang="en-US" smtClean="0"/>
+              <a:rPr lang="en-US"/>
               <a:t>Third level</a:t>
             </a:r>
           </a:p>
           <a:p>
             <a:pPr lvl="3"/>
             <a:r>
-              <a:rPr lang="en-US" smtClean="0"/>
+              <a:rPr lang="en-US"/>
               <a:t>Fourth level</a:t>
             </a:r>
           </a:p>
           <a:p>
             <a:pPr lvl="4"/>
             <a:r>
-              <a:rPr lang="en-US" smtClean="0"/>
+              <a:rPr lang="en-US"/>
               <a:t>Fifth level</a:t>
             </a:r>
-            <a:endParaRPr lang="en-US"/>
           </a:p>
         </p:txBody>
       </p:sp>
@@ -1347,7 +1347,7 @@
             <a:fld id="{1D8BD707-D9CF-40AE-B4C6-C98DA3205C09}" type="datetimeFigureOut">
               <a:rPr lang="en-US" smtClean="0"/>
               <a:pPr/>
-              <a:t>8/1/2011</a:t>
+              <a:t>10/10/2026</a:t>
             </a:fld>
             <a:endParaRPr lang="en-US"/>
           </a:p>
@@ -1441,10 +1441,9 @@
           </a:lstStyle>
           <a:p>
             <a:r>
-              <a:rPr lang="en-US" smtClean="0"/>
+              <a:rPr lang="en-US"/>
               <a:t>Click to edit Master title style</a:t>
             </a:r>
-            <a:endParaRPr lang="en-US"/>
           </a:p>
         </p:txBody>
       </p:sp>
@@ -1507,7 +1506,7 @@
           <a:p>
             <a:pPr lvl="0"/>
             <a:r>
-              <a:rPr lang="en-US" smtClean="0"/>
+              <a:rPr lang="en-US"/>
               <a:t>Click to edit Master text styles</a:t>
             </a:r>
           </a:p>
@@ -1563,38 +1562,37 @@
           <a:p>
             <a:pPr lvl="0"/>
             <a:r>
-              <a:rPr lang="en-US" smtClean="0"/>
+              <a:rPr lang="en-US"/>
               <a:t>Click to edit Master text styles</a:t>
             </a:r>
           </a:p>
           <a:p>
             <a:pPr lvl="1"/>
             <a:r>
-              <a:rPr lang="en-US" smtClean="0"/>
+              <a:rPr lang="en-US"/>
               <a:t>Second level</a:t>
             </a:r>
           </a:p>
           <a:p>
             <a:pPr lvl="2"/>
             <a:r>
-              <a:rPr lang="en-US" smtClean="0"/>
+              <a:rPr lang="en-US"/>
               <a:t>Third level</a:t>
             </a:r>
           </a:p>
           <a:p>
             <a:pPr lvl="3"/>
             <a:r>
-              <a:rPr lang="en-US" smtClean="0"/>
+              <a:rPr lang="en-US"/>
               <a:t>Fourth level</a:t>
             </a:r>
           </a:p>
           <a:p>
             <a:pPr lvl="4"/>
             <a:r>
-              <a:rPr lang="en-US" smtClean="0"/>
+              <a:rPr lang="en-US"/>
               <a:t>Fifth level</a:t>
             </a:r>
-            <a:endParaRPr lang="en-US"/>
           </a:p>
         </p:txBody>
       </p:sp>
@@ -1657,7 +1655,7 @@
           <a:p>
             <a:pPr lvl="0"/>
             <a:r>
-              <a:rPr lang="en-US" smtClean="0"/>
+              <a:rPr lang="en-US"/>
               <a:t>Click to edit Master text styles</a:t>
             </a:r>
           </a:p>
@@ -1713,38 +1711,37 @@
           <a:p>
             <a:pPr lvl="0"/>
             <a:r>
-              <a:rPr lang="en-US" smtClean="0"/>
+              <a:rPr lang="en-US"/>
               <a:t>Click to edit Master text styles</a:t>
             </a:r>
           </a:p>
           <a:p>
             <a:pPr lvl="1"/>
             <a:r>
-              <a:rPr lang="en-US" smtClean="0"/>
+              <a:rPr lang="en-US"/>
               <a:t>Second level</a:t>
             </a:r>
           </a:p>
           <a:p>
             <a:pPr lvl="2"/>
             <a:r>
-              <a:rPr lang="en-US" smtClean="0"/>
+              <a:rPr lang="en-US"/>
               <a:t>Third level</a:t>
             </a:r>
           </a:p>
           <a:p>
             <a:pPr lvl="3"/>
             <a:r>
-              <a:rPr lang="en-US" smtClean="0"/>
+              <a:rPr lang="en-US"/>
               <a:t>Fourth level</a:t>
             </a:r>
           </a:p>
           <a:p>
             <a:pPr lvl="4"/>
             <a:r>
-              <a:rPr lang="en-US" smtClean="0"/>
+              <a:rPr lang="en-US"/>
               <a:t>Fifth level</a:t>
             </a:r>
-            <a:endParaRPr lang="en-US"/>
           </a:p>
         </p:txBody>
       </p:sp>
@@ -1766,7 +1763,7 @@
             <a:fld id="{1D8BD707-D9CF-40AE-B4C6-C98DA3205C09}" type="datetimeFigureOut">
               <a:rPr lang="en-US" smtClean="0"/>
               <a:pPr/>
-              <a:t>8/1/2011</a:t>
+              <a:t>10/10/2026</a:t>
             </a:fld>
             <a:endParaRPr lang="en-US"/>
           </a:p>
@@ -1856,10 +1853,9 @@
           <a:lstStyle/>
           <a:p>
             <a:r>
-              <a:rPr lang="en-US" smtClean="0"/>
+              <a:rPr lang="en-US"/>
               <a:t>Click to edit Master title style</a:t>
             </a:r>
-            <a:endParaRPr lang="en-US"/>
           </a:p>
         </p:txBody>
       </p:sp>
@@ -1881,7 +1877,7 @@
             <a:fld id="{1D8BD707-D9CF-40AE-B4C6-C98DA3205C09}" type="datetimeFigureOut">
               <a:rPr lang="en-US" smtClean="0"/>
               <a:pPr/>
-              <a:t>8/1/2011</a:t>
+              <a:t>10/10/2026</a:t>
             </a:fld>
             <a:endParaRPr lang="en-US"/>
           </a:p>
@@ -1973,7 +1969,7 @@
             <a:fld id="{1D8BD707-D9CF-40AE-B4C6-C98DA3205C09}" type="datetimeFigureOut">
               <a:rPr lang="en-US" smtClean="0"/>
               <a:pPr/>
-              <a:t>8/1/2011</a:t>
+              <a:t>10/10/2026</a:t>
             </a:fld>
             <a:endParaRPr lang="en-US"/>
           </a:p>
@@ -2072,10 +2068,9 @@
           </a:lstStyle>
           <a:p>
             <a:r>
-              <a:rPr lang="en-US" smtClean="0"/>
+              <a:rPr lang="en-US"/>
               <a:t>Click to edit Master title style</a:t>
             </a:r>
-            <a:endParaRPr lang="en-US"/>
           </a:p>
         </p:txBody>
       </p:sp>
@@ -2129,38 +2124,37 @@
           <a:p>
             <a:pPr lvl="0"/>
             <a:r>
-              <a:rPr lang="en-US" smtClean="0"/>
+              <a:rPr lang="en-US"/>
               <a:t>Click to edit Master text styles</a:t>
             </a:r>
           </a:p>
           <a:p>
             <a:pPr lvl="1"/>
             <a:r>
-              <a:rPr lang="en-US" smtClean="0"/>
+              <a:rPr lang="en-US"/>
               <a:t>Second level</a:t>
             </a:r>
           </a:p>
           <a:p>
             <a:pPr lvl="2"/>
             <a:r>
-              <a:rPr lang="en-US" smtClean="0"/>
+              <a:rPr lang="en-US"/>
               <a:t>Third level</a:t>
             </a:r>
           </a:p>
           <a:p>
             <a:pPr lvl="3"/>
             <a:r>
-              <a:rPr lang="en-US" smtClean="0"/>
+              <a:rPr lang="en-US"/>
               <a:t>Fourth level</a:t>
             </a:r>
           </a:p>
           <a:p>
             <a:pPr lvl="4"/>
             <a:r>
-              <a:rPr lang="en-US" smtClean="0"/>
+              <a:rPr lang="en-US"/>
               <a:t>Fifth level</a:t>
             </a:r>
-            <a:endParaRPr lang="en-US"/>
           </a:p>
         </p:txBody>
       </p:sp>
@@ -2223,7 +2217,7 @@
           <a:p>
             <a:pPr lvl="0"/>
             <a:r>
-              <a:rPr lang="en-US" smtClean="0"/>
+              <a:rPr lang="en-US"/>
               <a:t>Click to edit Master text styles</a:t>
             </a:r>
           </a:p>
@@ -2247,7 +2241,7 @@
             <a:fld id="{1D8BD707-D9CF-40AE-B4C6-C98DA3205C09}" type="datetimeFigureOut">
               <a:rPr lang="en-US" smtClean="0"/>
               <a:pPr/>
-              <a:t>8/1/2011</a:t>
+              <a:t>10/10/2026</a:t>
             </a:fld>
             <a:endParaRPr lang="en-US"/>
           </a:p>
@@ -2346,10 +2340,9 @@
           </a:lstStyle>
           <a:p>
             <a:r>
-              <a:rPr lang="en-US" smtClean="0"/>
+              <a:rPr lang="en-US"/>
               <a:t>Click to edit Master title style</a:t>
             </a:r>
-            <a:endParaRPr lang="en-US"/>
           </a:p>
         </p:txBody>
       </p:sp>
@@ -2473,7 +2466,7 @@
           <a:p>
             <a:pPr lvl="0"/>
             <a:r>
-              <a:rPr lang="en-US" smtClean="0"/>
+              <a:rPr lang="en-US"/>
               <a:t>Click to edit Master text styles</a:t>
             </a:r>
           </a:p>
@@ -2497,7 +2490,7 @@
             <a:fld id="{1D8BD707-D9CF-40AE-B4C6-C98DA3205C09}" type="datetimeFigureOut">
               <a:rPr lang="en-US" smtClean="0"/>
               <a:pPr/>
-              <a:t>8/1/2011</a:t>
+              <a:t>10/10/2026</a:t>
             </a:fld>
             <a:endParaRPr lang="en-US"/>
           </a:p>
@@ -2602,10 +2595,9 @@
           <a:lstStyle/>
           <a:p>
             <a:r>
-              <a:rPr lang="en-US" smtClean="0"/>
+              <a:rPr lang="en-US"/>
               <a:t>Click to edit Master title style</a:t>
             </a:r>
-            <a:endParaRPr lang="en-US"/>
           </a:p>
         </p:txBody>
       </p:sp>
@@ -2636,38 +2628,37 @@
           <a:p>
             <a:pPr lvl="0"/>
             <a:r>
-              <a:rPr lang="en-US" smtClean="0"/>
+              <a:rPr lang="en-US"/>
               <a:t>Click to edit Master text styles</a:t>
             </a:r>
           </a:p>
           <a:p>
             <a:pPr lvl="1"/>
             <a:r>
-              <a:rPr lang="en-US" smtClean="0"/>
+              <a:rPr lang="en-US"/>
               <a:t>Second level</a:t>
             </a:r>
           </a:p>
           <a:p>
             <a:pPr lvl="2"/>
             <a:r>
-              <a:rPr lang="en-US" smtClean="0"/>
+              <a:rPr lang="en-US"/>
               <a:t>Third level</a:t>
             </a:r>
           </a:p>
           <a:p>
             <a:pPr lvl="3"/>
             <a:r>
-              <a:rPr lang="en-US" smtClean="0"/>
+              <a:rPr lang="en-US"/>
               <a:t>Fourth level</a:t>
             </a:r>
           </a:p>
           <a:p>
             <a:pPr lvl="4"/>
             <a:r>
-              <a:rPr lang="en-US" smtClean="0"/>
+              <a:rPr lang="en-US"/>
               <a:t>Fifth level</a:t>
             </a:r>
-            <a:endParaRPr lang="en-US"/>
           </a:p>
         </p:txBody>
       </p:sp>
@@ -2707,7 +2698,7 @@
             <a:fld id="{1D8BD707-D9CF-40AE-B4C6-C98DA3205C09}" type="datetimeFigureOut">
               <a:rPr lang="en-US" smtClean="0"/>
               <a:pPr/>
-              <a:t>8/1/2011</a:t>
+              <a:t>10/10/2026</a:t>
             </a:fld>
             <a:endParaRPr lang="en-US"/>
           </a:p>
@@ -3062,13 +3053,14 @@
 </file>
 
 <file path=ppt/slides/slide1.xml><?xml version="1.0" encoding="utf-8"?>
-<p:sld xmlns:p="http://schemas.openxmlformats.org/presentationml/2006/main" xmlns:a="http://schemas.openxmlformats.org/drawingml/2006/main" xmlns:r="http://schemas.openxmlformats.org/officeDocument/2006/relationships">
+<p:sld xmlns:a="http://schemas.openxmlformats.org/drawingml/2006/main" xmlns:r="http://schemas.openxmlformats.org/officeDocument/2006/relationships" xmlns:p="http://schemas.openxmlformats.org/presentationml/2006/main">
   <p:cSld>
     <p:bg>
       <p:bgPr>
         <a:solidFill>
           <a:srgbClr val="E0E0E0"/>
         </a:solidFill>
+        <a:effectLst/>
       </p:bgPr>
     </p:bg>
     <p:spTree>
@@ -3087,12 +3079,12 @@
       </p:grpSpPr>
       <p:grpSp>
         <p:nvGrpSpPr>
-          <p:cNvPr name="Group 2" id="2"/>
+          <p:cNvPr id="2" name="Group 2"/>
           <p:cNvGrpSpPr/>
           <p:nvPr/>
         </p:nvGrpSpPr>
         <p:grpSpPr>
-          <a:xfrm rot="0">
+          <a:xfrm>
             <a:off x="-1597105" y="2516808"/>
             <a:ext cx="2625805" cy="830953"/>
             <a:chOff x="0" y="0"/>
@@ -3101,12 +3093,12 @@
         </p:grpSpPr>
         <p:sp>
           <p:nvSpPr>
-            <p:cNvPr name="Freeform 3" id="3"/>
+            <p:cNvPr id="3" name="Freeform 3"/>
             <p:cNvSpPr/>
             <p:nvPr/>
           </p:nvSpPr>
           <p:spPr>
-            <a:xfrm flipH="false" flipV="false" rot="0">
+            <a:xfrm>
               <a:off x="0" y="0"/>
               <a:ext cx="5816600" cy="1840738"/>
             </a:xfrm>
@@ -3115,9 +3107,9 @@
               <a:gdLst/>
               <a:ahLst/>
               <a:cxnLst/>
-              <a:rect r="r" b="b" t="t" l="l"/>
+              <a:rect l="l" t="t" r="r" b="b"/>
               <a:pathLst>
-                <a:path h="1840738" w="5816600">
+                <a:path w="5816600" h="1840738">
                   <a:moveTo>
                     <a:pt x="0" y="0"/>
                   </a:moveTo>
@@ -3140,7 +3132,7 @@
             <a:blipFill>
               <a:blip r:embed="rId2"/>
               <a:stretch>
-                <a:fillRect l="0" t="0" r="0" b="2"/>
+                <a:fillRect b="2"/>
               </a:stretch>
             </a:blipFill>
           </p:spPr>
@@ -3148,12 +3140,12 @@
       </p:grpSp>
       <p:grpSp>
         <p:nvGrpSpPr>
-          <p:cNvPr name="Group 4" id="4"/>
+          <p:cNvPr id="4" name="Group 4"/>
           <p:cNvGrpSpPr/>
           <p:nvPr/>
         </p:nvGrpSpPr>
         <p:grpSpPr>
-          <a:xfrm rot="0">
+          <a:xfrm>
             <a:off x="2928206" y="9780631"/>
             <a:ext cx="2625805" cy="830953"/>
             <a:chOff x="0" y="0"/>
@@ -3162,12 +3154,12 @@
         </p:grpSpPr>
         <p:sp>
           <p:nvSpPr>
-            <p:cNvPr name="Freeform 5" id="5"/>
+            <p:cNvPr id="5" name="Freeform 5"/>
             <p:cNvSpPr/>
             <p:nvPr/>
           </p:nvSpPr>
           <p:spPr>
-            <a:xfrm flipH="false" flipV="false" rot="0">
+            <a:xfrm>
               <a:off x="0" y="0"/>
               <a:ext cx="5816600" cy="1840738"/>
             </a:xfrm>
@@ -3176,9 +3168,9 @@
               <a:gdLst/>
               <a:ahLst/>
               <a:cxnLst/>
-              <a:rect r="r" b="b" t="t" l="l"/>
+              <a:rect l="l" t="t" r="r" b="b"/>
               <a:pathLst>
-                <a:path h="1840738" w="5816600">
+                <a:path w="5816600" h="1840738">
                   <a:moveTo>
                     <a:pt x="0" y="0"/>
                   </a:moveTo>
@@ -3201,7 +3193,7 @@
             <a:blipFill>
               <a:blip r:embed="rId2"/>
               <a:stretch>
-                <a:fillRect l="0" t="0" r="0" b="2"/>
+                <a:fillRect b="2"/>
               </a:stretch>
             </a:blipFill>
           </p:spPr>
@@ -3209,12 +3201,12 @@
       </p:grpSp>
       <p:grpSp>
         <p:nvGrpSpPr>
-          <p:cNvPr name="Group 6" id="6"/>
+          <p:cNvPr id="6" name="Group 6"/>
           <p:cNvGrpSpPr/>
           <p:nvPr/>
         </p:nvGrpSpPr>
         <p:grpSpPr>
-          <a:xfrm rot="0">
+          <a:xfrm>
             <a:off x="13367623" y="9656173"/>
             <a:ext cx="2625805" cy="830953"/>
             <a:chOff x="0" y="0"/>
@@ -3223,12 +3215,12 @@
         </p:grpSpPr>
         <p:sp>
           <p:nvSpPr>
-            <p:cNvPr name="Freeform 7" id="7"/>
+            <p:cNvPr id="7" name="Freeform 7"/>
             <p:cNvSpPr/>
             <p:nvPr/>
           </p:nvSpPr>
           <p:spPr>
-            <a:xfrm flipH="false" flipV="false" rot="0">
+            <a:xfrm>
               <a:off x="0" y="0"/>
               <a:ext cx="5816600" cy="1840738"/>
             </a:xfrm>
@@ -3237,9 +3229,9 @@
               <a:gdLst/>
               <a:ahLst/>
               <a:cxnLst/>
-              <a:rect r="r" b="b" t="t" l="l"/>
+              <a:rect l="l" t="t" r="r" b="b"/>
               <a:pathLst>
-                <a:path h="1840738" w="5816600">
+                <a:path w="5816600" h="1840738">
                   <a:moveTo>
                     <a:pt x="0" y="0"/>
                   </a:moveTo>
@@ -3262,7 +3254,7 @@
             <a:blipFill>
               <a:blip r:embed="rId2"/>
               <a:stretch>
-                <a:fillRect l="0" t="0" r="0" b="2"/>
+                <a:fillRect b="2"/>
               </a:stretch>
             </a:blipFill>
           </p:spPr>
@@ -3270,13 +3262,13 @@
       </p:grpSp>
       <p:grpSp>
         <p:nvGrpSpPr>
-          <p:cNvPr name="Group 8" id="8"/>
+          <p:cNvPr id="8" name="Group 8"/>
           <p:cNvGrpSpPr/>
           <p:nvPr/>
         </p:nvGrpSpPr>
         <p:grpSpPr>
-          <a:xfrm rot="0">
-            <a:off x="12140647" y="2730987"/>
+          <a:xfrm>
+            <a:off x="12397061" y="2730987"/>
             <a:ext cx="5634028" cy="6185198"/>
             <a:chOff x="0" y="0"/>
             <a:chExt cx="15229294" cy="16719156"/>
@@ -3284,12 +3276,12 @@
         </p:grpSpPr>
         <p:sp>
           <p:nvSpPr>
-            <p:cNvPr name="Freeform 9" id="9"/>
+            <p:cNvPr id="9" name="Freeform 9"/>
             <p:cNvSpPr/>
             <p:nvPr/>
           </p:nvSpPr>
           <p:spPr>
-            <a:xfrm flipH="false" flipV="false" rot="0">
+            <a:xfrm>
               <a:off x="0" y="0"/>
               <a:ext cx="15229332" cy="16719131"/>
             </a:xfrm>
@@ -3298,9 +3290,9 @@
               <a:gdLst/>
               <a:ahLst/>
               <a:cxnLst/>
-              <a:rect r="r" b="b" t="t" l="l"/>
+              <a:rect l="l" t="t" r="r" b="b"/>
               <a:pathLst>
-                <a:path h="16719131" w="15229332">
+                <a:path w="15229332" h="16719131">
                   <a:moveTo>
                     <a:pt x="1287347" y="0"/>
                   </a:moveTo>
@@ -3363,7 +3355,7 @@
             <a:blipFill>
               <a:blip r:embed="rId3"/>
               <a:stretch>
-                <a:fillRect l="0" t="-67" r="0" b="-67"/>
+                <a:fillRect t="-67" b="-67"/>
               </a:stretch>
             </a:blipFill>
             <a:ln w="38100" cap="rnd">
@@ -3378,12 +3370,12 @@
       </p:grpSp>
       <p:grpSp>
         <p:nvGrpSpPr>
-          <p:cNvPr name="Group 10" id="10"/>
+          <p:cNvPr id="10" name="Group 10"/>
           <p:cNvGrpSpPr/>
           <p:nvPr/>
         </p:nvGrpSpPr>
         <p:grpSpPr>
-          <a:xfrm rot="0">
+          <a:xfrm>
             <a:off x="7990242" y="9984655"/>
             <a:ext cx="173987" cy="173987"/>
             <a:chOff x="0" y="0"/>
@@ -3392,12 +3384,12 @@
         </p:grpSpPr>
         <p:sp>
           <p:nvSpPr>
-            <p:cNvPr name="Freeform 11" id="11"/>
+            <p:cNvPr id="11" name="Freeform 11"/>
             <p:cNvSpPr/>
             <p:nvPr/>
           </p:nvSpPr>
           <p:spPr>
-            <a:xfrm flipH="false" flipV="false" rot="0">
+            <a:xfrm>
               <a:off x="0" y="0"/>
               <a:ext cx="812800" cy="812800"/>
             </a:xfrm>
@@ -3406,9 +3398,9 @@
               <a:gdLst/>
               <a:ahLst/>
               <a:cxnLst/>
-              <a:rect r="r" b="b" t="t" l="l"/>
+              <a:rect l="l" t="t" r="r" b="b"/>
               <a:pathLst>
-                <a:path h="812800" w="812800">
+                <a:path w="812800" h="812800">
                   <a:moveTo>
                     <a:pt x="406400" y="0"/>
                   </a:moveTo>
@@ -3443,8 +3435,8 @@
         </p:sp>
         <p:sp>
           <p:nvSpPr>
-            <p:cNvPr name="TextBox 12" id="12"/>
-            <p:cNvSpPr txBox="true"/>
+            <p:cNvPr id="12" name="TextBox 12"/>
+            <p:cNvSpPr txBox="1"/>
             <p:nvPr/>
           </p:nvSpPr>
           <p:spPr>
@@ -3457,7 +3449,7 @@
             </a:prstGeom>
           </p:spPr>
           <p:txBody>
-            <a:bodyPr anchor="ctr" rtlCol="false" tIns="50800" lIns="50800" bIns="50800" rIns="50800"/>
+            <a:bodyPr lIns="50800" tIns="50800" rIns="50800" bIns="50800" rtlCol="0" anchor="ctr"/>
             <a:lstStyle/>
             <a:p>
               <a:pPr algn="ctr">
@@ -3465,18 +3457,19 @@
                   <a:spcPts val="2239"/>
                 </a:lnSpc>
               </a:pPr>
+              <a:endParaRPr/>
             </a:p>
           </p:txBody>
         </p:sp>
       </p:grpSp>
       <p:grpSp>
         <p:nvGrpSpPr>
-          <p:cNvPr name="Group 13" id="13"/>
+          <p:cNvPr id="13" name="Group 13"/>
           <p:cNvGrpSpPr/>
           <p:nvPr/>
         </p:nvGrpSpPr>
         <p:grpSpPr>
-          <a:xfrm rot="0">
+          <a:xfrm>
             <a:off x="10353346" y="9948585"/>
             <a:ext cx="173987" cy="173987"/>
             <a:chOff x="0" y="0"/>
@@ -3485,12 +3478,12 @@
         </p:grpSpPr>
         <p:sp>
           <p:nvSpPr>
-            <p:cNvPr name="Freeform 14" id="14"/>
+            <p:cNvPr id="14" name="Freeform 14"/>
             <p:cNvSpPr/>
             <p:nvPr/>
           </p:nvSpPr>
           <p:spPr>
-            <a:xfrm flipH="false" flipV="false" rot="0">
+            <a:xfrm>
               <a:off x="0" y="0"/>
               <a:ext cx="812800" cy="812800"/>
             </a:xfrm>
@@ -3499,9 +3492,9 @@
               <a:gdLst/>
               <a:ahLst/>
               <a:cxnLst/>
-              <a:rect r="r" b="b" t="t" l="l"/>
+              <a:rect l="l" t="t" r="r" b="b"/>
               <a:pathLst>
-                <a:path h="812800" w="812800">
+                <a:path w="812800" h="812800">
                   <a:moveTo>
                     <a:pt x="406400" y="0"/>
                   </a:moveTo>
@@ -3536,8 +3529,8 @@
         </p:sp>
         <p:sp>
           <p:nvSpPr>
-            <p:cNvPr name="TextBox 15" id="15"/>
-            <p:cNvSpPr txBox="true"/>
+            <p:cNvPr id="15" name="TextBox 15"/>
+            <p:cNvSpPr txBox="1"/>
             <p:nvPr/>
           </p:nvSpPr>
           <p:spPr>
@@ -3550,7 +3543,7 @@
             </a:prstGeom>
           </p:spPr>
           <p:txBody>
-            <a:bodyPr anchor="ctr" rtlCol="false" tIns="50800" lIns="50800" bIns="50800" rIns="50800"/>
+            <a:bodyPr lIns="50800" tIns="50800" rIns="50800" bIns="50800" rtlCol="0" anchor="ctr"/>
             <a:lstStyle/>
             <a:p>
               <a:pPr algn="ctr">
@@ -3558,18 +3551,19 @@
                   <a:spcPts val="2239"/>
                 </a:lnSpc>
               </a:pPr>
+              <a:endParaRPr/>
             </a:p>
           </p:txBody>
         </p:sp>
       </p:grpSp>
       <p:sp>
         <p:nvSpPr>
-          <p:cNvPr name="Freeform 16" id="16"/>
+          <p:cNvPr id="16" name="Freeform 16"/>
           <p:cNvSpPr/>
           <p:nvPr/>
         </p:nvSpPr>
         <p:spPr>
-          <a:xfrm flipH="false" flipV="false" rot="0">
+          <a:xfrm>
             <a:off x="5554011" y="1808824"/>
             <a:ext cx="5931138" cy="1977046"/>
           </a:xfrm>
@@ -3578,9 +3572,9 @@
             <a:gdLst/>
             <a:ahLst/>
             <a:cxnLst/>
-            <a:rect r="r" b="b" t="t" l="l"/>
+            <a:rect l="l" t="t" r="r" b="b"/>
             <a:pathLst>
-              <a:path h="1977046" w="5931138">
+              <a:path w="5931138" h="1977046">
                 <a:moveTo>
                   <a:pt x="0" y="0"/>
                 </a:moveTo>
@@ -3603,19 +3597,19 @@
           <a:blipFill>
             <a:blip r:embed="rId4"/>
             <a:stretch>
-              <a:fillRect l="0" t="0" r="0" b="0"/>
+              <a:fillRect/>
             </a:stretch>
           </a:blipFill>
         </p:spPr>
       </p:sp>
       <p:grpSp>
         <p:nvGrpSpPr>
-          <p:cNvPr name="Group 17" id="17"/>
+          <p:cNvPr id="17" name="Group 17"/>
           <p:cNvGrpSpPr/>
           <p:nvPr/>
         </p:nvGrpSpPr>
         <p:grpSpPr>
-          <a:xfrm rot="0">
+          <a:xfrm>
             <a:off x="491128" y="4301489"/>
             <a:ext cx="3086100" cy="613411"/>
             <a:chOff x="0" y="0"/>
@@ -3624,12 +3618,12 @@
         </p:grpSpPr>
         <p:sp>
           <p:nvSpPr>
-            <p:cNvPr name="Freeform 18" id="18"/>
+            <p:cNvPr id="18" name="Freeform 18"/>
             <p:cNvSpPr/>
             <p:nvPr/>
           </p:nvSpPr>
           <p:spPr>
-            <a:xfrm flipH="false" flipV="false" rot="0">
+            <a:xfrm>
               <a:off x="0" y="0"/>
               <a:ext cx="812800" cy="161557"/>
             </a:xfrm>
@@ -3638,9 +3632,9 @@
               <a:gdLst/>
               <a:ahLst/>
               <a:cxnLst/>
-              <a:rect r="r" b="b" t="t" l="l"/>
+              <a:rect l="l" t="t" r="r" b="b"/>
               <a:pathLst>
-                <a:path h="161557" w="812800">
+                <a:path w="812800" h="161557">
                   <a:moveTo>
                     <a:pt x="80778" y="0"/>
                   </a:moveTo>
@@ -3692,8 +3686,8 @@
         </p:sp>
         <p:sp>
           <p:nvSpPr>
-            <p:cNvPr name="TextBox 19" id="19"/>
-            <p:cNvSpPr txBox="true"/>
+            <p:cNvPr id="19" name="TextBox 19"/>
+            <p:cNvSpPr txBox="1"/>
             <p:nvPr/>
           </p:nvSpPr>
           <p:spPr>
@@ -3706,7 +3700,7 @@
             </a:prstGeom>
           </p:spPr>
           <p:txBody>
-            <a:bodyPr anchor="ctr" rtlCol="false" tIns="50800" lIns="50800" bIns="50800" rIns="50800"/>
+            <a:bodyPr lIns="50800" tIns="50800" rIns="50800" bIns="50800" rtlCol="0" anchor="ctr"/>
             <a:lstStyle/>
             <a:p>
               <a:pPr algn="ctr">
@@ -3714,18 +3708,19 @@
                   <a:spcPts val="2239"/>
                 </a:lnSpc>
               </a:pPr>
+              <a:endParaRPr/>
             </a:p>
           </p:txBody>
         </p:sp>
       </p:grpSp>
       <p:grpSp>
         <p:nvGrpSpPr>
-          <p:cNvPr name="Group 20" id="20"/>
+          <p:cNvPr id="20" name="Group 20"/>
           <p:cNvGrpSpPr/>
           <p:nvPr/>
         </p:nvGrpSpPr>
         <p:grpSpPr>
-          <a:xfrm rot="0">
+          <a:xfrm>
             <a:off x="491128" y="5253037"/>
             <a:ext cx="4142956" cy="613411"/>
             <a:chOff x="0" y="0"/>
@@ -3734,12 +3729,12 @@
         </p:grpSpPr>
         <p:sp>
           <p:nvSpPr>
-            <p:cNvPr name="Freeform 21" id="21"/>
+            <p:cNvPr id="21" name="Freeform 21"/>
             <p:cNvSpPr/>
             <p:nvPr/>
           </p:nvSpPr>
           <p:spPr>
-            <a:xfrm flipH="false" flipV="false" rot="0">
+            <a:xfrm>
               <a:off x="0" y="0"/>
               <a:ext cx="1091149" cy="161557"/>
             </a:xfrm>
@@ -3748,9 +3743,9 @@
               <a:gdLst/>
               <a:ahLst/>
               <a:cxnLst/>
-              <a:rect r="r" b="b" t="t" l="l"/>
+              <a:rect l="l" t="t" r="r" b="b"/>
               <a:pathLst>
-                <a:path h="161557" w="1091149">
+                <a:path w="1091149" h="161557">
                   <a:moveTo>
                     <a:pt x="80778" y="0"/>
                   </a:moveTo>
@@ -3802,8 +3797,8 @@
         </p:sp>
         <p:sp>
           <p:nvSpPr>
-            <p:cNvPr name="TextBox 22" id="22"/>
-            <p:cNvSpPr txBox="true"/>
+            <p:cNvPr id="22" name="TextBox 22"/>
+            <p:cNvSpPr txBox="1"/>
             <p:nvPr/>
           </p:nvSpPr>
           <p:spPr>
@@ -3816,7 +3811,7 @@
             </a:prstGeom>
           </p:spPr>
           <p:txBody>
-            <a:bodyPr anchor="ctr" rtlCol="false" tIns="50800" lIns="50800" bIns="50800" rIns="50800"/>
+            <a:bodyPr lIns="50800" tIns="50800" rIns="50800" bIns="50800" rtlCol="0" anchor="ctr"/>
             <a:lstStyle/>
             <a:p>
               <a:pPr algn="ctr">
@@ -3824,18 +3819,19 @@
                   <a:spcPts val="2239"/>
                 </a:lnSpc>
               </a:pPr>
+              <a:endParaRPr/>
             </a:p>
           </p:txBody>
         </p:sp>
       </p:grpSp>
       <p:grpSp>
         <p:nvGrpSpPr>
-          <p:cNvPr name="Group 23" id="23"/>
+          <p:cNvPr id="23" name="Group 23"/>
           <p:cNvGrpSpPr/>
           <p:nvPr/>
         </p:nvGrpSpPr>
         <p:grpSpPr>
-          <a:xfrm rot="0">
+          <a:xfrm>
             <a:off x="491128" y="6152199"/>
             <a:ext cx="2306166" cy="613411"/>
             <a:chOff x="0" y="0"/>
@@ -3844,12 +3840,12 @@
         </p:grpSpPr>
         <p:sp>
           <p:nvSpPr>
-            <p:cNvPr name="Freeform 24" id="24"/>
+            <p:cNvPr id="24" name="Freeform 24"/>
             <p:cNvSpPr/>
             <p:nvPr/>
           </p:nvSpPr>
           <p:spPr>
-            <a:xfrm flipH="false" flipV="false" rot="0">
+            <a:xfrm>
               <a:off x="0" y="0"/>
               <a:ext cx="607385" cy="161557"/>
             </a:xfrm>
@@ -3858,9 +3854,9 @@
               <a:gdLst/>
               <a:ahLst/>
               <a:cxnLst/>
-              <a:rect r="r" b="b" t="t" l="l"/>
+              <a:rect l="l" t="t" r="r" b="b"/>
               <a:pathLst>
-                <a:path h="161557" w="607385">
+                <a:path w="607385" h="161557">
                   <a:moveTo>
                     <a:pt x="80778" y="0"/>
                   </a:moveTo>
@@ -3912,8 +3908,8 @@
         </p:sp>
         <p:sp>
           <p:nvSpPr>
-            <p:cNvPr name="TextBox 25" id="25"/>
-            <p:cNvSpPr txBox="true"/>
+            <p:cNvPr id="25" name="TextBox 25"/>
+            <p:cNvSpPr txBox="1"/>
             <p:nvPr/>
           </p:nvSpPr>
           <p:spPr>
@@ -3926,7 +3922,7 @@
             </a:prstGeom>
           </p:spPr>
           <p:txBody>
-            <a:bodyPr anchor="ctr" rtlCol="false" tIns="50800" lIns="50800" bIns="50800" rIns="50800"/>
+            <a:bodyPr lIns="50800" tIns="50800" rIns="50800" bIns="50800" rtlCol="0" anchor="ctr"/>
             <a:lstStyle/>
             <a:p>
               <a:pPr algn="ctr">
@@ -3934,18 +3930,19 @@
                   <a:spcPts val="2239"/>
                 </a:lnSpc>
               </a:pPr>
+              <a:endParaRPr/>
             </a:p>
           </p:txBody>
         </p:sp>
       </p:grpSp>
       <p:grpSp>
         <p:nvGrpSpPr>
-          <p:cNvPr name="Group 26" id="26"/>
+          <p:cNvPr id="26" name="Group 26"/>
           <p:cNvGrpSpPr/>
           <p:nvPr/>
         </p:nvGrpSpPr>
         <p:grpSpPr>
-          <a:xfrm rot="0">
+          <a:xfrm>
             <a:off x="491128" y="7046598"/>
             <a:ext cx="5382396" cy="641986"/>
             <a:chOff x="0" y="0"/>
@@ -3954,12 +3951,12 @@
         </p:grpSpPr>
         <p:sp>
           <p:nvSpPr>
-            <p:cNvPr name="Freeform 27" id="27"/>
+            <p:cNvPr id="27" name="Freeform 27"/>
             <p:cNvSpPr/>
             <p:nvPr/>
           </p:nvSpPr>
           <p:spPr>
-            <a:xfrm flipH="false" flipV="false" rot="0">
+            <a:xfrm>
               <a:off x="0" y="0"/>
               <a:ext cx="1417586" cy="169083"/>
             </a:xfrm>
@@ -3968,9 +3965,9 @@
               <a:gdLst/>
               <a:ahLst/>
               <a:cxnLst/>
-              <a:rect r="r" b="b" t="t" l="l"/>
+              <a:rect l="l" t="t" r="r" b="b"/>
               <a:pathLst>
-                <a:path h="169083" w="1417586">
+                <a:path w="1417586" h="169083">
                   <a:moveTo>
                     <a:pt x="84541" y="0"/>
                   </a:moveTo>
@@ -4037,8 +4034,8 @@
         </p:sp>
         <p:sp>
           <p:nvSpPr>
-            <p:cNvPr name="TextBox 28" id="28"/>
-            <p:cNvSpPr txBox="true"/>
+            <p:cNvPr id="28" name="TextBox 28"/>
+            <p:cNvSpPr txBox="1"/>
             <p:nvPr/>
           </p:nvSpPr>
           <p:spPr>
@@ -4051,7 +4048,7 @@
             </a:prstGeom>
           </p:spPr>
           <p:txBody>
-            <a:bodyPr anchor="ctr" rtlCol="false" tIns="50800" lIns="50800" bIns="50800" rIns="50800"/>
+            <a:bodyPr lIns="50800" tIns="50800" rIns="50800" bIns="50800" rtlCol="0" anchor="ctr"/>
             <a:lstStyle/>
             <a:p>
               <a:pPr algn="ctr">
@@ -4059,18 +4056,19 @@
                   <a:spcPts val="2239"/>
                 </a:lnSpc>
               </a:pPr>
+              <a:endParaRPr/>
             </a:p>
           </p:txBody>
         </p:sp>
       </p:grpSp>
       <p:sp>
         <p:nvSpPr>
-          <p:cNvPr name="Freeform 29" id="29"/>
+          <p:cNvPr id="29" name="Freeform 29"/>
           <p:cNvSpPr/>
           <p:nvPr/>
         </p:nvSpPr>
         <p:spPr>
-          <a:xfrm flipH="false" flipV="false" rot="0">
+          <a:xfrm>
             <a:off x="13040466" y="491958"/>
             <a:ext cx="5063940" cy="701725"/>
           </a:xfrm>
@@ -4079,9 +4077,9 @@
             <a:gdLst/>
             <a:ahLst/>
             <a:cxnLst/>
-            <a:rect r="r" b="b" t="t" l="l"/>
+            <a:rect l="l" t="t" r="r" b="b"/>
             <a:pathLst>
-              <a:path h="701725" w="5063940">
+              <a:path w="5063940" h="701725">
                 <a:moveTo>
                   <a:pt x="0" y="0"/>
                 </a:moveTo>
@@ -4104,19 +4102,19 @@
           <a:blipFill>
             <a:blip r:embed="rId5"/>
             <a:stretch>
-              <a:fillRect l="0" t="-83680" r="0" b="-92978"/>
+              <a:fillRect t="-83680" b="-92978"/>
             </a:stretch>
           </a:blipFill>
         </p:spPr>
       </p:sp>
       <p:sp>
         <p:nvSpPr>
-          <p:cNvPr name="Freeform 30" id="30"/>
+          <p:cNvPr id="30" name="Freeform 30"/>
           <p:cNvSpPr/>
           <p:nvPr/>
         </p:nvSpPr>
         <p:spPr>
-          <a:xfrm flipH="false" flipV="false" rot="0">
+          <a:xfrm>
             <a:off x="7797895" y="180935"/>
             <a:ext cx="1288097" cy="1323772"/>
           </a:xfrm>
@@ -4125,9 +4123,9 @@
             <a:gdLst/>
             <a:ahLst/>
             <a:cxnLst/>
-            <a:rect r="r" b="b" t="t" l="l"/>
+            <a:rect l="l" t="t" r="r" b="b"/>
             <a:pathLst>
-              <a:path h="1323772" w="1288097">
+              <a:path w="1288097" h="1323772">
                 <a:moveTo>
                   <a:pt x="0" y="0"/>
                 </a:moveTo>
@@ -4157,12 +4155,12 @@
       </p:sp>
       <p:sp>
         <p:nvSpPr>
-          <p:cNvPr name="Freeform 31" id="31"/>
+          <p:cNvPr id="31" name="Freeform 31"/>
           <p:cNvSpPr/>
           <p:nvPr/>
         </p:nvSpPr>
         <p:spPr>
-          <a:xfrm flipH="false" flipV="false" rot="0">
+          <a:xfrm>
             <a:off x="283426" y="378579"/>
             <a:ext cx="3690501" cy="1185729"/>
           </a:xfrm>
@@ -4171,9 +4169,9 @@
             <a:gdLst/>
             <a:ahLst/>
             <a:cxnLst/>
-            <a:rect r="r" b="b" t="t" l="l"/>
+            <a:rect l="l" t="t" r="r" b="b"/>
             <a:pathLst>
-              <a:path h="1185729" w="3690501">
+              <a:path w="3690501" h="1185729">
                 <a:moveTo>
                   <a:pt x="0" y="0"/>
                 </a:moveTo>
@@ -4196,19 +4194,19 @@
           <a:blipFill>
             <a:blip r:embed="rId7"/>
             <a:stretch>
-              <a:fillRect l="0" t="-20769" r="0" b="-7813"/>
+              <a:fillRect t="-20769" b="-7813"/>
             </a:stretch>
           </a:blipFill>
         </p:spPr>
       </p:sp>
       <p:sp>
         <p:nvSpPr>
-          <p:cNvPr name="Freeform 32" id="32"/>
+          <p:cNvPr id="32" name="Freeform 32"/>
           <p:cNvSpPr/>
           <p:nvPr/>
         </p:nvSpPr>
         <p:spPr>
-          <a:xfrm flipH="false" flipV="false" rot="0">
+          <a:xfrm>
             <a:off x="9966719" y="336677"/>
             <a:ext cx="3036860" cy="1012287"/>
           </a:xfrm>
@@ -4217,9 +4215,9 @@
             <a:gdLst/>
             <a:ahLst/>
             <a:cxnLst/>
-            <a:rect r="r" b="b" t="t" l="l"/>
+            <a:rect l="l" t="t" r="r" b="b"/>
             <a:pathLst>
-              <a:path h="1012287" w="3036860">
+              <a:path w="3036860" h="1012287">
                 <a:moveTo>
                   <a:pt x="0" y="0"/>
                 </a:moveTo>
@@ -4242,19 +4240,19 @@
           <a:blipFill>
             <a:blip r:embed="rId8"/>
             <a:stretch>
-              <a:fillRect l="0" t="0" r="0" b="0"/>
+              <a:fillRect/>
             </a:stretch>
           </a:blipFill>
         </p:spPr>
       </p:sp>
       <p:sp>
         <p:nvSpPr>
-          <p:cNvPr name="Freeform 33" id="33"/>
+          <p:cNvPr id="33" name="Freeform 33"/>
           <p:cNvSpPr/>
           <p:nvPr/>
         </p:nvSpPr>
         <p:spPr>
-          <a:xfrm flipH="false" flipV="false" rot="0">
+          <a:xfrm>
             <a:off x="4634084" y="173017"/>
             <a:ext cx="2192261" cy="1276152"/>
           </a:xfrm>
@@ -4263,9 +4261,9 @@
             <a:gdLst/>
             <a:ahLst/>
             <a:cxnLst/>
-            <a:rect r="r" b="b" t="t" l="l"/>
+            <a:rect l="l" t="t" r="r" b="b"/>
             <a:pathLst>
-              <a:path h="1276152" w="2192261">
+              <a:path w="2192261" h="1276152">
                 <a:moveTo>
                   <a:pt x="0" y="0"/>
                 </a:moveTo>
@@ -4288,19 +4286,19 @@
           <a:blipFill>
             <a:blip r:embed="rId9"/>
             <a:stretch>
-              <a:fillRect l="0" t="0" r="0" b="0"/>
+              <a:fillRect/>
             </a:stretch>
           </a:blipFill>
         </p:spPr>
       </p:sp>
       <p:sp>
         <p:nvSpPr>
-          <p:cNvPr name="TextBox 34" id="34"/>
-          <p:cNvSpPr txBox="true"/>
+          <p:cNvPr id="34" name="TextBox 34"/>
+          <p:cNvSpPr txBox="1"/>
           <p:nvPr/>
         </p:nvSpPr>
         <p:spPr>
-          <a:xfrm rot="0">
+          <a:xfrm>
             <a:off x="8316142" y="9882546"/>
             <a:ext cx="1743273" cy="264135"/>
           </a:xfrm>
@@ -4309,7 +4307,7 @@
           </a:prstGeom>
         </p:spPr>
         <p:txBody>
-          <a:bodyPr anchor="t" rtlCol="false" tIns="0" lIns="0" bIns="0" rIns="0">
+          <a:bodyPr lIns="0" tIns="0" rIns="0" bIns="0" rtlCol="0" anchor="t">
             <a:spAutoFit/>
           </a:bodyPr>
           <a:lstStyle/>
@@ -4336,12 +4334,12 @@
       </p:sp>
       <p:sp>
         <p:nvSpPr>
-          <p:cNvPr name="TextBox 35" id="35"/>
-          <p:cNvSpPr txBox="true"/>
+          <p:cNvPr id="35" name="TextBox 35"/>
+          <p:cNvSpPr txBox="1"/>
           <p:nvPr/>
         </p:nvSpPr>
         <p:spPr>
-          <a:xfrm rot="0">
+          <a:xfrm>
             <a:off x="756518" y="4263389"/>
             <a:ext cx="2571155" cy="580391"/>
           </a:xfrm>
@@ -4350,7 +4348,7 @@
           </a:prstGeom>
         </p:spPr>
         <p:txBody>
-          <a:bodyPr anchor="t" rtlCol="false" tIns="0" lIns="0" bIns="0" rIns="0" wrap="none">
+          <a:bodyPr wrap="none" lIns="0" tIns="0" rIns="0" bIns="0" rtlCol="0" anchor="t">
             <a:spAutoFit/>
           </a:bodyPr>
           <a:lstStyle/>
@@ -4377,12 +4375,12 @@
       </p:sp>
       <p:sp>
         <p:nvSpPr>
-          <p:cNvPr name="TextBox 36" id="36"/>
-          <p:cNvSpPr txBox="true"/>
+          <p:cNvPr id="36" name="TextBox 36"/>
+          <p:cNvSpPr txBox="1"/>
           <p:nvPr/>
         </p:nvSpPr>
         <p:spPr>
-          <a:xfrm rot="0">
+          <a:xfrm>
             <a:off x="737468" y="5200650"/>
             <a:ext cx="3711416" cy="622936"/>
           </a:xfrm>
@@ -4391,7 +4389,7 @@
           </a:prstGeom>
         </p:spPr>
         <p:txBody>
-          <a:bodyPr anchor="t" rtlCol="false" tIns="0" lIns="0" bIns="0" rIns="0" wrap="none">
+          <a:bodyPr wrap="none" lIns="0" tIns="0" rIns="0" bIns="0" rtlCol="0" anchor="t">
             <a:spAutoFit/>
           </a:bodyPr>
           <a:lstStyle/>
@@ -4418,12 +4416,12 @@
       </p:sp>
       <p:sp>
         <p:nvSpPr>
-          <p:cNvPr name="TextBox 37" id="37"/>
-          <p:cNvSpPr txBox="true"/>
+          <p:cNvPr id="37" name="TextBox 37"/>
+          <p:cNvSpPr txBox="1"/>
           <p:nvPr/>
         </p:nvSpPr>
         <p:spPr>
-          <a:xfrm rot="0">
+          <a:xfrm>
             <a:off x="771877" y="6085524"/>
             <a:ext cx="1347142" cy="596901"/>
           </a:xfrm>
@@ -4432,7 +4430,7 @@
           </a:prstGeom>
         </p:spPr>
         <p:txBody>
-          <a:bodyPr anchor="t" rtlCol="false" tIns="0" lIns="0" bIns="0" rIns="0" wrap="none">
+          <a:bodyPr wrap="none" lIns="0" tIns="0" rIns="0" bIns="0" rtlCol="0" anchor="t">
             <a:spAutoFit/>
           </a:bodyPr>
           <a:lstStyle/>
@@ -4459,12 +4457,12 @@
       </p:sp>
       <p:sp>
         <p:nvSpPr>
-          <p:cNvPr name="TextBox 38" id="38"/>
-          <p:cNvSpPr txBox="true"/>
+          <p:cNvPr id="38" name="TextBox 38"/>
+          <p:cNvSpPr txBox="1"/>
           <p:nvPr/>
         </p:nvSpPr>
         <p:spPr>
-          <a:xfrm rot="0">
+          <a:xfrm>
             <a:off x="756518" y="7008498"/>
             <a:ext cx="5016937" cy="596901"/>
           </a:xfrm>
@@ -4473,7 +4471,7 @@
           </a:prstGeom>
         </p:spPr>
         <p:txBody>
-          <a:bodyPr anchor="t" rtlCol="false" tIns="0" lIns="0" bIns="0" rIns="0" wrap="none">
+          <a:bodyPr wrap="none" lIns="0" tIns="0" rIns="0" bIns="0" rtlCol="0" anchor="t">
             <a:spAutoFit/>
           </a:bodyPr>
           <a:lstStyle/>
@@ -4506,8 +4504,8 @@
         </p:nvSpPr>
         <p:spPr>
           <a:xfrm>
-            <a:off x="3727228" y="4301489"/>
-            <a:ext cx="6500000" cy="613411"/>
+            <a:off x="3636723" y="4303632"/>
+            <a:ext cx="1534394" cy="584775"/>
           </a:xfrm>
           <a:prstGeom prst="rect">
             <a:avLst/>
@@ -4521,7 +4519,7 @@
           <a:lstStyle/>
           <a:p>
             <a:r>
-              <a:rPr sz="2400" b="1">
+              <a:rPr sz="3200" b="1" dirty="0" err="1">
                 <a:solidFill>
                   <a:srgbClr val="000000"/>
                 </a:solidFill>
@@ -4529,6 +4527,12 @@
               </a:rPr>
               <a:t>lwyrup</a:t>
             </a:r>
+            <a:endParaRPr sz="3200" b="1" dirty="0">
+              <a:solidFill>
+                <a:srgbClr val="000000"/>
+              </a:solidFill>
+              <a:latin typeface="IBM Plex Sans"/>
+            </a:endParaRPr>
           </a:p>
         </p:txBody>
       </p:sp>
@@ -4540,8 +4544,8 @@
         </p:nvSpPr>
         <p:spPr>
           <a:xfrm>
-            <a:off x="4784084" y="5253037"/>
-            <a:ext cx="6500000" cy="613411"/>
+            <a:off x="4756553" y="5323762"/>
+            <a:ext cx="3438762" cy="523220"/>
           </a:xfrm>
           <a:prstGeom prst="rect">
             <a:avLst/>
@@ -4555,7 +4559,7 @@
           <a:lstStyle/>
           <a:p>
             <a:r>
-              <a:rPr sz="2400" b="1">
+              <a:rPr sz="2800" b="1" dirty="0">
                 <a:solidFill>
                   <a:srgbClr val="000000"/>
                 </a:solidFill>
@@ -4574,8 +4578,8 @@
         </p:nvSpPr>
         <p:spPr>
           <a:xfrm>
-            <a:off x="2947294" y="6152199"/>
-            <a:ext cx="6500000" cy="613411"/>
+            <a:off x="2947294" y="6197294"/>
+            <a:ext cx="5681363" cy="523220"/>
           </a:xfrm>
           <a:prstGeom prst="rect">
             <a:avLst/>
@@ -4589,7 +4593,7 @@
           <a:lstStyle/>
           <a:p>
             <a:r>
-              <a:rPr sz="2400" b="1">
+              <a:rPr sz="2800" b="1" dirty="0">
                 <a:solidFill>
                   <a:srgbClr val="000000"/>
                 </a:solidFill>
@@ -4608,8 +4612,8 @@
         </p:nvSpPr>
         <p:spPr>
           <a:xfrm>
-            <a:off x="6023524" y="7046598"/>
-            <a:ext cx="6500000" cy="641986"/>
+            <a:off x="5887940" y="7088664"/>
+            <a:ext cx="6538970" cy="523220"/>
           </a:xfrm>
           <a:prstGeom prst="rect">
             <a:avLst/>
@@ -4623,7 +4627,7 @@
           <a:lstStyle/>
           <a:p>
             <a:r>
-              <a:rPr sz="2400" b="1">
+              <a:rPr sz="2800" b="1" dirty="0">
                 <a:solidFill>
                   <a:srgbClr val="000000"/>
                 </a:solidFill>
@@ -4643,13 +4647,14 @@
 </file>
 
 <file path=ppt/slides/slide10.xml><?xml version="1.0" encoding="utf-8"?>
-<p:sld xmlns:p="http://schemas.openxmlformats.org/presentationml/2006/main" xmlns:a="http://schemas.openxmlformats.org/drawingml/2006/main" xmlns:r="http://schemas.openxmlformats.org/officeDocument/2006/relationships">
+<p:sld xmlns:a="http://schemas.openxmlformats.org/drawingml/2006/main" xmlns:r="http://schemas.openxmlformats.org/officeDocument/2006/relationships" xmlns:p="http://schemas.openxmlformats.org/presentationml/2006/main">
   <p:cSld>
     <p:bg>
       <p:bgPr>
         <a:solidFill>
           <a:srgbClr val="B48AF7"/>
         </a:solidFill>
+        <a:effectLst/>
       </p:bgPr>
     </p:bg>
     <p:spTree>
@@ -4668,12 +4673,12 @@
       </p:grpSpPr>
       <p:grpSp>
         <p:nvGrpSpPr>
-          <p:cNvPr name="Group 2" id="2"/>
+          <p:cNvPr id="2" name="Group 2"/>
           <p:cNvGrpSpPr/>
           <p:nvPr/>
         </p:nvGrpSpPr>
         <p:grpSpPr>
-          <a:xfrm rot="0">
+          <a:xfrm>
             <a:off x="-1597105" y="2516808"/>
             <a:ext cx="2625805" cy="830953"/>
             <a:chOff x="0" y="0"/>
@@ -4682,12 +4687,12 @@
         </p:grpSpPr>
         <p:sp>
           <p:nvSpPr>
-            <p:cNvPr name="Freeform 3" id="3"/>
+            <p:cNvPr id="3" name="Freeform 3"/>
             <p:cNvSpPr/>
             <p:nvPr/>
           </p:nvSpPr>
           <p:spPr>
-            <a:xfrm flipH="false" flipV="false" rot="0">
+            <a:xfrm>
               <a:off x="0" y="0"/>
               <a:ext cx="5816600" cy="1840738"/>
             </a:xfrm>
@@ -4696,9 +4701,9 @@
               <a:gdLst/>
               <a:ahLst/>
               <a:cxnLst/>
-              <a:rect r="r" b="b" t="t" l="l"/>
+              <a:rect l="l" t="t" r="r" b="b"/>
               <a:pathLst>
-                <a:path h="1840738" w="5816600">
+                <a:path w="5816600" h="1840738">
                   <a:moveTo>
                     <a:pt x="0" y="0"/>
                   </a:moveTo>
@@ -4721,7 +4726,7 @@
             <a:blipFill>
               <a:blip r:embed="rId2"/>
               <a:stretch>
-                <a:fillRect l="0" t="0" r="0" b="2"/>
+                <a:fillRect b="2"/>
               </a:stretch>
             </a:blipFill>
           </p:spPr>
@@ -4729,12 +4734,12 @@
       </p:grpSp>
       <p:grpSp>
         <p:nvGrpSpPr>
-          <p:cNvPr name="Group 4" id="4"/>
+          <p:cNvPr id="4" name="Group 4"/>
           <p:cNvGrpSpPr/>
           <p:nvPr/>
         </p:nvGrpSpPr>
         <p:grpSpPr>
-          <a:xfrm rot="0">
+          <a:xfrm>
             <a:off x="2928206" y="9780631"/>
             <a:ext cx="2625805" cy="830953"/>
             <a:chOff x="0" y="0"/>
@@ -4743,12 +4748,12 @@
         </p:grpSpPr>
         <p:sp>
           <p:nvSpPr>
-            <p:cNvPr name="Freeform 5" id="5"/>
+            <p:cNvPr id="5" name="Freeform 5"/>
             <p:cNvSpPr/>
             <p:nvPr/>
           </p:nvSpPr>
           <p:spPr>
-            <a:xfrm flipH="false" flipV="false" rot="0">
+            <a:xfrm>
               <a:off x="0" y="0"/>
               <a:ext cx="5816600" cy="1840738"/>
             </a:xfrm>
@@ -4757,9 +4762,9 @@
               <a:gdLst/>
               <a:ahLst/>
               <a:cxnLst/>
-              <a:rect r="r" b="b" t="t" l="l"/>
+              <a:rect l="l" t="t" r="r" b="b"/>
               <a:pathLst>
-                <a:path h="1840738" w="5816600">
+                <a:path w="5816600" h="1840738">
                   <a:moveTo>
                     <a:pt x="0" y="0"/>
                   </a:moveTo>
@@ -4782,7 +4787,7 @@
             <a:blipFill>
               <a:blip r:embed="rId2"/>
               <a:stretch>
-                <a:fillRect l="0" t="0" r="0" b="2"/>
+                <a:fillRect b="2"/>
               </a:stretch>
             </a:blipFill>
           </p:spPr>
@@ -4790,12 +4795,12 @@
       </p:grpSp>
       <p:grpSp>
         <p:nvGrpSpPr>
-          <p:cNvPr name="Group 6" id="6"/>
+          <p:cNvPr id="6" name="Group 6"/>
           <p:cNvGrpSpPr/>
           <p:nvPr/>
         </p:nvGrpSpPr>
         <p:grpSpPr>
-          <a:xfrm rot="0">
+          <a:xfrm>
             <a:off x="13367623" y="9656173"/>
             <a:ext cx="2625805" cy="830953"/>
             <a:chOff x="0" y="0"/>
@@ -4804,12 +4809,12 @@
         </p:grpSpPr>
         <p:sp>
           <p:nvSpPr>
-            <p:cNvPr name="Freeform 7" id="7"/>
+            <p:cNvPr id="7" name="Freeform 7"/>
             <p:cNvSpPr/>
             <p:nvPr/>
           </p:nvSpPr>
           <p:spPr>
-            <a:xfrm flipH="false" flipV="false" rot="0">
+            <a:xfrm>
               <a:off x="0" y="0"/>
               <a:ext cx="5816600" cy="1840738"/>
             </a:xfrm>
@@ -4818,9 +4823,9 @@
               <a:gdLst/>
               <a:ahLst/>
               <a:cxnLst/>
-              <a:rect r="r" b="b" t="t" l="l"/>
+              <a:rect l="l" t="t" r="r" b="b"/>
               <a:pathLst>
-                <a:path h="1840738" w="5816600">
+                <a:path w="5816600" h="1840738">
                   <a:moveTo>
                     <a:pt x="0" y="0"/>
                   </a:moveTo>
@@ -4843,7 +4848,7 @@
             <a:blipFill>
               <a:blip r:embed="rId2"/>
               <a:stretch>
-                <a:fillRect l="0" t="0" r="0" b="2"/>
+                <a:fillRect b="2"/>
               </a:stretch>
             </a:blipFill>
           </p:spPr>
@@ -4851,12 +4856,12 @@
       </p:grpSp>
       <p:grpSp>
         <p:nvGrpSpPr>
-          <p:cNvPr name="Group 8" id="8"/>
+          <p:cNvPr id="8" name="Group 8"/>
           <p:cNvGrpSpPr/>
           <p:nvPr/>
         </p:nvGrpSpPr>
         <p:grpSpPr>
-          <a:xfrm rot="0">
+          <a:xfrm>
             <a:off x="7990242" y="9984655"/>
             <a:ext cx="173987" cy="173987"/>
             <a:chOff x="0" y="0"/>
@@ -4865,12 +4870,12 @@
         </p:grpSpPr>
         <p:sp>
           <p:nvSpPr>
-            <p:cNvPr name="Freeform 9" id="9"/>
+            <p:cNvPr id="9" name="Freeform 9"/>
             <p:cNvSpPr/>
             <p:nvPr/>
           </p:nvSpPr>
           <p:spPr>
-            <a:xfrm flipH="false" flipV="false" rot="0">
+            <a:xfrm>
               <a:off x="0" y="0"/>
               <a:ext cx="812800" cy="812800"/>
             </a:xfrm>
@@ -4879,9 +4884,9 @@
               <a:gdLst/>
               <a:ahLst/>
               <a:cxnLst/>
-              <a:rect r="r" b="b" t="t" l="l"/>
+              <a:rect l="l" t="t" r="r" b="b"/>
               <a:pathLst>
-                <a:path h="812800" w="812800">
+                <a:path w="812800" h="812800">
                   <a:moveTo>
                     <a:pt x="406400" y="0"/>
                   </a:moveTo>
@@ -4916,8 +4921,8 @@
         </p:sp>
         <p:sp>
           <p:nvSpPr>
-            <p:cNvPr name="TextBox 10" id="10"/>
-            <p:cNvSpPr txBox="true"/>
+            <p:cNvPr id="10" name="TextBox 10"/>
+            <p:cNvSpPr txBox="1"/>
             <p:nvPr/>
           </p:nvSpPr>
           <p:spPr>
@@ -4930,7 +4935,7 @@
             </a:prstGeom>
           </p:spPr>
           <p:txBody>
-            <a:bodyPr anchor="ctr" rtlCol="false" tIns="50800" lIns="50800" bIns="50800" rIns="50800"/>
+            <a:bodyPr lIns="50800" tIns="50800" rIns="50800" bIns="50800" rtlCol="0" anchor="ctr"/>
             <a:lstStyle/>
             <a:p>
               <a:pPr algn="ctr">
@@ -4938,18 +4943,19 @@
                   <a:spcPts val="2239"/>
                 </a:lnSpc>
               </a:pPr>
+              <a:endParaRPr/>
             </a:p>
           </p:txBody>
         </p:sp>
       </p:grpSp>
       <p:grpSp>
         <p:nvGrpSpPr>
-          <p:cNvPr name="Group 11" id="11"/>
+          <p:cNvPr id="11" name="Group 11"/>
           <p:cNvGrpSpPr/>
           <p:nvPr/>
         </p:nvGrpSpPr>
         <p:grpSpPr>
-          <a:xfrm rot="0">
+          <a:xfrm>
             <a:off x="10353346" y="9948585"/>
             <a:ext cx="173987" cy="173987"/>
             <a:chOff x="0" y="0"/>
@@ -4958,12 +4964,12 @@
         </p:grpSpPr>
         <p:sp>
           <p:nvSpPr>
-            <p:cNvPr name="Freeform 12" id="12"/>
+            <p:cNvPr id="12" name="Freeform 12"/>
             <p:cNvSpPr/>
             <p:nvPr/>
           </p:nvSpPr>
           <p:spPr>
-            <a:xfrm flipH="false" flipV="false" rot="0">
+            <a:xfrm>
               <a:off x="0" y="0"/>
               <a:ext cx="812800" cy="812800"/>
             </a:xfrm>
@@ -4972,9 +4978,9 @@
               <a:gdLst/>
               <a:ahLst/>
               <a:cxnLst/>
-              <a:rect r="r" b="b" t="t" l="l"/>
+              <a:rect l="l" t="t" r="r" b="b"/>
               <a:pathLst>
-                <a:path h="812800" w="812800">
+                <a:path w="812800" h="812800">
                   <a:moveTo>
                     <a:pt x="406400" y="0"/>
                   </a:moveTo>
@@ -5009,8 +5015,8 @@
         </p:sp>
         <p:sp>
           <p:nvSpPr>
-            <p:cNvPr name="TextBox 13" id="13"/>
-            <p:cNvSpPr txBox="true"/>
+            <p:cNvPr id="13" name="TextBox 13"/>
+            <p:cNvSpPr txBox="1"/>
             <p:nvPr/>
           </p:nvSpPr>
           <p:spPr>
@@ -5023,7 +5029,7 @@
             </a:prstGeom>
           </p:spPr>
           <p:txBody>
-            <a:bodyPr anchor="ctr" rtlCol="false" tIns="50800" lIns="50800" bIns="50800" rIns="50800"/>
+            <a:bodyPr lIns="50800" tIns="50800" rIns="50800" bIns="50800" rtlCol="0" anchor="ctr"/>
             <a:lstStyle/>
             <a:p>
               <a:pPr algn="ctr">
@@ -5031,18 +5037,19 @@
                   <a:spcPts val="2239"/>
                 </a:lnSpc>
               </a:pPr>
+              <a:endParaRPr/>
             </a:p>
           </p:txBody>
         </p:sp>
       </p:grpSp>
       <p:grpSp>
         <p:nvGrpSpPr>
-          <p:cNvPr name="Group 14" id="14"/>
+          <p:cNvPr id="14" name="Group 14"/>
           <p:cNvGrpSpPr/>
           <p:nvPr/>
         </p:nvGrpSpPr>
         <p:grpSpPr>
-          <a:xfrm rot="0">
+          <a:xfrm>
             <a:off x="6675310" y="1893761"/>
             <a:ext cx="4381968" cy="641986"/>
             <a:chOff x="0" y="0"/>
@@ -5051,12 +5058,12 @@
         </p:grpSpPr>
         <p:sp>
           <p:nvSpPr>
-            <p:cNvPr name="Freeform 15" id="15"/>
+            <p:cNvPr id="15" name="Freeform 15"/>
             <p:cNvSpPr/>
             <p:nvPr/>
           </p:nvSpPr>
           <p:spPr>
-            <a:xfrm flipH="false" flipV="false" rot="0">
+            <a:xfrm>
               <a:off x="0" y="0"/>
               <a:ext cx="1154099" cy="169083"/>
             </a:xfrm>
@@ -5065,9 +5072,9 @@
               <a:gdLst/>
               <a:ahLst/>
               <a:cxnLst/>
-              <a:rect r="r" b="b" t="t" l="l"/>
+              <a:rect l="l" t="t" r="r" b="b"/>
               <a:pathLst>
-                <a:path h="169083" w="1154099">
+                <a:path w="1154099" h="169083">
                   <a:moveTo>
                     <a:pt x="84541" y="0"/>
                   </a:moveTo>
@@ -5134,8 +5141,8 @@
         </p:sp>
         <p:sp>
           <p:nvSpPr>
-            <p:cNvPr name="TextBox 16" id="16"/>
-            <p:cNvSpPr txBox="true"/>
+            <p:cNvPr id="16" name="TextBox 16"/>
+            <p:cNvSpPr txBox="1"/>
             <p:nvPr/>
           </p:nvSpPr>
           <p:spPr>
@@ -5148,7 +5155,7 @@
             </a:prstGeom>
           </p:spPr>
           <p:txBody>
-            <a:bodyPr anchor="ctr" rtlCol="false" tIns="50800" lIns="50800" bIns="50800" rIns="50800"/>
+            <a:bodyPr lIns="50800" tIns="50800" rIns="50800" bIns="50800" rtlCol="0" anchor="ctr"/>
             <a:lstStyle/>
             <a:p>
               <a:pPr algn="ctr">
@@ -5156,18 +5163,19 @@
                   <a:spcPts val="2239"/>
                 </a:lnSpc>
               </a:pPr>
+              <a:endParaRPr/>
             </a:p>
           </p:txBody>
         </p:sp>
       </p:grpSp>
       <p:sp>
         <p:nvSpPr>
-          <p:cNvPr name="Freeform 17" id="17"/>
+          <p:cNvPr id="17" name="Freeform 17"/>
           <p:cNvSpPr/>
           <p:nvPr/>
         </p:nvSpPr>
         <p:spPr>
-          <a:xfrm flipH="false" flipV="false" rot="0">
+          <a:xfrm>
             <a:off x="13002366" y="-47625"/>
             <a:ext cx="5063940" cy="1941386"/>
           </a:xfrm>
@@ -5176,9 +5184,9 @@
             <a:gdLst/>
             <a:ahLst/>
             <a:cxnLst/>
-            <a:rect r="r" b="b" t="t" l="l"/>
+            <a:rect l="l" t="t" r="r" b="b"/>
             <a:pathLst>
-              <a:path h="1941386" w="5063940">
+              <a:path w="5063940" h="1941386">
                 <a:moveTo>
                   <a:pt x="0" y="0"/>
                 </a:moveTo>
@@ -5201,19 +5209,19 @@
           <a:blipFill>
             <a:blip r:embed="rId3"/>
             <a:stretch>
-              <a:fillRect l="0" t="0" r="0" b="0"/>
+              <a:fillRect/>
             </a:stretch>
           </a:blipFill>
         </p:spPr>
       </p:sp>
       <p:sp>
         <p:nvSpPr>
-          <p:cNvPr name="TextBox 18" id="18"/>
-          <p:cNvSpPr txBox="true"/>
+          <p:cNvPr id="18" name="TextBox 18"/>
+          <p:cNvSpPr txBox="1"/>
           <p:nvPr/>
         </p:nvSpPr>
         <p:spPr>
-          <a:xfrm rot="0">
+          <a:xfrm>
             <a:off x="8316142" y="9882546"/>
             <a:ext cx="1743273" cy="264135"/>
           </a:xfrm>
@@ -5222,7 +5230,7 @@
           </a:prstGeom>
         </p:spPr>
         <p:txBody>
-          <a:bodyPr anchor="t" rtlCol="false" tIns="0" lIns="0" bIns="0" rIns="0">
+          <a:bodyPr lIns="0" tIns="0" rIns="0" bIns="0" rtlCol="0" anchor="t">
             <a:spAutoFit/>
           </a:bodyPr>
           <a:lstStyle/>
@@ -5249,12 +5257,12 @@
       </p:sp>
       <p:sp>
         <p:nvSpPr>
-          <p:cNvPr name="Freeform 19" id="19"/>
+          <p:cNvPr id="19" name="Freeform 19"/>
           <p:cNvSpPr/>
           <p:nvPr/>
         </p:nvSpPr>
         <p:spPr>
-          <a:xfrm flipH="false" flipV="false" rot="0">
+          <a:xfrm>
             <a:off x="7590903" y="-208256"/>
             <a:ext cx="2134862" cy="2130592"/>
           </a:xfrm>
@@ -5263,9 +5271,9 @@
             <a:gdLst/>
             <a:ahLst/>
             <a:cxnLst/>
-            <a:rect r="r" b="b" t="t" l="l"/>
+            <a:rect l="l" t="t" r="r" b="b"/>
             <a:pathLst>
-              <a:path h="2130592" w="2134862">
+              <a:path w="2134862" h="2130592">
                 <a:moveTo>
                   <a:pt x="0" y="0"/>
                 </a:moveTo>
@@ -5288,19 +5296,19 @@
           <a:blipFill>
             <a:blip r:embed="rId4"/>
             <a:stretch>
-              <a:fillRect l="0" t="0" r="0" b="0"/>
+              <a:fillRect/>
             </a:stretch>
           </a:blipFill>
         </p:spPr>
       </p:sp>
       <p:grpSp>
         <p:nvGrpSpPr>
-          <p:cNvPr name="Group 20" id="20"/>
+          <p:cNvPr id="20" name="Group 20"/>
           <p:cNvGrpSpPr/>
           <p:nvPr/>
         </p:nvGrpSpPr>
         <p:grpSpPr>
-          <a:xfrm rot="0">
+          <a:xfrm>
             <a:off x="16388711" y="8987334"/>
             <a:ext cx="1677594" cy="1065265"/>
             <a:chOff x="0" y="0"/>
@@ -5309,12 +5317,12 @@
         </p:grpSpPr>
         <p:sp>
           <p:nvSpPr>
-            <p:cNvPr name="Freeform 21" id="21"/>
+            <p:cNvPr id="21" name="Freeform 21"/>
             <p:cNvSpPr/>
             <p:nvPr/>
           </p:nvSpPr>
           <p:spPr>
-            <a:xfrm flipH="false" flipV="false" rot="0">
+            <a:xfrm>
               <a:off x="0" y="0"/>
               <a:ext cx="4028567" cy="2558161"/>
             </a:xfrm>
@@ -5323,9 +5331,9 @@
               <a:gdLst/>
               <a:ahLst/>
               <a:cxnLst/>
-              <a:rect r="r" b="b" t="t" l="l"/>
+              <a:rect l="l" t="t" r="r" b="b"/>
               <a:pathLst>
-                <a:path h="2558161" w="4028567">
+                <a:path w="4028567" h="2558161">
                   <a:moveTo>
                     <a:pt x="0" y="0"/>
                   </a:moveTo>
@@ -5348,7 +5356,7 @@
             <a:blipFill>
               <a:blip r:embed="rId5"/>
               <a:stretch>
-                <a:fillRect l="0" t="0" r="0" b="1"/>
+                <a:fillRect b="1"/>
               </a:stretch>
             </a:blipFill>
           </p:spPr>
@@ -5356,12 +5364,12 @@
       </p:grpSp>
       <p:grpSp>
         <p:nvGrpSpPr>
-          <p:cNvPr name="Group 22" id="22"/>
+          <p:cNvPr id="22" name="Group 22"/>
           <p:cNvGrpSpPr/>
           <p:nvPr/>
         </p:nvGrpSpPr>
         <p:grpSpPr>
-          <a:xfrm rot="0">
+          <a:xfrm>
             <a:off x="16564806" y="3523271"/>
             <a:ext cx="2625805" cy="830953"/>
             <a:chOff x="0" y="0"/>
@@ -5370,12 +5378,12 @@
         </p:grpSpPr>
         <p:sp>
           <p:nvSpPr>
-            <p:cNvPr name="Freeform 23" id="23"/>
+            <p:cNvPr id="23" name="Freeform 23"/>
             <p:cNvSpPr/>
             <p:nvPr/>
           </p:nvSpPr>
           <p:spPr>
-            <a:xfrm flipH="false" flipV="false" rot="0">
+            <a:xfrm>
               <a:off x="0" y="0"/>
               <a:ext cx="5816600" cy="1840738"/>
             </a:xfrm>
@@ -5384,9 +5392,9 @@
               <a:gdLst/>
               <a:ahLst/>
               <a:cxnLst/>
-              <a:rect r="r" b="b" t="t" l="l"/>
+              <a:rect l="l" t="t" r="r" b="b"/>
               <a:pathLst>
-                <a:path h="1840738" w="5816600">
+                <a:path w="5816600" h="1840738">
                   <a:moveTo>
                     <a:pt x="0" y="0"/>
                   </a:moveTo>
@@ -5409,7 +5417,7 @@
             <a:blipFill>
               <a:blip r:embed="rId2"/>
               <a:stretch>
-                <a:fillRect l="0" t="0" r="0" b="2"/>
+                <a:fillRect b="2"/>
               </a:stretch>
             </a:blipFill>
           </p:spPr>
@@ -5417,12 +5425,12 @@
       </p:grpSp>
       <p:sp>
         <p:nvSpPr>
-          <p:cNvPr name="TextBox 24" id="24"/>
-          <p:cNvSpPr txBox="true"/>
+          <p:cNvPr id="24" name="TextBox 24"/>
+          <p:cNvSpPr txBox="1"/>
           <p:nvPr/>
         </p:nvSpPr>
         <p:spPr>
-          <a:xfrm rot="0">
+          <a:xfrm>
             <a:off x="7391149" y="2009332"/>
             <a:ext cx="3020616" cy="372745"/>
           </a:xfrm>
@@ -5431,7 +5439,7 @@
           </a:prstGeom>
         </p:spPr>
         <p:txBody>
-          <a:bodyPr anchor="t" rtlCol="false" tIns="0" lIns="0" bIns="0" rIns="0" wrap="none">
+          <a:bodyPr wrap="none" lIns="0" tIns="0" rIns="0" bIns="0" rtlCol="0" anchor="t">
             <a:spAutoFit/>
           </a:bodyPr>
           <a:lstStyle/>
@@ -5461,21 +5469,21 @@
       </p:sp>
       <p:sp>
         <p:nvSpPr>
-          <p:cNvPr name="TextBox 25" id="25"/>
-          <p:cNvSpPr txBox="true"/>
+          <p:cNvPr id="25" name="TextBox 25"/>
+          <p:cNvSpPr txBox="1"/>
           <p:nvPr/>
         </p:nvSpPr>
         <p:spPr>
-          <a:xfrm rot="0">
+          <a:xfrm>
             <a:off x="1188720" y="2834640"/>
-            <a:ext cx="14356080" cy="5669280"/>
+            <a:ext cx="14356080" cy="4078039"/>
           </a:xfrm>
           <a:prstGeom prst="rect">
             <a:avLst/>
           </a:prstGeom>
         </p:spPr>
         <p:txBody>
-          <a:bodyPr anchor="t" rtlCol="false" tIns="0" lIns="0" bIns="0" rIns="0" wrap="square">
+          <a:bodyPr wrap="square" lIns="0" tIns="0" rIns="0" bIns="0" rtlCol="0" anchor="t">
             <a:spAutoFit/>
           </a:bodyPr>
           <a:lstStyle/>
@@ -5492,7 +5500,7 @@
               </a:spcAft>
             </a:pPr>
             <a:r>
-              <a:rPr sz="1439" b="0">
+              <a:rPr sz="1439" b="0" dirty="0">
                 <a:solidFill>
                   <a:srgbClr val="FF3131"/>
                 </a:solidFill>
@@ -5501,7 +5509,7 @@
               <a:t>■  </a:t>
             </a:r>
             <a:r>
-              <a:rPr sz="2400" b="1">
+              <a:rPr sz="3200" b="1" dirty="0">
                 <a:solidFill>
                   <a:srgbClr val="000000"/>
                 </a:solidFill>
@@ -5510,13 +5518,31 @@
               <a:t>Prior work: </a:t>
             </a:r>
             <a:r>
-              <a:rPr sz="2400" b="0">
+              <a:rPr sz="3200" b="0" dirty="0">
                 <a:solidFill>
                   <a:srgbClr val="000000"/>
                 </a:solidFill>
                 <a:latin typeface="IBM Plex Sans"/>
               </a:rPr>
-              <a:t>Martina et al. 2022; Pirnay et al. 2022 (forged single-qubit fingerprints; we extend to multi-qubit, calibration-informed forgery); Mutolo et al. 2025 (device fingerprinting from error syndromes, no tested forger).</a:t>
+              <a:t>Martina et al. 2022; </a:t>
+            </a:r>
+            <a:r>
+              <a:rPr sz="3200" b="0" dirty="0" err="1">
+                <a:solidFill>
+                  <a:srgbClr val="000000"/>
+                </a:solidFill>
+                <a:latin typeface="IBM Plex Sans"/>
+              </a:rPr>
+              <a:t>Pirnay</a:t>
+            </a:r>
+            <a:r>
+              <a:rPr sz="3200" b="0" dirty="0">
+                <a:solidFill>
+                  <a:srgbClr val="000000"/>
+                </a:solidFill>
+                <a:latin typeface="IBM Plex Sans"/>
+              </a:rPr>
+              <a:t> et al. 2022 (forged single-qubit fingerprints; we extend to multi-qubit, calibration-informed forgery); Mutolo et al. 2025 (device fingerprinting from error syndromes, no tested forger).</a:t>
             </a:r>
           </a:p>
           <a:p>
@@ -5526,7 +5552,7 @@
               </a:spcAft>
             </a:pPr>
             <a:r>
-              <a:rPr sz="1439" b="0">
+              <a:rPr b="0" dirty="0">
                 <a:solidFill>
                   <a:srgbClr val="FF3131"/>
                 </a:solidFill>
@@ -5535,7 +5561,7 @@
               <a:t>■  </a:t>
             </a:r>
             <a:r>
-              <a:rPr sz="2400" b="1">
+              <a:rPr sz="3200" b="1" dirty="0">
                 <a:solidFill>
                   <a:srgbClr val="000000"/>
                 </a:solidFill>
@@ -5544,7 +5570,7 @@
               <a:t>IBM Quantum Platform: </a:t>
             </a:r>
             <a:r>
-              <a:rPr sz="2400" b="0">
+              <a:rPr sz="3200" b="0" dirty="0">
                 <a:solidFill>
                   <a:srgbClr val="000000"/>
                 </a:solidFill>
@@ -5560,7 +5586,7 @@
               </a:spcAft>
             </a:pPr>
             <a:r>
-              <a:rPr sz="1439" b="0">
+              <a:rPr b="0" dirty="0">
                 <a:solidFill>
                   <a:srgbClr val="FF3131"/>
                 </a:solidFill>
@@ -5569,7 +5595,7 @@
               <a:t>■  </a:t>
             </a:r>
             <a:r>
-              <a:rPr sz="2400" b="1">
+              <a:rPr sz="3200" b="1" dirty="0">
                 <a:solidFill>
                   <a:srgbClr val="000000"/>
                 </a:solidFill>
@@ -5578,13 +5604,76 @@
               <a:t>Software: </a:t>
             </a:r>
             <a:r>
-              <a:rPr sz="2400" b="0">
+              <a:rPr sz="3200" b="0" dirty="0" err="1">
                 <a:solidFill>
                   <a:srgbClr val="000000"/>
                 </a:solidFill>
                 <a:latin typeface="IBM Plex Sans"/>
               </a:rPr>
-              <a:t>Qiskit, Qiskit Aer, Qiskit IBM Runtime, scikit-learn, Streamlit, Altair.</a:t>
+              <a:t>Qiskit</a:t>
+            </a:r>
+            <a:r>
+              <a:rPr sz="3200" b="0" dirty="0">
+                <a:solidFill>
+                  <a:srgbClr val="000000"/>
+                </a:solidFill>
+                <a:latin typeface="IBM Plex Sans"/>
+              </a:rPr>
+              <a:t>, </a:t>
+            </a:r>
+            <a:r>
+              <a:rPr sz="3200" b="0" dirty="0" err="1">
+                <a:solidFill>
+                  <a:srgbClr val="000000"/>
+                </a:solidFill>
+                <a:latin typeface="IBM Plex Sans"/>
+              </a:rPr>
+              <a:t>Qiskit</a:t>
+            </a:r>
+            <a:r>
+              <a:rPr sz="3200" b="0" dirty="0">
+                <a:solidFill>
+                  <a:srgbClr val="000000"/>
+                </a:solidFill>
+                <a:latin typeface="IBM Plex Sans"/>
+              </a:rPr>
+              <a:t> Aer, </a:t>
+            </a:r>
+            <a:r>
+              <a:rPr sz="3200" b="0" dirty="0" err="1">
+                <a:solidFill>
+                  <a:srgbClr val="000000"/>
+                </a:solidFill>
+                <a:latin typeface="IBM Plex Sans"/>
+              </a:rPr>
+              <a:t>Qiskit</a:t>
+            </a:r>
+            <a:r>
+              <a:rPr sz="3200" b="0" dirty="0">
+                <a:solidFill>
+                  <a:srgbClr val="000000"/>
+                </a:solidFill>
+                <a:latin typeface="IBM Plex Sans"/>
+              </a:rPr>
+              <a:t> IBM Runtime, scikit-learn, </a:t>
+            </a:r>
+            <a:r>
+              <a:rPr sz="3200" b="0" dirty="0" err="1">
+                <a:solidFill>
+                  <a:srgbClr val="000000"/>
+                </a:solidFill>
+                <a:latin typeface="IBM Plex Sans"/>
+              </a:rPr>
+              <a:t>Streamlit</a:t>
+            </a:r>
+            <a:r>
+              <a:rPr sz="3200" b="0" dirty="0">
+                <a:solidFill>
+                  <a:srgbClr val="000000"/>
+                </a:solidFill>
+                <a:latin typeface="IBM Plex Sans"/>
+              </a:rPr>
+              <a:t>, Altair.</a:t>
             </a:r>
           </a:p>
           <a:p>
@@ -5594,7 +5683,7 @@
               </a:spcAft>
             </a:pPr>
             <a:r>
-              <a:rPr sz="1439" b="0">
+              <a:rPr b="0" dirty="0">
                 <a:solidFill>
                   <a:srgbClr val="FF3131"/>
                 </a:solidFill>
@@ -5603,7 +5692,7 @@
               <a:t>■  </a:t>
             </a:r>
             <a:r>
-              <a:rPr sz="2400" b="1">
+              <a:rPr sz="3200" b="1" dirty="0">
                 <a:solidFill>
                   <a:srgbClr val="000000"/>
                 </a:solidFill>
@@ -5612,25 +5701,43 @@
               <a:t>Our code: </a:t>
             </a:r>
             <a:r>
-              <a:rPr sz="2400" b="0">
+              <a:rPr sz="3200" b="0" dirty="0">
                 <a:solidFill>
                   <a:srgbClr val="000000"/>
                 </a:solidFill>
                 <a:latin typeface="IBM Plex Sans"/>
               </a:rPr>
-              <a:t>github.com/Karthikeya47/GhostQPU (all implementation is the team's own work).</a:t>
+              <a:t>github.com/Karthikeya47/</a:t>
+            </a:r>
+            <a:r>
+              <a:rPr sz="3200" b="0" dirty="0" err="1">
+                <a:solidFill>
+                  <a:srgbClr val="000000"/>
+                </a:solidFill>
+                <a:latin typeface="IBM Plex Sans"/>
+              </a:rPr>
+              <a:t>GhostQPU</a:t>
+            </a:r>
+            <a:r>
+              <a:rPr sz="3200" b="0" dirty="0">
+                <a:solidFill>
+                  <a:srgbClr val="000000"/>
+                </a:solidFill>
+                <a:latin typeface="IBM Plex Sans"/>
+              </a:rPr>
+              <a:t> (all implementation is the team's own work).</a:t>
             </a:r>
           </a:p>
         </p:txBody>
       </p:sp>
       <p:sp>
         <p:nvSpPr>
-          <p:cNvPr name="Freeform 26" id="26"/>
+          <p:cNvPr id="26" name="Freeform 26"/>
           <p:cNvSpPr/>
           <p:nvPr/>
         </p:nvSpPr>
         <p:spPr>
-          <a:xfrm flipH="false" flipV="false" rot="0">
+          <a:xfrm>
             <a:off x="264376" y="407706"/>
             <a:ext cx="3092172" cy="1030724"/>
           </a:xfrm>
@@ -5639,9 +5746,9 @@
             <a:gdLst/>
             <a:ahLst/>
             <a:cxnLst/>
-            <a:rect r="r" b="b" t="t" l="l"/>
+            <a:rect l="l" t="t" r="r" b="b"/>
             <a:pathLst>
-              <a:path h="1030724" w="3092172">
+              <a:path w="3092172" h="1030724">
                 <a:moveTo>
                   <a:pt x="0" y="0"/>
                 </a:moveTo>
@@ -5664,7 +5771,7 @@
           <a:blipFill>
             <a:blip r:embed="rId6"/>
             <a:stretch>
-              <a:fillRect l="0" t="0" r="0" b="0"/>
+              <a:fillRect/>
             </a:stretch>
           </a:blipFill>
         </p:spPr>
@@ -5678,13 +5785,14 @@
 </file>
 
 <file path=ppt/slides/slide2.xml><?xml version="1.0" encoding="utf-8"?>
-<p:sld xmlns:p="http://schemas.openxmlformats.org/presentationml/2006/main" xmlns:a="http://schemas.openxmlformats.org/drawingml/2006/main" xmlns:r="http://schemas.openxmlformats.org/officeDocument/2006/relationships">
+<p:sld xmlns:a="http://schemas.openxmlformats.org/drawingml/2006/main" xmlns:r="http://schemas.openxmlformats.org/officeDocument/2006/relationships" xmlns:p="http://schemas.openxmlformats.org/presentationml/2006/main">
   <p:cSld>
     <p:bg>
       <p:bgPr>
         <a:solidFill>
           <a:srgbClr val="E0E0E0"/>
         </a:solidFill>
+        <a:effectLst/>
       </p:bgPr>
     </p:bg>
     <p:spTree>
@@ -5703,12 +5811,12 @@
       </p:grpSpPr>
       <p:grpSp>
         <p:nvGrpSpPr>
-          <p:cNvPr name="Group 2" id="2"/>
+          <p:cNvPr id="2" name="Group 2"/>
           <p:cNvGrpSpPr/>
           <p:nvPr/>
         </p:nvGrpSpPr>
         <p:grpSpPr>
-          <a:xfrm rot="0">
+          <a:xfrm>
             <a:off x="-1597105" y="2516808"/>
             <a:ext cx="2625805" cy="830953"/>
             <a:chOff x="0" y="0"/>
@@ -5717,12 +5825,12 @@
         </p:grpSpPr>
         <p:sp>
           <p:nvSpPr>
-            <p:cNvPr name="Freeform 3" id="3"/>
+            <p:cNvPr id="3" name="Freeform 3"/>
             <p:cNvSpPr/>
             <p:nvPr/>
           </p:nvSpPr>
           <p:spPr>
-            <a:xfrm flipH="false" flipV="false" rot="0">
+            <a:xfrm>
               <a:off x="0" y="0"/>
               <a:ext cx="5816600" cy="1840738"/>
             </a:xfrm>
@@ -5731,9 +5839,9 @@
               <a:gdLst/>
               <a:ahLst/>
               <a:cxnLst/>
-              <a:rect r="r" b="b" t="t" l="l"/>
+              <a:rect l="l" t="t" r="r" b="b"/>
               <a:pathLst>
-                <a:path h="1840738" w="5816600">
+                <a:path w="5816600" h="1840738">
                   <a:moveTo>
                     <a:pt x="0" y="0"/>
                   </a:moveTo>
@@ -5756,7 +5864,7 @@
             <a:blipFill>
               <a:blip r:embed="rId2"/>
               <a:stretch>
-                <a:fillRect l="0" t="0" r="0" b="2"/>
+                <a:fillRect b="2"/>
               </a:stretch>
             </a:blipFill>
           </p:spPr>
@@ -5764,12 +5872,12 @@
       </p:grpSp>
       <p:grpSp>
         <p:nvGrpSpPr>
-          <p:cNvPr name="Group 4" id="4"/>
+          <p:cNvPr id="4" name="Group 4"/>
           <p:cNvGrpSpPr/>
           <p:nvPr/>
         </p:nvGrpSpPr>
         <p:grpSpPr>
-          <a:xfrm rot="0">
+          <a:xfrm>
             <a:off x="2928206" y="9780631"/>
             <a:ext cx="2625805" cy="830953"/>
             <a:chOff x="0" y="0"/>
@@ -5778,12 +5886,12 @@
         </p:grpSpPr>
         <p:sp>
           <p:nvSpPr>
-            <p:cNvPr name="Freeform 5" id="5"/>
+            <p:cNvPr id="5" name="Freeform 5"/>
             <p:cNvSpPr/>
             <p:nvPr/>
           </p:nvSpPr>
           <p:spPr>
-            <a:xfrm flipH="false" flipV="false" rot="0">
+            <a:xfrm>
               <a:off x="0" y="0"/>
               <a:ext cx="5816600" cy="1840738"/>
             </a:xfrm>
@@ -5792,9 +5900,9 @@
               <a:gdLst/>
               <a:ahLst/>
               <a:cxnLst/>
-              <a:rect r="r" b="b" t="t" l="l"/>
+              <a:rect l="l" t="t" r="r" b="b"/>
               <a:pathLst>
-                <a:path h="1840738" w="5816600">
+                <a:path w="5816600" h="1840738">
                   <a:moveTo>
                     <a:pt x="0" y="0"/>
                   </a:moveTo>
@@ -5817,7 +5925,7 @@
             <a:blipFill>
               <a:blip r:embed="rId2"/>
               <a:stretch>
-                <a:fillRect l="0" t="0" r="0" b="2"/>
+                <a:fillRect b="2"/>
               </a:stretch>
             </a:blipFill>
           </p:spPr>
@@ -5825,12 +5933,12 @@
       </p:grpSp>
       <p:grpSp>
         <p:nvGrpSpPr>
-          <p:cNvPr name="Group 6" id="6"/>
+          <p:cNvPr id="6" name="Group 6"/>
           <p:cNvGrpSpPr/>
           <p:nvPr/>
         </p:nvGrpSpPr>
         <p:grpSpPr>
-          <a:xfrm rot="0">
+          <a:xfrm>
             <a:off x="13367623" y="9656173"/>
             <a:ext cx="2625805" cy="830953"/>
             <a:chOff x="0" y="0"/>
@@ -5839,12 +5947,12 @@
         </p:grpSpPr>
         <p:sp>
           <p:nvSpPr>
-            <p:cNvPr name="Freeform 7" id="7"/>
+            <p:cNvPr id="7" name="Freeform 7"/>
             <p:cNvSpPr/>
             <p:nvPr/>
           </p:nvSpPr>
           <p:spPr>
-            <a:xfrm flipH="false" flipV="false" rot="0">
+            <a:xfrm>
               <a:off x="0" y="0"/>
               <a:ext cx="5816600" cy="1840738"/>
             </a:xfrm>
@@ -5853,9 +5961,9 @@
               <a:gdLst/>
               <a:ahLst/>
               <a:cxnLst/>
-              <a:rect r="r" b="b" t="t" l="l"/>
+              <a:rect l="l" t="t" r="r" b="b"/>
               <a:pathLst>
-                <a:path h="1840738" w="5816600">
+                <a:path w="5816600" h="1840738">
                   <a:moveTo>
                     <a:pt x="0" y="0"/>
                   </a:moveTo>
@@ -5878,7 +5986,7 @@
             <a:blipFill>
               <a:blip r:embed="rId2"/>
               <a:stretch>
-                <a:fillRect l="0" t="0" r="0" b="2"/>
+                <a:fillRect b="2"/>
               </a:stretch>
             </a:blipFill>
           </p:spPr>
@@ -5886,12 +5994,12 @@
       </p:grpSp>
       <p:grpSp>
         <p:nvGrpSpPr>
-          <p:cNvPr name="Group 8" id="8"/>
+          <p:cNvPr id="8" name="Group 8"/>
           <p:cNvGrpSpPr/>
           <p:nvPr/>
         </p:nvGrpSpPr>
         <p:grpSpPr>
-          <a:xfrm rot="0">
+          <a:xfrm>
             <a:off x="7990242" y="9984655"/>
             <a:ext cx="173987" cy="173987"/>
             <a:chOff x="0" y="0"/>
@@ -5900,12 +6008,12 @@
         </p:grpSpPr>
         <p:sp>
           <p:nvSpPr>
-            <p:cNvPr name="Freeform 9" id="9"/>
+            <p:cNvPr id="9" name="Freeform 9"/>
             <p:cNvSpPr/>
             <p:nvPr/>
           </p:nvSpPr>
           <p:spPr>
-            <a:xfrm flipH="false" flipV="false" rot="0">
+            <a:xfrm>
               <a:off x="0" y="0"/>
               <a:ext cx="812800" cy="812800"/>
             </a:xfrm>
@@ -5914,9 +6022,9 @@
               <a:gdLst/>
               <a:ahLst/>
               <a:cxnLst/>
-              <a:rect r="r" b="b" t="t" l="l"/>
+              <a:rect l="l" t="t" r="r" b="b"/>
               <a:pathLst>
-                <a:path h="812800" w="812800">
+                <a:path w="812800" h="812800">
                   <a:moveTo>
                     <a:pt x="406400" y="0"/>
                   </a:moveTo>
@@ -5951,8 +6059,8 @@
         </p:sp>
         <p:sp>
           <p:nvSpPr>
-            <p:cNvPr name="TextBox 10" id="10"/>
-            <p:cNvSpPr txBox="true"/>
+            <p:cNvPr id="10" name="TextBox 10"/>
+            <p:cNvSpPr txBox="1"/>
             <p:nvPr/>
           </p:nvSpPr>
           <p:spPr>
@@ -5965,7 +6073,7 @@
             </a:prstGeom>
           </p:spPr>
           <p:txBody>
-            <a:bodyPr anchor="ctr" rtlCol="false" tIns="50800" lIns="50800" bIns="50800" rIns="50800"/>
+            <a:bodyPr lIns="50800" tIns="50800" rIns="50800" bIns="50800" rtlCol="0" anchor="ctr"/>
             <a:lstStyle/>
             <a:p>
               <a:pPr algn="ctr">
@@ -5973,18 +6081,19 @@
                   <a:spcPts val="2239"/>
                 </a:lnSpc>
               </a:pPr>
+              <a:endParaRPr/>
             </a:p>
           </p:txBody>
         </p:sp>
       </p:grpSp>
       <p:grpSp>
         <p:nvGrpSpPr>
-          <p:cNvPr name="Group 11" id="11"/>
+          <p:cNvPr id="11" name="Group 11"/>
           <p:cNvGrpSpPr/>
           <p:nvPr/>
         </p:nvGrpSpPr>
         <p:grpSpPr>
-          <a:xfrm rot="0">
+          <a:xfrm>
             <a:off x="10353346" y="9948585"/>
             <a:ext cx="173987" cy="173987"/>
             <a:chOff x="0" y="0"/>
@@ -5993,12 +6102,12 @@
         </p:grpSpPr>
         <p:sp>
           <p:nvSpPr>
-            <p:cNvPr name="Freeform 12" id="12"/>
+            <p:cNvPr id="12" name="Freeform 12"/>
             <p:cNvSpPr/>
             <p:nvPr/>
           </p:nvSpPr>
           <p:spPr>
-            <a:xfrm flipH="false" flipV="false" rot="0">
+            <a:xfrm>
               <a:off x="0" y="0"/>
               <a:ext cx="812800" cy="812800"/>
             </a:xfrm>
@@ -6007,9 +6116,9 @@
               <a:gdLst/>
               <a:ahLst/>
               <a:cxnLst/>
-              <a:rect r="r" b="b" t="t" l="l"/>
+              <a:rect l="l" t="t" r="r" b="b"/>
               <a:pathLst>
-                <a:path h="812800" w="812800">
+                <a:path w="812800" h="812800">
                   <a:moveTo>
                     <a:pt x="406400" y="0"/>
                   </a:moveTo>
@@ -6044,8 +6153,8 @@
         </p:sp>
         <p:sp>
           <p:nvSpPr>
-            <p:cNvPr name="TextBox 13" id="13"/>
-            <p:cNvSpPr txBox="true"/>
+            <p:cNvPr id="13" name="TextBox 13"/>
+            <p:cNvSpPr txBox="1"/>
             <p:nvPr/>
           </p:nvSpPr>
           <p:spPr>
@@ -6058,7 +6167,7 @@
             </a:prstGeom>
           </p:spPr>
           <p:txBody>
-            <a:bodyPr anchor="ctr" rtlCol="false" tIns="50800" lIns="50800" bIns="50800" rIns="50800"/>
+            <a:bodyPr lIns="50800" tIns="50800" rIns="50800" bIns="50800" rtlCol="0" anchor="ctr"/>
             <a:lstStyle/>
             <a:p>
               <a:pPr algn="ctr">
@@ -6066,18 +6175,19 @@
                   <a:spcPts val="2239"/>
                 </a:lnSpc>
               </a:pPr>
+              <a:endParaRPr/>
             </a:p>
           </p:txBody>
         </p:sp>
       </p:grpSp>
       <p:grpSp>
         <p:nvGrpSpPr>
-          <p:cNvPr name="Group 14" id="14"/>
+          <p:cNvPr id="14" name="Group 14"/>
           <p:cNvGrpSpPr/>
           <p:nvPr/>
         </p:nvGrpSpPr>
         <p:grpSpPr>
-          <a:xfrm rot="0">
+          <a:xfrm>
             <a:off x="7211399" y="1893761"/>
             <a:ext cx="3009085" cy="641986"/>
             <a:chOff x="0" y="0"/>
@@ -6086,12 +6196,12 @@
         </p:grpSpPr>
         <p:sp>
           <p:nvSpPr>
-            <p:cNvPr name="Freeform 15" id="15"/>
+            <p:cNvPr id="15" name="Freeform 15"/>
             <p:cNvSpPr/>
             <p:nvPr/>
           </p:nvSpPr>
           <p:spPr>
-            <a:xfrm flipH="false" flipV="false" rot="0">
+            <a:xfrm>
               <a:off x="0" y="0"/>
               <a:ext cx="792516" cy="169083"/>
             </a:xfrm>
@@ -6100,9 +6210,9 @@
               <a:gdLst/>
               <a:ahLst/>
               <a:cxnLst/>
-              <a:rect r="r" b="b" t="t" l="l"/>
+              <a:rect l="l" t="t" r="r" b="b"/>
               <a:pathLst>
-                <a:path h="169083" w="792516">
+                <a:path w="792516" h="169083">
                   <a:moveTo>
                     <a:pt x="84541" y="0"/>
                   </a:moveTo>
@@ -6169,8 +6279,8 @@
         </p:sp>
         <p:sp>
           <p:nvSpPr>
-            <p:cNvPr name="TextBox 16" id="16"/>
-            <p:cNvSpPr txBox="true"/>
+            <p:cNvPr id="16" name="TextBox 16"/>
+            <p:cNvSpPr txBox="1"/>
             <p:nvPr/>
           </p:nvSpPr>
           <p:spPr>
@@ -6183,7 +6293,7 @@
             </a:prstGeom>
           </p:spPr>
           <p:txBody>
-            <a:bodyPr anchor="ctr" rtlCol="false" tIns="50800" lIns="50800" bIns="50800" rIns="50800"/>
+            <a:bodyPr lIns="50800" tIns="50800" rIns="50800" bIns="50800" rtlCol="0" anchor="ctr"/>
             <a:lstStyle/>
             <a:p>
               <a:pPr algn="ctr">
@@ -6191,18 +6301,19 @@
                   <a:spcPts val="2239"/>
                 </a:lnSpc>
               </a:pPr>
+              <a:endParaRPr/>
             </a:p>
           </p:txBody>
         </p:sp>
       </p:grpSp>
       <p:sp>
         <p:nvSpPr>
-          <p:cNvPr name="Freeform 17" id="17"/>
+          <p:cNvPr id="17" name="Freeform 17"/>
           <p:cNvSpPr/>
           <p:nvPr/>
         </p:nvSpPr>
         <p:spPr>
-          <a:xfrm flipH="false" flipV="false" rot="0">
+          <a:xfrm>
             <a:off x="13002366" y="-47625"/>
             <a:ext cx="5063940" cy="1941386"/>
           </a:xfrm>
@@ -6211,9 +6322,9 @@
             <a:gdLst/>
             <a:ahLst/>
             <a:cxnLst/>
-            <a:rect r="r" b="b" t="t" l="l"/>
+            <a:rect l="l" t="t" r="r" b="b"/>
             <a:pathLst>
-              <a:path h="1941386" w="5063940">
+              <a:path w="5063940" h="1941386">
                 <a:moveTo>
                   <a:pt x="0" y="0"/>
                 </a:moveTo>
@@ -6236,19 +6347,19 @@
           <a:blipFill>
             <a:blip r:embed="rId3"/>
             <a:stretch>
-              <a:fillRect l="0" t="0" r="0" b="0"/>
+              <a:fillRect/>
             </a:stretch>
           </a:blipFill>
         </p:spPr>
       </p:sp>
       <p:sp>
         <p:nvSpPr>
-          <p:cNvPr name="TextBox 18" id="18"/>
-          <p:cNvSpPr txBox="true"/>
+          <p:cNvPr id="18" name="TextBox 18"/>
+          <p:cNvSpPr txBox="1"/>
           <p:nvPr/>
         </p:nvSpPr>
         <p:spPr>
-          <a:xfrm rot="0">
+          <a:xfrm>
             <a:off x="8316142" y="9882546"/>
             <a:ext cx="1743273" cy="264135"/>
           </a:xfrm>
@@ -6257,7 +6368,7 @@
           </a:prstGeom>
         </p:spPr>
         <p:txBody>
-          <a:bodyPr anchor="t" rtlCol="false" tIns="0" lIns="0" bIns="0" rIns="0">
+          <a:bodyPr lIns="0" tIns="0" rIns="0" bIns="0" rtlCol="0" anchor="t">
             <a:spAutoFit/>
           </a:bodyPr>
           <a:lstStyle/>
@@ -6284,12 +6395,12 @@
       </p:sp>
       <p:sp>
         <p:nvSpPr>
-          <p:cNvPr name="Freeform 19" id="19"/>
+          <p:cNvPr id="19" name="Freeform 19"/>
           <p:cNvSpPr/>
           <p:nvPr/>
         </p:nvSpPr>
         <p:spPr>
-          <a:xfrm flipH="false" flipV="false" rot="0">
+          <a:xfrm>
             <a:off x="7514703" y="-217781"/>
             <a:ext cx="2134862" cy="2130592"/>
           </a:xfrm>
@@ -6298,9 +6409,9 @@
             <a:gdLst/>
             <a:ahLst/>
             <a:cxnLst/>
-            <a:rect r="r" b="b" t="t" l="l"/>
+            <a:rect l="l" t="t" r="r" b="b"/>
             <a:pathLst>
-              <a:path h="2130592" w="2134862">
+              <a:path w="2134862" h="2130592">
                 <a:moveTo>
                   <a:pt x="0" y="0"/>
                 </a:moveTo>
@@ -6323,19 +6434,19 @@
           <a:blipFill>
             <a:blip r:embed="rId4"/>
             <a:stretch>
-              <a:fillRect l="0" t="0" r="0" b="0"/>
+              <a:fillRect/>
             </a:stretch>
           </a:blipFill>
         </p:spPr>
       </p:sp>
       <p:grpSp>
         <p:nvGrpSpPr>
-          <p:cNvPr name="Group 20" id="20"/>
+          <p:cNvPr id="20" name="Group 20"/>
           <p:cNvGrpSpPr/>
           <p:nvPr/>
         </p:nvGrpSpPr>
         <p:grpSpPr>
-          <a:xfrm rot="0">
+          <a:xfrm>
             <a:off x="16525717" y="8546310"/>
             <a:ext cx="1467166" cy="1525339"/>
             <a:chOff x="0" y="0"/>
@@ -6344,12 +6455,12 @@
         </p:grpSpPr>
         <p:sp>
           <p:nvSpPr>
-            <p:cNvPr name="Freeform 21" id="21"/>
+            <p:cNvPr id="21" name="Freeform 21"/>
             <p:cNvSpPr/>
             <p:nvPr/>
           </p:nvSpPr>
           <p:spPr>
-            <a:xfrm flipH="false" flipV="false" rot="0">
+            <a:xfrm>
               <a:off x="0" y="0"/>
               <a:ext cx="3890137" cy="4044315"/>
             </a:xfrm>
@@ -6358,9 +6469,9 @@
               <a:gdLst/>
               <a:ahLst/>
               <a:cxnLst/>
-              <a:rect r="r" b="b" t="t" l="l"/>
+              <a:rect l="l" t="t" r="r" b="b"/>
               <a:pathLst>
-                <a:path h="4044315" w="3890137">
+                <a:path w="3890137" h="4044315">
                   <a:moveTo>
                     <a:pt x="0" y="0"/>
                   </a:moveTo>
@@ -6383,7 +6494,7 @@
             <a:blipFill>
               <a:blip r:embed="rId5"/>
               <a:stretch>
-                <a:fillRect l="0" t="0" r="0" b="-1"/>
+                <a:fillRect b="-1"/>
               </a:stretch>
             </a:blipFill>
           </p:spPr>
@@ -6391,12 +6502,12 @@
       </p:grpSp>
       <p:sp>
         <p:nvSpPr>
-          <p:cNvPr name="TextBox 22" id="22"/>
-          <p:cNvSpPr txBox="true"/>
+          <p:cNvPr id="22" name="TextBox 22"/>
+          <p:cNvSpPr txBox="1"/>
           <p:nvPr/>
         </p:nvSpPr>
         <p:spPr>
-          <a:xfrm rot="0">
+          <a:xfrm>
             <a:off x="7969539" y="1887412"/>
             <a:ext cx="1492806" cy="530861"/>
           </a:xfrm>
@@ -6405,7 +6516,7 @@
           </a:prstGeom>
         </p:spPr>
         <p:txBody>
-          <a:bodyPr anchor="t" rtlCol="false" tIns="0" lIns="0" bIns="0" rIns="0" wrap="none">
+          <a:bodyPr wrap="none" lIns="0" tIns="0" rIns="0" bIns="0" rtlCol="0" anchor="t">
             <a:spAutoFit/>
           </a:bodyPr>
           <a:lstStyle/>
@@ -6435,21 +6546,21 @@
       </p:sp>
       <p:sp>
         <p:nvSpPr>
-          <p:cNvPr name="TextBox 23" id="23"/>
-          <p:cNvSpPr txBox="true"/>
+          <p:cNvPr id="23" name="TextBox 23"/>
+          <p:cNvSpPr txBox="1"/>
           <p:nvPr/>
         </p:nvSpPr>
         <p:spPr>
-          <a:xfrm rot="0">
+          <a:xfrm>
             <a:off x="1188720" y="2971800"/>
-            <a:ext cx="14356080" cy="5669280"/>
+            <a:ext cx="14356080" cy="5127045"/>
           </a:xfrm>
           <a:prstGeom prst="rect">
             <a:avLst/>
           </a:prstGeom>
         </p:spPr>
         <p:txBody>
-          <a:bodyPr anchor="t" rtlCol="false" tIns="0" lIns="0" bIns="0" rIns="0" wrap="square">
+          <a:bodyPr wrap="square" lIns="0" tIns="0" rIns="0" bIns="0" rtlCol="0" anchor="t">
             <a:spAutoFit/>
           </a:bodyPr>
           <a:lstStyle/>
@@ -6463,7 +6574,7 @@
               </a:spcAft>
             </a:pPr>
             <a:r>
-              <a:rPr sz="1680" b="0">
+              <a:rPr b="0" dirty="0">
                 <a:solidFill>
                   <a:srgbClr val="FF3131"/>
                 </a:solidFill>
@@ -6472,7 +6583,7 @@
               <a:t>■  </a:t>
             </a:r>
             <a:r>
-              <a:rPr sz="2800" b="1">
+              <a:rPr sz="3200" b="1" dirty="0">
                 <a:solidFill>
                   <a:srgbClr val="000000"/>
                 </a:solidFill>
@@ -6481,7 +6592,7 @@
               <a:t>Quantum time is rented over the cloud, </a:t>
             </a:r>
             <a:r>
-              <a:rPr sz="2800" b="0">
+              <a:rPr sz="3200" b="0" dirty="0">
                 <a:solidFill>
                   <a:srgbClr val="000000"/>
                 </a:solidFill>
@@ -6497,7 +6608,7 @@
               </a:spcAft>
             </a:pPr>
             <a:r>
-              <a:rPr sz="1680" b="0">
+              <a:rPr b="0" dirty="0">
                 <a:solidFill>
                   <a:srgbClr val="FF3131"/>
                 </a:solidFill>
@@ -6506,7 +6617,7 @@
               <a:t>■  </a:t>
             </a:r>
             <a:r>
-              <a:rPr sz="2800" b="1">
+              <a:rPr sz="3200" b="1" dirty="0">
                 <a:solidFill>
                   <a:srgbClr val="000000"/>
                 </a:solidFill>
@@ -6515,7 +6626,7 @@
               <a:t>Customers only get back bitstrings. </a:t>
             </a:r>
             <a:r>
-              <a:rPr sz="2800" b="0">
+              <a:rPr sz="3200" b="0" dirty="0">
                 <a:solidFill>
                   <a:srgbClr val="000000"/>
                 </a:solidFill>
@@ -6531,7 +6642,7 @@
               </a:spcAft>
             </a:pPr>
             <a:r>
-              <a:rPr sz="1680" b="0">
+              <a:rPr b="0" dirty="0">
                 <a:solidFill>
                   <a:srgbClr val="FF3131"/>
                 </a:solidFill>
@@ -6540,7 +6651,7 @@
               <a:t>■  </a:t>
             </a:r>
             <a:r>
-              <a:rPr sz="2800" b="1">
+              <a:rPr sz="3200" b="1" dirty="0">
                 <a:solidFill>
                   <a:srgbClr val="000000"/>
                 </a:solidFill>
@@ -6549,7 +6660,7 @@
               <a:t>IBM publishes every device's calibration daily </a:t>
             </a:r>
             <a:r>
-              <a:rPr sz="2800" b="0">
+              <a:rPr sz="3200" b="0" dirty="0">
                 <a:solidFill>
                   <a:srgbClr val="000000"/>
                 </a:solidFill>
@@ -6565,7 +6676,7 @@
               </a:spcAft>
             </a:pPr>
             <a:r>
-              <a:rPr sz="1680" b="0">
+              <a:rPr b="0" dirty="0">
                 <a:solidFill>
                   <a:srgbClr val="FF3131"/>
                 </a:solidFill>
@@ -6574,7 +6685,7 @@
               <a:t>■  </a:t>
             </a:r>
             <a:r>
-              <a:rPr sz="2800" b="1">
+              <a:rPr sz="3200" b="1" dirty="0">
                 <a:solidFill>
                   <a:srgbClr val="000000"/>
                 </a:solidFill>
@@ -6583,7 +6694,7 @@
               <a:t>The attack: </a:t>
             </a:r>
             <a:r>
-              <a:rPr sz="2800" b="0">
+              <a:rPr sz="3200" b="0" dirty="0">
                 <a:solidFill>
                   <a:srgbClr val="000000"/>
                 </a:solidFill>
@@ -6596,12 +6707,12 @@
       </p:sp>
       <p:sp>
         <p:nvSpPr>
-          <p:cNvPr name="Freeform 24" id="24"/>
+          <p:cNvPr id="24" name="Freeform 24"/>
           <p:cNvSpPr/>
           <p:nvPr/>
         </p:nvSpPr>
         <p:spPr>
-          <a:xfrm flipH="false" flipV="false" rot="0">
+          <a:xfrm>
             <a:off x="264376" y="407706"/>
             <a:ext cx="3092172" cy="1030724"/>
           </a:xfrm>
@@ -6610,9 +6721,9 @@
             <a:gdLst/>
             <a:ahLst/>
             <a:cxnLst/>
-            <a:rect r="r" b="b" t="t" l="l"/>
+            <a:rect l="l" t="t" r="r" b="b"/>
             <a:pathLst>
-              <a:path h="1030724" w="3092172">
+              <a:path w="3092172" h="1030724">
                 <a:moveTo>
                   <a:pt x="0" y="0"/>
                 </a:moveTo>
@@ -6635,7 +6746,7 @@
           <a:blipFill>
             <a:blip r:embed="rId6"/>
             <a:stretch>
-              <a:fillRect l="0" t="0" r="0" b="0"/>
+              <a:fillRect/>
             </a:stretch>
           </a:blipFill>
         </p:spPr>
@@ -6649,13 +6760,14 @@
 </file>
 
 <file path=ppt/slides/slide3.xml><?xml version="1.0" encoding="utf-8"?>
-<p:sld xmlns:p="http://schemas.openxmlformats.org/presentationml/2006/main" xmlns:a="http://schemas.openxmlformats.org/drawingml/2006/main" xmlns:r="http://schemas.openxmlformats.org/officeDocument/2006/relationships">
+<p:sld xmlns:a="http://schemas.openxmlformats.org/drawingml/2006/main" xmlns:r="http://schemas.openxmlformats.org/officeDocument/2006/relationships" xmlns:p="http://schemas.openxmlformats.org/presentationml/2006/main">
   <p:cSld>
     <p:bg>
       <p:bgPr>
         <a:solidFill>
           <a:srgbClr val="E0E0E0"/>
         </a:solidFill>
+        <a:effectLst/>
       </p:bgPr>
     </p:bg>
     <p:spTree>
@@ -6674,12 +6786,12 @@
       </p:grpSpPr>
       <p:grpSp>
         <p:nvGrpSpPr>
-          <p:cNvPr name="Group 2" id="2"/>
+          <p:cNvPr id="2" name="Group 2"/>
           <p:cNvGrpSpPr/>
           <p:nvPr/>
         </p:nvGrpSpPr>
         <p:grpSpPr>
-          <a:xfrm rot="0">
+          <a:xfrm>
             <a:off x="-1597105" y="2516808"/>
             <a:ext cx="2625805" cy="830953"/>
             <a:chOff x="0" y="0"/>
@@ -6688,12 +6800,12 @@
         </p:grpSpPr>
         <p:sp>
           <p:nvSpPr>
-            <p:cNvPr name="Freeform 3" id="3"/>
+            <p:cNvPr id="3" name="Freeform 3"/>
             <p:cNvSpPr/>
             <p:nvPr/>
           </p:nvSpPr>
           <p:spPr>
-            <a:xfrm flipH="false" flipV="false" rot="0">
+            <a:xfrm>
               <a:off x="0" y="0"/>
               <a:ext cx="5816600" cy="1840738"/>
             </a:xfrm>
@@ -6702,9 +6814,9 @@
               <a:gdLst/>
               <a:ahLst/>
               <a:cxnLst/>
-              <a:rect r="r" b="b" t="t" l="l"/>
+              <a:rect l="l" t="t" r="r" b="b"/>
               <a:pathLst>
-                <a:path h="1840738" w="5816600">
+                <a:path w="5816600" h="1840738">
                   <a:moveTo>
                     <a:pt x="0" y="0"/>
                   </a:moveTo>
@@ -6727,7 +6839,7 @@
             <a:blipFill>
               <a:blip r:embed="rId2"/>
               <a:stretch>
-                <a:fillRect l="0" t="0" r="0" b="2"/>
+                <a:fillRect b="2"/>
               </a:stretch>
             </a:blipFill>
           </p:spPr>
@@ -6735,12 +6847,12 @@
       </p:grpSp>
       <p:grpSp>
         <p:nvGrpSpPr>
-          <p:cNvPr name="Group 4" id="4"/>
+          <p:cNvPr id="4" name="Group 4"/>
           <p:cNvGrpSpPr/>
           <p:nvPr/>
         </p:nvGrpSpPr>
         <p:grpSpPr>
-          <a:xfrm rot="0">
+          <a:xfrm>
             <a:off x="2928206" y="9780631"/>
             <a:ext cx="2625805" cy="830953"/>
             <a:chOff x="0" y="0"/>
@@ -6749,12 +6861,12 @@
         </p:grpSpPr>
         <p:sp>
           <p:nvSpPr>
-            <p:cNvPr name="Freeform 5" id="5"/>
+            <p:cNvPr id="5" name="Freeform 5"/>
             <p:cNvSpPr/>
             <p:nvPr/>
           </p:nvSpPr>
           <p:spPr>
-            <a:xfrm flipH="false" flipV="false" rot="0">
+            <a:xfrm>
               <a:off x="0" y="0"/>
               <a:ext cx="5816600" cy="1840738"/>
             </a:xfrm>
@@ -6763,9 +6875,9 @@
               <a:gdLst/>
               <a:ahLst/>
               <a:cxnLst/>
-              <a:rect r="r" b="b" t="t" l="l"/>
+              <a:rect l="l" t="t" r="r" b="b"/>
               <a:pathLst>
-                <a:path h="1840738" w="5816600">
+                <a:path w="5816600" h="1840738">
                   <a:moveTo>
                     <a:pt x="0" y="0"/>
                   </a:moveTo>
@@ -6788,7 +6900,7 @@
             <a:blipFill>
               <a:blip r:embed="rId2"/>
               <a:stretch>
-                <a:fillRect l="0" t="0" r="0" b="2"/>
+                <a:fillRect b="2"/>
               </a:stretch>
             </a:blipFill>
           </p:spPr>
@@ -6796,12 +6908,12 @@
       </p:grpSp>
       <p:grpSp>
         <p:nvGrpSpPr>
-          <p:cNvPr name="Group 6" id="6"/>
+          <p:cNvPr id="6" name="Group 6"/>
           <p:cNvGrpSpPr/>
           <p:nvPr/>
         </p:nvGrpSpPr>
         <p:grpSpPr>
-          <a:xfrm rot="0">
+          <a:xfrm>
             <a:off x="13367623" y="9656173"/>
             <a:ext cx="2625805" cy="830953"/>
             <a:chOff x="0" y="0"/>
@@ -6810,12 +6922,12 @@
         </p:grpSpPr>
         <p:sp>
           <p:nvSpPr>
-            <p:cNvPr name="Freeform 7" id="7"/>
+            <p:cNvPr id="7" name="Freeform 7"/>
             <p:cNvSpPr/>
             <p:nvPr/>
           </p:nvSpPr>
           <p:spPr>
-            <a:xfrm flipH="false" flipV="false" rot="0">
+            <a:xfrm>
               <a:off x="0" y="0"/>
               <a:ext cx="5816600" cy="1840738"/>
             </a:xfrm>
@@ -6824,9 +6936,9 @@
               <a:gdLst/>
               <a:ahLst/>
               <a:cxnLst/>
-              <a:rect r="r" b="b" t="t" l="l"/>
+              <a:rect l="l" t="t" r="r" b="b"/>
               <a:pathLst>
-                <a:path h="1840738" w="5816600">
+                <a:path w="5816600" h="1840738">
                   <a:moveTo>
                     <a:pt x="0" y="0"/>
                   </a:moveTo>
@@ -6849,7 +6961,7 @@
             <a:blipFill>
               <a:blip r:embed="rId2"/>
               <a:stretch>
-                <a:fillRect l="0" t="0" r="0" b="2"/>
+                <a:fillRect b="2"/>
               </a:stretch>
             </a:blipFill>
           </p:spPr>
@@ -6857,12 +6969,12 @@
       </p:grpSp>
       <p:grpSp>
         <p:nvGrpSpPr>
-          <p:cNvPr name="Group 8" id="8"/>
+          <p:cNvPr id="8" name="Group 8"/>
           <p:cNvGrpSpPr/>
           <p:nvPr/>
         </p:nvGrpSpPr>
         <p:grpSpPr>
-          <a:xfrm rot="0">
+          <a:xfrm>
             <a:off x="7990242" y="9984655"/>
             <a:ext cx="173987" cy="173987"/>
             <a:chOff x="0" y="0"/>
@@ -6871,12 +6983,12 @@
         </p:grpSpPr>
         <p:sp>
           <p:nvSpPr>
-            <p:cNvPr name="Freeform 9" id="9"/>
+            <p:cNvPr id="9" name="Freeform 9"/>
             <p:cNvSpPr/>
             <p:nvPr/>
           </p:nvSpPr>
           <p:spPr>
-            <a:xfrm flipH="false" flipV="false" rot="0">
+            <a:xfrm>
               <a:off x="0" y="0"/>
               <a:ext cx="812800" cy="812800"/>
             </a:xfrm>
@@ -6885,9 +6997,9 @@
               <a:gdLst/>
               <a:ahLst/>
               <a:cxnLst/>
-              <a:rect r="r" b="b" t="t" l="l"/>
+              <a:rect l="l" t="t" r="r" b="b"/>
               <a:pathLst>
-                <a:path h="812800" w="812800">
+                <a:path w="812800" h="812800">
                   <a:moveTo>
                     <a:pt x="406400" y="0"/>
                   </a:moveTo>
@@ -6922,8 +7034,8 @@
         </p:sp>
         <p:sp>
           <p:nvSpPr>
-            <p:cNvPr name="TextBox 10" id="10"/>
-            <p:cNvSpPr txBox="true"/>
+            <p:cNvPr id="10" name="TextBox 10"/>
+            <p:cNvSpPr txBox="1"/>
             <p:nvPr/>
           </p:nvSpPr>
           <p:spPr>
@@ -6936,7 +7048,7 @@
             </a:prstGeom>
           </p:spPr>
           <p:txBody>
-            <a:bodyPr anchor="ctr" rtlCol="false" tIns="50800" lIns="50800" bIns="50800" rIns="50800"/>
+            <a:bodyPr lIns="50800" tIns="50800" rIns="50800" bIns="50800" rtlCol="0" anchor="ctr"/>
             <a:lstStyle/>
             <a:p>
               <a:pPr algn="ctr">
@@ -6944,18 +7056,19 @@
                   <a:spcPts val="2239"/>
                 </a:lnSpc>
               </a:pPr>
+              <a:endParaRPr/>
             </a:p>
           </p:txBody>
         </p:sp>
       </p:grpSp>
       <p:grpSp>
         <p:nvGrpSpPr>
-          <p:cNvPr name="Group 11" id="11"/>
+          <p:cNvPr id="11" name="Group 11"/>
           <p:cNvGrpSpPr/>
           <p:nvPr/>
         </p:nvGrpSpPr>
         <p:grpSpPr>
-          <a:xfrm rot="0">
+          <a:xfrm>
             <a:off x="10353346" y="9948585"/>
             <a:ext cx="173987" cy="173987"/>
             <a:chOff x="0" y="0"/>
@@ -6964,12 +7077,12 @@
         </p:grpSpPr>
         <p:sp>
           <p:nvSpPr>
-            <p:cNvPr name="Freeform 12" id="12"/>
+            <p:cNvPr id="12" name="Freeform 12"/>
             <p:cNvSpPr/>
             <p:nvPr/>
           </p:nvSpPr>
           <p:spPr>
-            <a:xfrm flipH="false" flipV="false" rot="0">
+            <a:xfrm>
               <a:off x="0" y="0"/>
               <a:ext cx="812800" cy="812800"/>
             </a:xfrm>
@@ -6978,9 +7091,9 @@
               <a:gdLst/>
               <a:ahLst/>
               <a:cxnLst/>
-              <a:rect r="r" b="b" t="t" l="l"/>
+              <a:rect l="l" t="t" r="r" b="b"/>
               <a:pathLst>
-                <a:path h="812800" w="812800">
+                <a:path w="812800" h="812800">
                   <a:moveTo>
                     <a:pt x="406400" y="0"/>
                   </a:moveTo>
@@ -7015,8 +7128,8 @@
         </p:sp>
         <p:sp>
           <p:nvSpPr>
-            <p:cNvPr name="TextBox 13" id="13"/>
-            <p:cNvSpPr txBox="true"/>
+            <p:cNvPr id="13" name="TextBox 13"/>
+            <p:cNvSpPr txBox="1"/>
             <p:nvPr/>
           </p:nvSpPr>
           <p:spPr>
@@ -7029,7 +7142,7 @@
             </a:prstGeom>
           </p:spPr>
           <p:txBody>
-            <a:bodyPr anchor="ctr" rtlCol="false" tIns="50800" lIns="50800" bIns="50800" rIns="50800"/>
+            <a:bodyPr lIns="50800" tIns="50800" rIns="50800" bIns="50800" rtlCol="0" anchor="ctr"/>
             <a:lstStyle/>
             <a:p>
               <a:pPr algn="ctr">
@@ -7037,18 +7150,19 @@
                   <a:spcPts val="2239"/>
                 </a:lnSpc>
               </a:pPr>
+              <a:endParaRPr/>
             </a:p>
           </p:txBody>
         </p:sp>
       </p:grpSp>
       <p:grpSp>
         <p:nvGrpSpPr>
-          <p:cNvPr name="Group 14" id="14"/>
+          <p:cNvPr id="14" name="Group 14"/>
           <p:cNvGrpSpPr/>
           <p:nvPr/>
         </p:nvGrpSpPr>
         <p:grpSpPr>
-          <a:xfrm rot="0">
+          <a:xfrm>
             <a:off x="6993915" y="1893761"/>
             <a:ext cx="3272797" cy="641986"/>
             <a:chOff x="0" y="0"/>
@@ -7057,12 +7171,12 @@
         </p:grpSpPr>
         <p:sp>
           <p:nvSpPr>
-            <p:cNvPr name="Freeform 15" id="15"/>
+            <p:cNvPr id="15" name="Freeform 15"/>
             <p:cNvSpPr/>
             <p:nvPr/>
           </p:nvSpPr>
           <p:spPr>
-            <a:xfrm flipH="false" flipV="false" rot="0">
+            <a:xfrm>
               <a:off x="0" y="0"/>
               <a:ext cx="861971" cy="169083"/>
             </a:xfrm>
@@ -7071,9 +7185,9 @@
               <a:gdLst/>
               <a:ahLst/>
               <a:cxnLst/>
-              <a:rect r="r" b="b" t="t" l="l"/>
+              <a:rect l="l" t="t" r="r" b="b"/>
               <a:pathLst>
-                <a:path h="169083" w="861971">
+                <a:path w="861971" h="169083">
                   <a:moveTo>
                     <a:pt x="84541" y="0"/>
                   </a:moveTo>
@@ -7140,8 +7254,8 @@
         </p:sp>
         <p:sp>
           <p:nvSpPr>
-            <p:cNvPr name="TextBox 16" id="16"/>
-            <p:cNvSpPr txBox="true"/>
+            <p:cNvPr id="16" name="TextBox 16"/>
+            <p:cNvSpPr txBox="1"/>
             <p:nvPr/>
           </p:nvSpPr>
           <p:spPr>
@@ -7154,7 +7268,7 @@
             </a:prstGeom>
           </p:spPr>
           <p:txBody>
-            <a:bodyPr anchor="ctr" rtlCol="false" tIns="50800" lIns="50800" bIns="50800" rIns="50800"/>
+            <a:bodyPr lIns="50800" tIns="50800" rIns="50800" bIns="50800" rtlCol="0" anchor="ctr"/>
             <a:lstStyle/>
             <a:p>
               <a:pPr algn="ctr">
@@ -7162,18 +7276,19 @@
                   <a:spcPts val="2239"/>
                 </a:lnSpc>
               </a:pPr>
+              <a:endParaRPr/>
             </a:p>
           </p:txBody>
         </p:sp>
       </p:grpSp>
       <p:sp>
         <p:nvSpPr>
-          <p:cNvPr name="Freeform 17" id="17"/>
+          <p:cNvPr id="17" name="Freeform 17"/>
           <p:cNvSpPr/>
           <p:nvPr/>
         </p:nvSpPr>
         <p:spPr>
-          <a:xfrm flipH="false" flipV="false" rot="0">
+          <a:xfrm>
             <a:off x="13002366" y="-47625"/>
             <a:ext cx="5063940" cy="1941386"/>
           </a:xfrm>
@@ -7182,9 +7297,9 @@
             <a:gdLst/>
             <a:ahLst/>
             <a:cxnLst/>
-            <a:rect r="r" b="b" t="t" l="l"/>
+            <a:rect l="l" t="t" r="r" b="b"/>
             <a:pathLst>
-              <a:path h="1941386" w="5063940">
+              <a:path w="5063940" h="1941386">
                 <a:moveTo>
                   <a:pt x="0" y="0"/>
                 </a:moveTo>
@@ -7207,19 +7322,19 @@
           <a:blipFill>
             <a:blip r:embed="rId3"/>
             <a:stretch>
-              <a:fillRect l="0" t="0" r="0" b="0"/>
+              <a:fillRect/>
             </a:stretch>
           </a:blipFill>
         </p:spPr>
       </p:sp>
       <p:sp>
         <p:nvSpPr>
-          <p:cNvPr name="TextBox 18" id="18"/>
-          <p:cNvSpPr txBox="true"/>
+          <p:cNvPr id="18" name="TextBox 18"/>
+          <p:cNvSpPr txBox="1"/>
           <p:nvPr/>
         </p:nvSpPr>
         <p:spPr>
-          <a:xfrm rot="0">
+          <a:xfrm>
             <a:off x="8316142" y="9882546"/>
             <a:ext cx="1743273" cy="264135"/>
           </a:xfrm>
@@ -7228,7 +7343,7 @@
           </a:prstGeom>
         </p:spPr>
         <p:txBody>
-          <a:bodyPr anchor="t" rtlCol="false" tIns="0" lIns="0" bIns="0" rIns="0">
+          <a:bodyPr lIns="0" tIns="0" rIns="0" bIns="0" rtlCol="0" anchor="t">
             <a:spAutoFit/>
           </a:bodyPr>
           <a:lstStyle/>
@@ -7255,12 +7370,12 @@
       </p:sp>
       <p:sp>
         <p:nvSpPr>
-          <p:cNvPr name="Freeform 19" id="19"/>
+          <p:cNvPr id="19" name="Freeform 19"/>
           <p:cNvSpPr/>
           <p:nvPr/>
         </p:nvSpPr>
         <p:spPr>
-          <a:xfrm flipH="false" flipV="false" rot="0">
+          <a:xfrm>
             <a:off x="7514703" y="-217781"/>
             <a:ext cx="2134862" cy="2130592"/>
           </a:xfrm>
@@ -7269,9 +7384,9 @@
             <a:gdLst/>
             <a:ahLst/>
             <a:cxnLst/>
-            <a:rect r="r" b="b" t="t" l="l"/>
+            <a:rect l="l" t="t" r="r" b="b"/>
             <a:pathLst>
-              <a:path h="2130592" w="2134862">
+              <a:path w="2134862" h="2130592">
                 <a:moveTo>
                   <a:pt x="0" y="0"/>
                 </a:moveTo>
@@ -7294,19 +7409,19 @@
           <a:blipFill>
             <a:blip r:embed="rId4"/>
             <a:stretch>
-              <a:fillRect l="0" t="0" r="0" b="0"/>
+              <a:fillRect/>
             </a:stretch>
           </a:blipFill>
         </p:spPr>
       </p:sp>
       <p:grpSp>
         <p:nvGrpSpPr>
-          <p:cNvPr name="Group 20" id="20"/>
+          <p:cNvPr id="20" name="Group 20"/>
           <p:cNvGrpSpPr/>
           <p:nvPr/>
         </p:nvGrpSpPr>
         <p:grpSpPr>
-          <a:xfrm rot="0">
+          <a:xfrm>
             <a:off x="16200432" y="8538631"/>
             <a:ext cx="1365659" cy="1173861"/>
             <a:chOff x="0" y="0"/>
@@ -7315,12 +7430,12 @@
         </p:grpSpPr>
         <p:sp>
           <p:nvSpPr>
-            <p:cNvPr name="Freeform 21" id="21"/>
+            <p:cNvPr id="21" name="Freeform 21"/>
             <p:cNvSpPr/>
             <p:nvPr/>
           </p:nvSpPr>
           <p:spPr>
-            <a:xfrm flipH="false" flipV="false" rot="0">
+            <a:xfrm>
               <a:off x="0" y="0"/>
               <a:ext cx="4028567" cy="3462782"/>
             </a:xfrm>
@@ -7329,9 +7444,9 @@
               <a:gdLst/>
               <a:ahLst/>
               <a:cxnLst/>
-              <a:rect r="r" b="b" t="t" l="l"/>
+              <a:rect l="l" t="t" r="r" b="b"/>
               <a:pathLst>
-                <a:path h="3462782" w="4028567">
+                <a:path w="4028567" h="3462782">
                   <a:moveTo>
                     <a:pt x="0" y="0"/>
                   </a:moveTo>
@@ -7354,7 +7469,7 @@
             <a:blipFill>
               <a:blip r:embed="rId5"/>
               <a:stretch>
-                <a:fillRect l="0" t="0" r="0" b="0"/>
+                <a:fillRect/>
               </a:stretch>
             </a:blipFill>
           </p:spPr>
@@ -7362,12 +7477,12 @@
       </p:grpSp>
       <p:sp>
         <p:nvSpPr>
-          <p:cNvPr name="TextBox 22" id="22"/>
-          <p:cNvSpPr txBox="true"/>
+          <p:cNvPr id="22" name="TextBox 22"/>
+          <p:cNvSpPr txBox="1"/>
           <p:nvPr/>
         </p:nvSpPr>
         <p:spPr>
-          <a:xfrm rot="0">
+          <a:xfrm>
             <a:off x="7514703" y="1944244"/>
             <a:ext cx="2266474" cy="455296"/>
           </a:xfrm>
@@ -7376,7 +7491,7 @@
           </a:prstGeom>
         </p:spPr>
         <p:txBody>
-          <a:bodyPr anchor="t" rtlCol="false" tIns="0" lIns="0" bIns="0" rIns="0" wrap="none">
+          <a:bodyPr wrap="none" lIns="0" tIns="0" rIns="0" bIns="0" rtlCol="0" anchor="t">
             <a:spAutoFit/>
           </a:bodyPr>
           <a:lstStyle/>
@@ -7406,12 +7521,12 @@
       </p:sp>
       <p:sp>
         <p:nvSpPr>
-          <p:cNvPr name="TextBox 23" id="23"/>
-          <p:cNvSpPr txBox="true"/>
+          <p:cNvPr id="23" name="TextBox 23"/>
+          <p:cNvSpPr txBox="1"/>
           <p:nvPr/>
         </p:nvSpPr>
         <p:spPr>
-          <a:xfrm rot="0">
+          <a:xfrm>
             <a:off x="1188720" y="2971800"/>
             <a:ext cx="14356080" cy="5669280"/>
           </a:xfrm>
@@ -7420,7 +7535,7 @@
           </a:prstGeom>
         </p:spPr>
         <p:txBody>
-          <a:bodyPr anchor="t" rtlCol="false" tIns="0" lIns="0" bIns="0" rIns="0" wrap="square">
+          <a:bodyPr wrap="square" lIns="0" tIns="0" rIns="0" bIns="0" rtlCol="0" anchor="t">
             <a:spAutoFit/>
           </a:bodyPr>
           <a:lstStyle/>
@@ -7570,12 +7685,12 @@
       </p:sp>
       <p:sp>
         <p:nvSpPr>
-          <p:cNvPr name="Freeform 24" id="24"/>
+          <p:cNvPr id="24" name="Freeform 24"/>
           <p:cNvSpPr/>
           <p:nvPr/>
         </p:nvSpPr>
         <p:spPr>
-          <a:xfrm flipH="false" flipV="false" rot="0">
+          <a:xfrm>
             <a:off x="264376" y="407706"/>
             <a:ext cx="3092172" cy="1030724"/>
           </a:xfrm>
@@ -7584,9 +7699,9 @@
             <a:gdLst/>
             <a:ahLst/>
             <a:cxnLst/>
-            <a:rect r="r" b="b" t="t" l="l"/>
+            <a:rect l="l" t="t" r="r" b="b"/>
             <a:pathLst>
-              <a:path h="1030724" w="3092172">
+              <a:path w="3092172" h="1030724">
                 <a:moveTo>
                   <a:pt x="0" y="0"/>
                 </a:moveTo>
@@ -7609,7 +7724,7 @@
           <a:blipFill>
             <a:blip r:embed="rId6"/>
             <a:stretch>
-              <a:fillRect l="0" t="0" r="0" b="0"/>
+              <a:fillRect/>
             </a:stretch>
           </a:blipFill>
         </p:spPr>
@@ -7623,13 +7738,14 @@
 </file>
 
 <file path=ppt/slides/slide4.xml><?xml version="1.0" encoding="utf-8"?>
-<p:sld xmlns:p="http://schemas.openxmlformats.org/presentationml/2006/main" xmlns:a="http://schemas.openxmlformats.org/drawingml/2006/main" xmlns:r="http://schemas.openxmlformats.org/officeDocument/2006/relationships">
+<p:sld xmlns:a="http://schemas.openxmlformats.org/drawingml/2006/main" xmlns:r="http://schemas.openxmlformats.org/officeDocument/2006/relationships" xmlns:p="http://schemas.openxmlformats.org/presentationml/2006/main">
   <p:cSld>
     <p:bg>
       <p:bgPr>
         <a:solidFill>
           <a:srgbClr val="B48AF7"/>
         </a:solidFill>
+        <a:effectLst/>
       </p:bgPr>
     </p:bg>
     <p:spTree>
@@ -7648,12 +7764,12 @@
       </p:grpSpPr>
       <p:grpSp>
         <p:nvGrpSpPr>
-          <p:cNvPr name="Group 2" id="2"/>
+          <p:cNvPr id="2" name="Group 2"/>
           <p:cNvGrpSpPr/>
           <p:nvPr/>
         </p:nvGrpSpPr>
         <p:grpSpPr>
-          <a:xfrm rot="0">
+          <a:xfrm>
             <a:off x="-1597105" y="2516808"/>
             <a:ext cx="2625805" cy="830953"/>
             <a:chOff x="0" y="0"/>
@@ -7662,12 +7778,12 @@
         </p:grpSpPr>
         <p:sp>
           <p:nvSpPr>
-            <p:cNvPr name="Freeform 3" id="3"/>
+            <p:cNvPr id="3" name="Freeform 3"/>
             <p:cNvSpPr/>
             <p:nvPr/>
           </p:nvSpPr>
           <p:spPr>
-            <a:xfrm flipH="false" flipV="false" rot="0">
+            <a:xfrm>
               <a:off x="0" y="0"/>
               <a:ext cx="5816600" cy="1840738"/>
             </a:xfrm>
@@ -7676,9 +7792,9 @@
               <a:gdLst/>
               <a:ahLst/>
               <a:cxnLst/>
-              <a:rect r="r" b="b" t="t" l="l"/>
+              <a:rect l="l" t="t" r="r" b="b"/>
               <a:pathLst>
-                <a:path h="1840738" w="5816600">
+                <a:path w="5816600" h="1840738">
                   <a:moveTo>
                     <a:pt x="0" y="0"/>
                   </a:moveTo>
@@ -7701,7 +7817,7 @@
             <a:blipFill>
               <a:blip r:embed="rId2"/>
               <a:stretch>
-                <a:fillRect l="0" t="0" r="0" b="2"/>
+                <a:fillRect b="2"/>
               </a:stretch>
             </a:blipFill>
           </p:spPr>
@@ -7709,12 +7825,12 @@
       </p:grpSp>
       <p:grpSp>
         <p:nvGrpSpPr>
-          <p:cNvPr name="Group 4" id="4"/>
+          <p:cNvPr id="4" name="Group 4"/>
           <p:cNvGrpSpPr/>
           <p:nvPr/>
         </p:nvGrpSpPr>
         <p:grpSpPr>
-          <a:xfrm rot="0">
+          <a:xfrm>
             <a:off x="2928206" y="9780631"/>
             <a:ext cx="2625805" cy="830953"/>
             <a:chOff x="0" y="0"/>
@@ -7723,12 +7839,12 @@
         </p:grpSpPr>
         <p:sp>
           <p:nvSpPr>
-            <p:cNvPr name="Freeform 5" id="5"/>
+            <p:cNvPr id="5" name="Freeform 5"/>
             <p:cNvSpPr/>
             <p:nvPr/>
           </p:nvSpPr>
           <p:spPr>
-            <a:xfrm flipH="false" flipV="false" rot="0">
+            <a:xfrm>
               <a:off x="0" y="0"/>
               <a:ext cx="5816600" cy="1840738"/>
             </a:xfrm>
@@ -7737,9 +7853,9 @@
               <a:gdLst/>
               <a:ahLst/>
               <a:cxnLst/>
-              <a:rect r="r" b="b" t="t" l="l"/>
+              <a:rect l="l" t="t" r="r" b="b"/>
               <a:pathLst>
-                <a:path h="1840738" w="5816600">
+                <a:path w="5816600" h="1840738">
                   <a:moveTo>
                     <a:pt x="0" y="0"/>
                   </a:moveTo>
@@ -7762,7 +7878,7 @@
             <a:blipFill>
               <a:blip r:embed="rId2"/>
               <a:stretch>
-                <a:fillRect l="0" t="0" r="0" b="2"/>
+                <a:fillRect b="2"/>
               </a:stretch>
             </a:blipFill>
           </p:spPr>
@@ -7770,12 +7886,12 @@
       </p:grpSp>
       <p:grpSp>
         <p:nvGrpSpPr>
-          <p:cNvPr name="Group 6" id="6"/>
+          <p:cNvPr id="6" name="Group 6"/>
           <p:cNvGrpSpPr/>
           <p:nvPr/>
         </p:nvGrpSpPr>
         <p:grpSpPr>
-          <a:xfrm rot="0">
+          <a:xfrm>
             <a:off x="13367623" y="9656173"/>
             <a:ext cx="2625805" cy="830953"/>
             <a:chOff x="0" y="0"/>
@@ -7784,12 +7900,12 @@
         </p:grpSpPr>
         <p:sp>
           <p:nvSpPr>
-            <p:cNvPr name="Freeform 7" id="7"/>
+            <p:cNvPr id="7" name="Freeform 7"/>
             <p:cNvSpPr/>
             <p:nvPr/>
           </p:nvSpPr>
           <p:spPr>
-            <a:xfrm flipH="false" flipV="false" rot="0">
+            <a:xfrm>
               <a:off x="0" y="0"/>
               <a:ext cx="5816600" cy="1840738"/>
             </a:xfrm>
@@ -7798,9 +7914,9 @@
               <a:gdLst/>
               <a:ahLst/>
               <a:cxnLst/>
-              <a:rect r="r" b="b" t="t" l="l"/>
+              <a:rect l="l" t="t" r="r" b="b"/>
               <a:pathLst>
-                <a:path h="1840738" w="5816600">
+                <a:path w="5816600" h="1840738">
                   <a:moveTo>
                     <a:pt x="0" y="0"/>
                   </a:moveTo>
@@ -7823,7 +7939,7 @@
             <a:blipFill>
               <a:blip r:embed="rId2"/>
               <a:stretch>
-                <a:fillRect l="0" t="0" r="0" b="2"/>
+                <a:fillRect b="2"/>
               </a:stretch>
             </a:blipFill>
           </p:spPr>
@@ -7831,12 +7947,12 @@
       </p:grpSp>
       <p:grpSp>
         <p:nvGrpSpPr>
-          <p:cNvPr name="Group 8" id="8"/>
+          <p:cNvPr id="8" name="Group 8"/>
           <p:cNvGrpSpPr/>
           <p:nvPr/>
         </p:nvGrpSpPr>
         <p:grpSpPr>
-          <a:xfrm rot="0">
+          <a:xfrm>
             <a:off x="7990242" y="9984655"/>
             <a:ext cx="173987" cy="173987"/>
             <a:chOff x="0" y="0"/>
@@ -7845,12 +7961,12 @@
         </p:grpSpPr>
         <p:sp>
           <p:nvSpPr>
-            <p:cNvPr name="Freeform 9" id="9"/>
+            <p:cNvPr id="9" name="Freeform 9"/>
             <p:cNvSpPr/>
             <p:nvPr/>
           </p:nvSpPr>
           <p:spPr>
-            <a:xfrm flipH="false" flipV="false" rot="0">
+            <a:xfrm>
               <a:off x="0" y="0"/>
               <a:ext cx="812800" cy="812800"/>
             </a:xfrm>
@@ -7859,9 +7975,9 @@
               <a:gdLst/>
               <a:ahLst/>
               <a:cxnLst/>
-              <a:rect r="r" b="b" t="t" l="l"/>
+              <a:rect l="l" t="t" r="r" b="b"/>
               <a:pathLst>
-                <a:path h="812800" w="812800">
+                <a:path w="812800" h="812800">
                   <a:moveTo>
                     <a:pt x="406400" y="0"/>
                   </a:moveTo>
@@ -7896,8 +8012,8 @@
         </p:sp>
         <p:sp>
           <p:nvSpPr>
-            <p:cNvPr name="TextBox 10" id="10"/>
-            <p:cNvSpPr txBox="true"/>
+            <p:cNvPr id="10" name="TextBox 10"/>
+            <p:cNvSpPr txBox="1"/>
             <p:nvPr/>
           </p:nvSpPr>
           <p:spPr>
@@ -7910,7 +8026,7 @@
             </a:prstGeom>
           </p:spPr>
           <p:txBody>
-            <a:bodyPr anchor="ctr" rtlCol="false" tIns="50800" lIns="50800" bIns="50800" rIns="50800"/>
+            <a:bodyPr lIns="50800" tIns="50800" rIns="50800" bIns="50800" rtlCol="0" anchor="ctr"/>
             <a:lstStyle/>
             <a:p>
               <a:pPr algn="ctr">
@@ -7918,18 +8034,19 @@
                   <a:spcPts val="2239"/>
                 </a:lnSpc>
               </a:pPr>
+              <a:endParaRPr/>
             </a:p>
           </p:txBody>
         </p:sp>
       </p:grpSp>
       <p:grpSp>
         <p:nvGrpSpPr>
-          <p:cNvPr name="Group 11" id="11"/>
+          <p:cNvPr id="11" name="Group 11"/>
           <p:cNvGrpSpPr/>
           <p:nvPr/>
         </p:nvGrpSpPr>
         <p:grpSpPr>
-          <a:xfrm rot="0">
+          <a:xfrm>
             <a:off x="10353346" y="9948585"/>
             <a:ext cx="173987" cy="173987"/>
             <a:chOff x="0" y="0"/>
@@ -7938,12 +8055,12 @@
         </p:grpSpPr>
         <p:sp>
           <p:nvSpPr>
-            <p:cNvPr name="Freeform 12" id="12"/>
+            <p:cNvPr id="12" name="Freeform 12"/>
             <p:cNvSpPr/>
             <p:nvPr/>
           </p:nvSpPr>
           <p:spPr>
-            <a:xfrm flipH="false" flipV="false" rot="0">
+            <a:xfrm>
               <a:off x="0" y="0"/>
               <a:ext cx="812800" cy="812800"/>
             </a:xfrm>
@@ -7952,9 +8069,9 @@
               <a:gdLst/>
               <a:ahLst/>
               <a:cxnLst/>
-              <a:rect r="r" b="b" t="t" l="l"/>
+              <a:rect l="l" t="t" r="r" b="b"/>
               <a:pathLst>
-                <a:path h="812800" w="812800">
+                <a:path w="812800" h="812800">
                   <a:moveTo>
                     <a:pt x="406400" y="0"/>
                   </a:moveTo>
@@ -7989,8 +8106,8 @@
         </p:sp>
         <p:sp>
           <p:nvSpPr>
-            <p:cNvPr name="TextBox 13" id="13"/>
-            <p:cNvSpPr txBox="true"/>
+            <p:cNvPr id="13" name="TextBox 13"/>
+            <p:cNvSpPr txBox="1"/>
             <p:nvPr/>
           </p:nvSpPr>
           <p:spPr>
@@ -8003,7 +8120,7 @@
             </a:prstGeom>
           </p:spPr>
           <p:txBody>
-            <a:bodyPr anchor="ctr" rtlCol="false" tIns="50800" lIns="50800" bIns="50800" rIns="50800"/>
+            <a:bodyPr lIns="50800" tIns="50800" rIns="50800" bIns="50800" rtlCol="0" anchor="ctr"/>
             <a:lstStyle/>
             <a:p>
               <a:pPr algn="ctr">
@@ -8011,18 +8128,19 @@
                   <a:spcPts val="2239"/>
                 </a:lnSpc>
               </a:pPr>
+              <a:endParaRPr/>
             </a:p>
           </p:txBody>
         </p:sp>
       </p:grpSp>
       <p:grpSp>
         <p:nvGrpSpPr>
-          <p:cNvPr name="Group 14" id="14"/>
+          <p:cNvPr id="14" name="Group 14"/>
           <p:cNvGrpSpPr/>
           <p:nvPr/>
         </p:nvGrpSpPr>
         <p:grpSpPr>
-          <a:xfrm rot="0">
+          <a:xfrm>
             <a:off x="6871046" y="1893761"/>
             <a:ext cx="4012244" cy="641986"/>
             <a:chOff x="0" y="0"/>
@@ -8031,12 +8149,12 @@
         </p:grpSpPr>
         <p:sp>
           <p:nvSpPr>
-            <p:cNvPr name="Freeform 15" id="15"/>
+            <p:cNvPr id="15" name="Freeform 15"/>
             <p:cNvSpPr/>
             <p:nvPr/>
           </p:nvSpPr>
           <p:spPr>
-            <a:xfrm flipH="false" flipV="false" rot="0">
+            <a:xfrm>
               <a:off x="0" y="0"/>
               <a:ext cx="1056723" cy="169083"/>
             </a:xfrm>
@@ -8045,9 +8163,9 @@
               <a:gdLst/>
               <a:ahLst/>
               <a:cxnLst/>
-              <a:rect r="r" b="b" t="t" l="l"/>
+              <a:rect l="l" t="t" r="r" b="b"/>
               <a:pathLst>
-                <a:path h="169083" w="1056723">
+                <a:path w="1056723" h="169083">
                   <a:moveTo>
                     <a:pt x="84541" y="0"/>
                   </a:moveTo>
@@ -8114,8 +8232,8 @@
         </p:sp>
         <p:sp>
           <p:nvSpPr>
-            <p:cNvPr name="TextBox 16" id="16"/>
-            <p:cNvSpPr txBox="true"/>
+            <p:cNvPr id="16" name="TextBox 16"/>
+            <p:cNvSpPr txBox="1"/>
             <p:nvPr/>
           </p:nvSpPr>
           <p:spPr>
@@ -8128,7 +8246,7 @@
             </a:prstGeom>
           </p:spPr>
           <p:txBody>
-            <a:bodyPr anchor="ctr" rtlCol="false" tIns="50800" lIns="50800" bIns="50800" rIns="50800"/>
+            <a:bodyPr lIns="50800" tIns="50800" rIns="50800" bIns="50800" rtlCol="0" anchor="ctr"/>
             <a:lstStyle/>
             <a:p>
               <a:pPr algn="ctr">
@@ -8136,18 +8254,19 @@
                   <a:spcPts val="2239"/>
                 </a:lnSpc>
               </a:pPr>
+              <a:endParaRPr/>
             </a:p>
           </p:txBody>
         </p:sp>
       </p:grpSp>
       <p:sp>
         <p:nvSpPr>
-          <p:cNvPr name="Freeform 17" id="17"/>
+          <p:cNvPr id="17" name="Freeform 17"/>
           <p:cNvSpPr/>
           <p:nvPr/>
         </p:nvSpPr>
         <p:spPr>
-          <a:xfrm flipH="false" flipV="false" rot="0">
+          <a:xfrm>
             <a:off x="13002366" y="-47625"/>
             <a:ext cx="5063940" cy="1941386"/>
           </a:xfrm>
@@ -8156,9 +8275,9 @@
             <a:gdLst/>
             <a:ahLst/>
             <a:cxnLst/>
-            <a:rect r="r" b="b" t="t" l="l"/>
+            <a:rect l="l" t="t" r="r" b="b"/>
             <a:pathLst>
-              <a:path h="1941386" w="5063940">
+              <a:path w="5063940" h="1941386">
                 <a:moveTo>
                   <a:pt x="0" y="0"/>
                 </a:moveTo>
@@ -8181,19 +8300,19 @@
           <a:blipFill>
             <a:blip r:embed="rId3"/>
             <a:stretch>
-              <a:fillRect l="0" t="0" r="0" b="0"/>
+              <a:fillRect/>
             </a:stretch>
           </a:blipFill>
         </p:spPr>
       </p:sp>
       <p:sp>
         <p:nvSpPr>
-          <p:cNvPr name="TextBox 18" id="18"/>
-          <p:cNvSpPr txBox="true"/>
+          <p:cNvPr id="18" name="TextBox 18"/>
+          <p:cNvSpPr txBox="1"/>
           <p:nvPr/>
         </p:nvSpPr>
         <p:spPr>
-          <a:xfrm rot="0">
+          <a:xfrm>
             <a:off x="8316142" y="9882546"/>
             <a:ext cx="1743273" cy="264135"/>
           </a:xfrm>
@@ -8202,7 +8321,7 @@
           </a:prstGeom>
         </p:spPr>
         <p:txBody>
-          <a:bodyPr anchor="t" rtlCol="false" tIns="0" lIns="0" bIns="0" rIns="0">
+          <a:bodyPr lIns="0" tIns="0" rIns="0" bIns="0" rtlCol="0" anchor="t">
             <a:spAutoFit/>
           </a:bodyPr>
           <a:lstStyle/>
@@ -8229,12 +8348,12 @@
       </p:sp>
       <p:sp>
         <p:nvSpPr>
-          <p:cNvPr name="Freeform 19" id="19"/>
+          <p:cNvPr id="19" name="Freeform 19"/>
           <p:cNvSpPr/>
           <p:nvPr/>
         </p:nvSpPr>
         <p:spPr>
-          <a:xfrm flipH="false" flipV="false" rot="0">
+          <a:xfrm>
             <a:off x="7638528" y="-208256"/>
             <a:ext cx="2134862" cy="2130592"/>
           </a:xfrm>
@@ -8243,9 +8362,9 @@
             <a:gdLst/>
             <a:ahLst/>
             <a:cxnLst/>
-            <a:rect r="r" b="b" t="t" l="l"/>
+            <a:rect l="l" t="t" r="r" b="b"/>
             <a:pathLst>
-              <a:path h="2130592" w="2134862">
+              <a:path w="2134862" h="2130592">
                 <a:moveTo>
                   <a:pt x="0" y="0"/>
                 </a:moveTo>
@@ -8268,19 +8387,19 @@
           <a:blipFill>
             <a:blip r:embed="rId4"/>
             <a:stretch>
-              <a:fillRect l="0" t="0" r="0" b="0"/>
+              <a:fillRect/>
             </a:stretch>
           </a:blipFill>
         </p:spPr>
       </p:sp>
       <p:grpSp>
         <p:nvGrpSpPr>
-          <p:cNvPr name="Group 20" id="20"/>
+          <p:cNvPr id="20" name="Group 20"/>
           <p:cNvGrpSpPr/>
           <p:nvPr/>
         </p:nvGrpSpPr>
         <p:grpSpPr>
-          <a:xfrm rot="0">
+          <a:xfrm>
             <a:off x="16388711" y="8987334"/>
             <a:ext cx="1677594" cy="1065265"/>
             <a:chOff x="0" y="0"/>
@@ -8289,12 +8408,12 @@
         </p:grpSpPr>
         <p:sp>
           <p:nvSpPr>
-            <p:cNvPr name="Freeform 21" id="21"/>
+            <p:cNvPr id="21" name="Freeform 21"/>
             <p:cNvSpPr/>
             <p:nvPr/>
           </p:nvSpPr>
           <p:spPr>
-            <a:xfrm flipH="false" flipV="false" rot="0">
+            <a:xfrm>
               <a:off x="0" y="0"/>
               <a:ext cx="4028567" cy="2558161"/>
             </a:xfrm>
@@ -8303,9 +8422,9 @@
               <a:gdLst/>
               <a:ahLst/>
               <a:cxnLst/>
-              <a:rect r="r" b="b" t="t" l="l"/>
+              <a:rect l="l" t="t" r="r" b="b"/>
               <a:pathLst>
-                <a:path h="2558161" w="4028567">
+                <a:path w="4028567" h="2558161">
                   <a:moveTo>
                     <a:pt x="0" y="0"/>
                   </a:moveTo>
@@ -8328,7 +8447,7 @@
             <a:blipFill>
               <a:blip r:embed="rId5"/>
               <a:stretch>
-                <a:fillRect l="0" t="0" r="0" b="1"/>
+                <a:fillRect b="1"/>
               </a:stretch>
             </a:blipFill>
           </p:spPr>
@@ -8336,12 +8455,12 @@
       </p:grpSp>
       <p:grpSp>
         <p:nvGrpSpPr>
-          <p:cNvPr name="Group 22" id="22"/>
+          <p:cNvPr id="22" name="Group 22"/>
           <p:cNvGrpSpPr/>
           <p:nvPr/>
         </p:nvGrpSpPr>
         <p:grpSpPr>
-          <a:xfrm rot="0">
+          <a:xfrm>
             <a:off x="16564806" y="3523271"/>
             <a:ext cx="2625805" cy="830953"/>
             <a:chOff x="0" y="0"/>
@@ -8350,12 +8469,12 @@
         </p:grpSpPr>
         <p:sp>
           <p:nvSpPr>
-            <p:cNvPr name="Freeform 23" id="23"/>
+            <p:cNvPr id="23" name="Freeform 23"/>
             <p:cNvSpPr/>
             <p:nvPr/>
           </p:nvSpPr>
           <p:spPr>
-            <a:xfrm flipH="false" flipV="false" rot="0">
+            <a:xfrm>
               <a:off x="0" y="0"/>
               <a:ext cx="5816600" cy="1840738"/>
             </a:xfrm>
@@ -8364,9 +8483,9 @@
               <a:gdLst/>
               <a:ahLst/>
               <a:cxnLst/>
-              <a:rect r="r" b="b" t="t" l="l"/>
+              <a:rect l="l" t="t" r="r" b="b"/>
               <a:pathLst>
-                <a:path h="1840738" w="5816600">
+                <a:path w="5816600" h="1840738">
                   <a:moveTo>
                     <a:pt x="0" y="0"/>
                   </a:moveTo>
@@ -8389,7 +8508,7 @@
             <a:blipFill>
               <a:blip r:embed="rId2"/>
               <a:stretch>
-                <a:fillRect l="0" t="0" r="0" b="2"/>
+                <a:fillRect b="2"/>
               </a:stretch>
             </a:blipFill>
           </p:spPr>
@@ -8397,12 +8516,12 @@
       </p:grpSp>
       <p:sp>
         <p:nvSpPr>
-          <p:cNvPr name="TextBox 24" id="24"/>
-          <p:cNvSpPr txBox="true"/>
+          <p:cNvPr id="24" name="TextBox 24"/>
+          <p:cNvSpPr txBox="1"/>
           <p:nvPr/>
         </p:nvSpPr>
         <p:spPr>
-          <a:xfrm rot="0">
+          <a:xfrm>
             <a:off x="7326063" y="1937259"/>
             <a:ext cx="3027283" cy="497841"/>
           </a:xfrm>
@@ -8411,7 +8530,7 @@
           </a:prstGeom>
         </p:spPr>
         <p:txBody>
-          <a:bodyPr anchor="t" rtlCol="false" tIns="0" lIns="0" bIns="0" rIns="0" wrap="none">
+          <a:bodyPr wrap="none" lIns="0" tIns="0" rIns="0" bIns="0" rtlCol="0" anchor="t">
             <a:spAutoFit/>
           </a:bodyPr>
           <a:lstStyle/>
@@ -8441,21 +8560,21 @@
       </p:sp>
       <p:sp>
         <p:nvSpPr>
-          <p:cNvPr name="TextBox 25" id="25"/>
-          <p:cNvSpPr txBox="true"/>
+          <p:cNvPr id="25" name="TextBox 25"/>
+          <p:cNvSpPr txBox="1"/>
           <p:nvPr/>
         </p:nvSpPr>
         <p:spPr>
-          <a:xfrm rot="0">
+          <a:xfrm>
             <a:off x="1188720" y="2834640"/>
-            <a:ext cx="14356080" cy="5669280"/>
+            <a:ext cx="14356080" cy="4019049"/>
           </a:xfrm>
           <a:prstGeom prst="rect">
             <a:avLst/>
           </a:prstGeom>
         </p:spPr>
         <p:txBody>
-          <a:bodyPr anchor="t" rtlCol="false" tIns="0" lIns="0" bIns="0" rIns="0" wrap="square">
+          <a:bodyPr wrap="square" lIns="0" tIns="0" rIns="0" bIns="0" rtlCol="0" anchor="t">
             <a:spAutoFit/>
           </a:bodyPr>
           <a:lstStyle/>
@@ -8472,13 +8591,16 @@
               </a:spcAft>
             </a:pPr>
             <a:r>
-              <a:rPr sz="2800" b="1">
-                <a:solidFill>
-                  <a:srgbClr val="FF3131"/>
-                </a:solidFill>
-                <a:latin typeface="IBM Plex Sans"/>
-              </a:rPr>
-              <a:t>GhostQPU: proof that your quantum job really ran on a quantum computer.</a:t>
+              <a:rPr sz="3200" b="1" dirty="0" err="1">
+                <a:latin typeface="IBM Plex Sans"/>
+              </a:rPr>
+              <a:t>GhostQPU</a:t>
+            </a:r>
+            <a:r>
+              <a:rPr sz="3200" b="1" dirty="0">
+                <a:latin typeface="IBM Plex Sans"/>
+              </a:rPr>
+              <a:t>: proof that your quantum job really ran on a quantum computer.</a:t>
             </a:r>
           </a:p>
           <a:p>
@@ -8488,7 +8610,7 @@
               </a:spcAft>
             </a:pPr>
             <a:r>
-              <a:rPr sz="1560" b="0">
+              <a:rPr sz="1560" b="0" dirty="0">
                 <a:solidFill>
                   <a:srgbClr val="FF3131"/>
                 </a:solidFill>
@@ -8497,7 +8619,7 @@
               <a:t>■  </a:t>
             </a:r>
             <a:r>
-              <a:rPr sz="2600" b="1">
+              <a:rPr sz="2600" b="1" dirty="0">
                 <a:solidFill>
                   <a:srgbClr val="000000"/>
                 </a:solidFill>
@@ -8506,7 +8628,7 @@
               <a:t>Hidden canaries: </a:t>
             </a:r>
             <a:r>
-              <a:rPr sz="2600" b="0">
+              <a:rPr sz="2600" b="0" dirty="0">
                 <a:solidFill>
                   <a:srgbClr val="000000"/>
                 </a:solidFill>
@@ -8522,7 +8644,7 @@
               </a:spcAft>
             </a:pPr>
             <a:r>
-              <a:rPr sz="1560" b="0">
+              <a:rPr sz="1560" b="0" dirty="0">
                 <a:solidFill>
                   <a:srgbClr val="FF3131"/>
                 </a:solidFill>
@@ -8531,7 +8653,7 @@
               <a:t>■  </a:t>
             </a:r>
             <a:r>
-              <a:rPr sz="2600" b="1">
+              <a:rPr sz="2600" b="1" dirty="0">
                 <a:solidFill>
                   <a:srgbClr val="000000"/>
                 </a:solidFill>
@@ -8540,7 +8662,7 @@
               <a:t>Physics a simulator leaves out: </a:t>
             </a:r>
             <a:r>
-              <a:rPr sz="2600" b="0">
+              <a:rPr sz="2600" b="0" dirty="0">
                 <a:solidFill>
                   <a:srgbClr val="000000"/>
                 </a:solidFill>
@@ -8556,7 +8678,7 @@
               </a:spcAft>
             </a:pPr>
             <a:r>
-              <a:rPr sz="1560" b="0">
+              <a:rPr sz="1560" b="0" dirty="0">
                 <a:solidFill>
                   <a:srgbClr val="FF3131"/>
                 </a:solidFill>
@@ -8565,7 +8687,7 @@
               <a:t>■  </a:t>
             </a:r>
             <a:r>
-              <a:rPr sz="2600" b="1">
+              <a:rPr sz="2600" b="1" dirty="0">
                 <a:solidFill>
                   <a:srgbClr val="000000"/>
                 </a:solidFill>
@@ -8574,7 +8696,7 @@
               <a:t>Detector: </a:t>
             </a:r>
             <a:r>
-              <a:rPr sz="2600" b="0">
+              <a:rPr sz="2600" b="0" dirty="0">
                 <a:solidFill>
                   <a:srgbClr val="000000"/>
                 </a:solidFill>
@@ -8590,7 +8712,7 @@
               </a:spcAft>
             </a:pPr>
             <a:r>
-              <a:rPr sz="1560" b="0">
+              <a:rPr sz="1560" b="0" dirty="0">
                 <a:solidFill>
                   <a:srgbClr val="FF3131"/>
                 </a:solidFill>
@@ -8599,7 +8721,7 @@
               <a:t>■  </a:t>
             </a:r>
             <a:r>
-              <a:rPr sz="2600" b="1">
+              <a:rPr sz="2600" b="1" dirty="0">
                 <a:solidFill>
                   <a:srgbClr val="000000"/>
                 </a:solidFill>
@@ -8608,7 +8730,7 @@
               <a:t>We built the attacker too: </a:t>
             </a:r>
             <a:r>
-              <a:rPr sz="2600" b="0">
+              <a:rPr sz="2600" b="0" dirty="0">
                 <a:solidFill>
                   <a:srgbClr val="000000"/>
                 </a:solidFill>
@@ -8621,12 +8743,12 @@
       </p:sp>
       <p:sp>
         <p:nvSpPr>
-          <p:cNvPr name="Freeform 26" id="26"/>
+          <p:cNvPr id="26" name="Freeform 26"/>
           <p:cNvSpPr/>
           <p:nvPr/>
         </p:nvSpPr>
         <p:spPr>
-          <a:xfrm flipH="false" flipV="false" rot="0">
+          <a:xfrm>
             <a:off x="264376" y="407706"/>
             <a:ext cx="3092172" cy="1030724"/>
           </a:xfrm>
@@ -8635,9 +8757,9 @@
             <a:gdLst/>
             <a:ahLst/>
             <a:cxnLst/>
-            <a:rect r="r" b="b" t="t" l="l"/>
+            <a:rect l="l" t="t" r="r" b="b"/>
             <a:pathLst>
-              <a:path h="1030724" w="3092172">
+              <a:path w="3092172" h="1030724">
                 <a:moveTo>
                   <a:pt x="0" y="0"/>
                 </a:moveTo>
@@ -8660,7 +8782,7 @@
           <a:blipFill>
             <a:blip r:embed="rId6"/>
             <a:stretch>
-              <a:fillRect l="0" t="0" r="0" b="0"/>
+              <a:fillRect/>
             </a:stretch>
           </a:blipFill>
         </p:spPr>
@@ -8674,13 +8796,14 @@
 </file>
 
 <file path=ppt/slides/slide5.xml><?xml version="1.0" encoding="utf-8"?>
-<p:sld xmlns:p="http://schemas.openxmlformats.org/presentationml/2006/main" xmlns:a="http://schemas.openxmlformats.org/drawingml/2006/main" xmlns:r="http://schemas.openxmlformats.org/officeDocument/2006/relationships">
+<p:sld xmlns:a="http://schemas.openxmlformats.org/drawingml/2006/main" xmlns:r="http://schemas.openxmlformats.org/officeDocument/2006/relationships" xmlns:p="http://schemas.openxmlformats.org/presentationml/2006/main">
   <p:cSld>
     <p:bg>
       <p:bgPr>
         <a:solidFill>
           <a:srgbClr val="E0E0E0"/>
         </a:solidFill>
+        <a:effectLst/>
       </p:bgPr>
     </p:bg>
     <p:spTree>
@@ -8699,12 +8822,12 @@
       </p:grpSpPr>
       <p:grpSp>
         <p:nvGrpSpPr>
-          <p:cNvPr name="Group 2" id="2"/>
+          <p:cNvPr id="2" name="Group 2"/>
           <p:cNvGrpSpPr/>
           <p:nvPr/>
         </p:nvGrpSpPr>
         <p:grpSpPr>
-          <a:xfrm rot="0">
+          <a:xfrm>
             <a:off x="-1597105" y="2516808"/>
             <a:ext cx="2625805" cy="830953"/>
             <a:chOff x="0" y="0"/>
@@ -8713,12 +8836,12 @@
         </p:grpSpPr>
         <p:sp>
           <p:nvSpPr>
-            <p:cNvPr name="Freeform 3" id="3"/>
+            <p:cNvPr id="3" name="Freeform 3"/>
             <p:cNvSpPr/>
             <p:nvPr/>
           </p:nvSpPr>
           <p:spPr>
-            <a:xfrm flipH="false" flipV="false" rot="0">
+            <a:xfrm>
               <a:off x="0" y="0"/>
               <a:ext cx="5816600" cy="1840738"/>
             </a:xfrm>
@@ -8727,9 +8850,9 @@
               <a:gdLst/>
               <a:ahLst/>
               <a:cxnLst/>
-              <a:rect r="r" b="b" t="t" l="l"/>
+              <a:rect l="l" t="t" r="r" b="b"/>
               <a:pathLst>
-                <a:path h="1840738" w="5816600">
+                <a:path w="5816600" h="1840738">
                   <a:moveTo>
                     <a:pt x="0" y="0"/>
                   </a:moveTo>
@@ -8752,7 +8875,7 @@
             <a:blipFill>
               <a:blip r:embed="rId2"/>
               <a:stretch>
-                <a:fillRect l="0" t="0" r="0" b="2"/>
+                <a:fillRect b="2"/>
               </a:stretch>
             </a:blipFill>
           </p:spPr>
@@ -8760,12 +8883,12 @@
       </p:grpSp>
       <p:grpSp>
         <p:nvGrpSpPr>
-          <p:cNvPr name="Group 4" id="4"/>
+          <p:cNvPr id="4" name="Group 4"/>
           <p:cNvGrpSpPr/>
           <p:nvPr/>
         </p:nvGrpSpPr>
         <p:grpSpPr>
-          <a:xfrm rot="0">
+          <a:xfrm>
             <a:off x="2928206" y="9780631"/>
             <a:ext cx="2625805" cy="830953"/>
             <a:chOff x="0" y="0"/>
@@ -8774,12 +8897,12 @@
         </p:grpSpPr>
         <p:sp>
           <p:nvSpPr>
-            <p:cNvPr name="Freeform 5" id="5"/>
+            <p:cNvPr id="5" name="Freeform 5"/>
             <p:cNvSpPr/>
             <p:nvPr/>
           </p:nvSpPr>
           <p:spPr>
-            <a:xfrm flipH="false" flipV="false" rot="0">
+            <a:xfrm>
               <a:off x="0" y="0"/>
               <a:ext cx="5816600" cy="1840738"/>
             </a:xfrm>
@@ -8788,9 +8911,9 @@
               <a:gdLst/>
               <a:ahLst/>
               <a:cxnLst/>
-              <a:rect r="r" b="b" t="t" l="l"/>
+              <a:rect l="l" t="t" r="r" b="b"/>
               <a:pathLst>
-                <a:path h="1840738" w="5816600">
+                <a:path w="5816600" h="1840738">
                   <a:moveTo>
                     <a:pt x="0" y="0"/>
                   </a:moveTo>
@@ -8813,7 +8936,7 @@
             <a:blipFill>
               <a:blip r:embed="rId2"/>
               <a:stretch>
-                <a:fillRect l="0" t="0" r="0" b="2"/>
+                <a:fillRect b="2"/>
               </a:stretch>
             </a:blipFill>
           </p:spPr>
@@ -8821,12 +8944,12 @@
       </p:grpSp>
       <p:grpSp>
         <p:nvGrpSpPr>
-          <p:cNvPr name="Group 6" id="6"/>
+          <p:cNvPr id="6" name="Group 6"/>
           <p:cNvGrpSpPr/>
           <p:nvPr/>
         </p:nvGrpSpPr>
         <p:grpSpPr>
-          <a:xfrm rot="0">
+          <a:xfrm>
             <a:off x="13367623" y="9656173"/>
             <a:ext cx="2625805" cy="830953"/>
             <a:chOff x="0" y="0"/>
@@ -8835,12 +8958,12 @@
         </p:grpSpPr>
         <p:sp>
           <p:nvSpPr>
-            <p:cNvPr name="Freeform 7" id="7"/>
+            <p:cNvPr id="7" name="Freeform 7"/>
             <p:cNvSpPr/>
             <p:nvPr/>
           </p:nvSpPr>
           <p:spPr>
-            <a:xfrm flipH="false" flipV="false" rot="0">
+            <a:xfrm>
               <a:off x="0" y="0"/>
               <a:ext cx="5816600" cy="1840738"/>
             </a:xfrm>
@@ -8849,9 +8972,9 @@
               <a:gdLst/>
               <a:ahLst/>
               <a:cxnLst/>
-              <a:rect r="r" b="b" t="t" l="l"/>
+              <a:rect l="l" t="t" r="r" b="b"/>
               <a:pathLst>
-                <a:path h="1840738" w="5816600">
+                <a:path w="5816600" h="1840738">
                   <a:moveTo>
                     <a:pt x="0" y="0"/>
                   </a:moveTo>
@@ -8874,7 +8997,7 @@
             <a:blipFill>
               <a:blip r:embed="rId2"/>
               <a:stretch>
-                <a:fillRect l="0" t="0" r="0" b="2"/>
+                <a:fillRect b="2"/>
               </a:stretch>
             </a:blipFill>
           </p:spPr>
@@ -8882,12 +9005,12 @@
       </p:grpSp>
       <p:grpSp>
         <p:nvGrpSpPr>
-          <p:cNvPr name="Group 8" id="8"/>
+          <p:cNvPr id="8" name="Group 8"/>
           <p:cNvGrpSpPr/>
           <p:nvPr/>
         </p:nvGrpSpPr>
         <p:grpSpPr>
-          <a:xfrm rot="0">
+          <a:xfrm>
             <a:off x="7990242" y="9984655"/>
             <a:ext cx="173987" cy="173987"/>
             <a:chOff x="0" y="0"/>
@@ -8896,12 +9019,12 @@
         </p:grpSpPr>
         <p:sp>
           <p:nvSpPr>
-            <p:cNvPr name="Freeform 9" id="9"/>
+            <p:cNvPr id="9" name="Freeform 9"/>
             <p:cNvSpPr/>
             <p:nvPr/>
           </p:nvSpPr>
           <p:spPr>
-            <a:xfrm flipH="false" flipV="false" rot="0">
+            <a:xfrm>
               <a:off x="0" y="0"/>
               <a:ext cx="812800" cy="812800"/>
             </a:xfrm>
@@ -8910,9 +9033,9 @@
               <a:gdLst/>
               <a:ahLst/>
               <a:cxnLst/>
-              <a:rect r="r" b="b" t="t" l="l"/>
+              <a:rect l="l" t="t" r="r" b="b"/>
               <a:pathLst>
-                <a:path h="812800" w="812800">
+                <a:path w="812800" h="812800">
                   <a:moveTo>
                     <a:pt x="406400" y="0"/>
                   </a:moveTo>
@@ -8947,8 +9070,8 @@
         </p:sp>
         <p:sp>
           <p:nvSpPr>
-            <p:cNvPr name="TextBox 10" id="10"/>
-            <p:cNvSpPr txBox="true"/>
+            <p:cNvPr id="10" name="TextBox 10"/>
+            <p:cNvSpPr txBox="1"/>
             <p:nvPr/>
           </p:nvSpPr>
           <p:spPr>
@@ -8961,7 +9084,7 @@
             </a:prstGeom>
           </p:spPr>
           <p:txBody>
-            <a:bodyPr anchor="ctr" rtlCol="false" tIns="50800" lIns="50800" bIns="50800" rIns="50800"/>
+            <a:bodyPr lIns="50800" tIns="50800" rIns="50800" bIns="50800" rtlCol="0" anchor="ctr"/>
             <a:lstStyle/>
             <a:p>
               <a:pPr algn="ctr">
@@ -8969,18 +9092,19 @@
                   <a:spcPts val="2239"/>
                 </a:lnSpc>
               </a:pPr>
+              <a:endParaRPr/>
             </a:p>
           </p:txBody>
         </p:sp>
       </p:grpSp>
       <p:grpSp>
         <p:nvGrpSpPr>
-          <p:cNvPr name="Group 11" id="11"/>
+          <p:cNvPr id="11" name="Group 11"/>
           <p:cNvGrpSpPr/>
           <p:nvPr/>
         </p:nvGrpSpPr>
         <p:grpSpPr>
-          <a:xfrm rot="0">
+          <a:xfrm>
             <a:off x="10353346" y="9948585"/>
             <a:ext cx="173987" cy="173987"/>
             <a:chOff x="0" y="0"/>
@@ -8989,12 +9113,12 @@
         </p:grpSpPr>
         <p:sp>
           <p:nvSpPr>
-            <p:cNvPr name="Freeform 12" id="12"/>
+            <p:cNvPr id="12" name="Freeform 12"/>
             <p:cNvSpPr/>
             <p:nvPr/>
           </p:nvSpPr>
           <p:spPr>
-            <a:xfrm flipH="false" flipV="false" rot="0">
+            <a:xfrm>
               <a:off x="0" y="0"/>
               <a:ext cx="812800" cy="812800"/>
             </a:xfrm>
@@ -9003,9 +9127,9 @@
               <a:gdLst/>
               <a:ahLst/>
               <a:cxnLst/>
-              <a:rect r="r" b="b" t="t" l="l"/>
+              <a:rect l="l" t="t" r="r" b="b"/>
               <a:pathLst>
-                <a:path h="812800" w="812800">
+                <a:path w="812800" h="812800">
                   <a:moveTo>
                     <a:pt x="406400" y="0"/>
                   </a:moveTo>
@@ -9040,8 +9164,8 @@
         </p:sp>
         <p:sp>
           <p:nvSpPr>
-            <p:cNvPr name="TextBox 13" id="13"/>
-            <p:cNvSpPr txBox="true"/>
+            <p:cNvPr id="13" name="TextBox 13"/>
+            <p:cNvSpPr txBox="1"/>
             <p:nvPr/>
           </p:nvSpPr>
           <p:spPr>
@@ -9054,7 +9178,7 @@
             </a:prstGeom>
           </p:spPr>
           <p:txBody>
-            <a:bodyPr anchor="ctr" rtlCol="false" tIns="50800" lIns="50800" bIns="50800" rIns="50800"/>
+            <a:bodyPr lIns="50800" tIns="50800" rIns="50800" bIns="50800" rtlCol="0" anchor="ctr"/>
             <a:lstStyle/>
             <a:p>
               <a:pPr algn="ctr">
@@ -9062,18 +9186,19 @@
                   <a:spcPts val="2239"/>
                 </a:lnSpc>
               </a:pPr>
+              <a:endParaRPr/>
             </a:p>
           </p:txBody>
         </p:sp>
       </p:grpSp>
       <p:grpSp>
         <p:nvGrpSpPr>
-          <p:cNvPr name="Group 14" id="14"/>
+          <p:cNvPr id="14" name="Group 14"/>
           <p:cNvGrpSpPr/>
           <p:nvPr/>
         </p:nvGrpSpPr>
         <p:grpSpPr>
-          <a:xfrm rot="0">
+          <a:xfrm>
             <a:off x="6906921" y="1893761"/>
             <a:ext cx="3533419" cy="641986"/>
             <a:chOff x="0" y="0"/>
@@ -9082,12 +9207,12 @@
         </p:grpSpPr>
         <p:sp>
           <p:nvSpPr>
-            <p:cNvPr name="Freeform 15" id="15"/>
+            <p:cNvPr id="15" name="Freeform 15"/>
             <p:cNvSpPr/>
             <p:nvPr/>
           </p:nvSpPr>
           <p:spPr>
-            <a:xfrm flipH="false" flipV="false" rot="0">
+            <a:xfrm>
               <a:off x="0" y="0"/>
               <a:ext cx="930612" cy="169083"/>
             </a:xfrm>
@@ -9096,9 +9221,9 @@
               <a:gdLst/>
               <a:ahLst/>
               <a:cxnLst/>
-              <a:rect r="r" b="b" t="t" l="l"/>
+              <a:rect l="l" t="t" r="r" b="b"/>
               <a:pathLst>
-                <a:path h="169083" w="930612">
+                <a:path w="930612" h="169083">
                   <a:moveTo>
                     <a:pt x="84541" y="0"/>
                   </a:moveTo>
@@ -9165,8 +9290,8 @@
         </p:sp>
         <p:sp>
           <p:nvSpPr>
-            <p:cNvPr name="TextBox 16" id="16"/>
-            <p:cNvSpPr txBox="true"/>
+            <p:cNvPr id="16" name="TextBox 16"/>
+            <p:cNvSpPr txBox="1"/>
             <p:nvPr/>
           </p:nvSpPr>
           <p:spPr>
@@ -9179,7 +9304,7 @@
             </a:prstGeom>
           </p:spPr>
           <p:txBody>
-            <a:bodyPr anchor="ctr" rtlCol="false" tIns="50800" lIns="50800" bIns="50800" rIns="50800"/>
+            <a:bodyPr lIns="50800" tIns="50800" rIns="50800" bIns="50800" rtlCol="0" anchor="ctr"/>
             <a:lstStyle/>
             <a:p>
               <a:pPr algn="ctr">
@@ -9187,18 +9312,19 @@
                   <a:spcPts val="2239"/>
                 </a:lnSpc>
               </a:pPr>
+              <a:endParaRPr/>
             </a:p>
           </p:txBody>
         </p:sp>
       </p:grpSp>
       <p:sp>
         <p:nvSpPr>
-          <p:cNvPr name="Freeform 17" id="17"/>
+          <p:cNvPr id="17" name="Freeform 17"/>
           <p:cNvSpPr/>
           <p:nvPr/>
         </p:nvSpPr>
         <p:spPr>
-          <a:xfrm flipH="false" flipV="false" rot="0">
+          <a:xfrm>
             <a:off x="13135716" y="-28575"/>
             <a:ext cx="5063940" cy="1941386"/>
           </a:xfrm>
@@ -9207,9 +9333,9 @@
             <a:gdLst/>
             <a:ahLst/>
             <a:cxnLst/>
-            <a:rect r="r" b="b" t="t" l="l"/>
+            <a:rect l="l" t="t" r="r" b="b"/>
             <a:pathLst>
-              <a:path h="1941386" w="5063940">
+              <a:path w="5063940" h="1941386">
                 <a:moveTo>
                   <a:pt x="0" y="0"/>
                 </a:moveTo>
@@ -9232,19 +9358,19 @@
           <a:blipFill>
             <a:blip r:embed="rId3"/>
             <a:stretch>
-              <a:fillRect l="0" t="0" r="0" b="0"/>
+              <a:fillRect/>
             </a:stretch>
           </a:blipFill>
         </p:spPr>
       </p:sp>
       <p:sp>
         <p:nvSpPr>
-          <p:cNvPr name="TextBox 18" id="18"/>
-          <p:cNvSpPr txBox="true"/>
+          <p:cNvPr id="18" name="TextBox 18"/>
+          <p:cNvSpPr txBox="1"/>
           <p:nvPr/>
         </p:nvSpPr>
         <p:spPr>
-          <a:xfrm rot="0">
+          <a:xfrm>
             <a:off x="8316142" y="9882546"/>
             <a:ext cx="1743273" cy="264135"/>
           </a:xfrm>
@@ -9253,7 +9379,7 @@
           </a:prstGeom>
         </p:spPr>
         <p:txBody>
-          <a:bodyPr anchor="t" rtlCol="false" tIns="0" lIns="0" bIns="0" rIns="0">
+          <a:bodyPr lIns="0" tIns="0" rIns="0" bIns="0" rtlCol="0" anchor="t">
             <a:spAutoFit/>
           </a:bodyPr>
           <a:lstStyle/>
@@ -9280,12 +9406,12 @@
       </p:sp>
       <p:sp>
         <p:nvSpPr>
-          <p:cNvPr name="Freeform 19" id="19"/>
+          <p:cNvPr id="19" name="Freeform 19"/>
           <p:cNvSpPr/>
           <p:nvPr/>
         </p:nvSpPr>
         <p:spPr>
-          <a:xfrm flipH="false" flipV="false" rot="0">
+          <a:xfrm>
             <a:off x="7514703" y="-217781"/>
             <a:ext cx="2134862" cy="2130592"/>
           </a:xfrm>
@@ -9294,9 +9420,9 @@
             <a:gdLst/>
             <a:ahLst/>
             <a:cxnLst/>
-            <a:rect r="r" b="b" t="t" l="l"/>
+            <a:rect l="l" t="t" r="r" b="b"/>
             <a:pathLst>
-              <a:path h="2130592" w="2134862">
+              <a:path w="2134862" h="2130592">
                 <a:moveTo>
                   <a:pt x="0" y="0"/>
                 </a:moveTo>
@@ -9319,19 +9445,19 @@
           <a:blipFill>
             <a:blip r:embed="rId4"/>
             <a:stretch>
-              <a:fillRect l="0" t="0" r="0" b="0"/>
+              <a:fillRect/>
             </a:stretch>
           </a:blipFill>
         </p:spPr>
       </p:sp>
       <p:grpSp>
         <p:nvGrpSpPr>
-          <p:cNvPr name="Group 20" id="20"/>
+          <p:cNvPr id="20" name="Group 20"/>
           <p:cNvGrpSpPr/>
           <p:nvPr/>
         </p:nvGrpSpPr>
         <p:grpSpPr>
-          <a:xfrm rot="0">
+          <a:xfrm>
             <a:off x="16525717" y="8546310"/>
             <a:ext cx="1467166" cy="1525339"/>
             <a:chOff x="0" y="0"/>
@@ -9340,12 +9466,12 @@
         </p:grpSpPr>
         <p:sp>
           <p:nvSpPr>
-            <p:cNvPr name="Freeform 21" id="21"/>
+            <p:cNvPr id="21" name="Freeform 21"/>
             <p:cNvSpPr/>
             <p:nvPr/>
           </p:nvSpPr>
           <p:spPr>
-            <a:xfrm flipH="false" flipV="false" rot="0">
+            <a:xfrm>
               <a:off x="0" y="0"/>
               <a:ext cx="3890137" cy="4044315"/>
             </a:xfrm>
@@ -9354,9 +9480,9 @@
               <a:gdLst/>
               <a:ahLst/>
               <a:cxnLst/>
-              <a:rect r="r" b="b" t="t" l="l"/>
+              <a:rect l="l" t="t" r="r" b="b"/>
               <a:pathLst>
-                <a:path h="4044315" w="3890137">
+                <a:path w="3890137" h="4044315">
                   <a:moveTo>
                     <a:pt x="0" y="0"/>
                   </a:moveTo>
@@ -9379,7 +9505,7 @@
             <a:blipFill>
               <a:blip r:embed="rId5"/>
               <a:stretch>
-                <a:fillRect l="0" t="0" r="0" b="-1"/>
+                <a:fillRect b="-1"/>
               </a:stretch>
             </a:blipFill>
           </p:spPr>
@@ -9387,12 +9513,12 @@
       </p:grpSp>
       <p:sp>
         <p:nvSpPr>
-          <p:cNvPr name="TextBox 22" id="22"/>
-          <p:cNvSpPr txBox="true"/>
+          <p:cNvPr id="22" name="TextBox 22"/>
+          <p:cNvSpPr txBox="1"/>
           <p:nvPr/>
         </p:nvSpPr>
         <p:spPr>
-          <a:xfrm rot="0">
+          <a:xfrm>
             <a:off x="7514703" y="1963294"/>
             <a:ext cx="2342555" cy="455296"/>
           </a:xfrm>
@@ -9401,7 +9527,7 @@
           </a:prstGeom>
         </p:spPr>
         <p:txBody>
-          <a:bodyPr anchor="t" rtlCol="false" tIns="0" lIns="0" bIns="0" rIns="0" wrap="none">
+          <a:bodyPr wrap="none" lIns="0" tIns="0" rIns="0" bIns="0" rtlCol="0" anchor="t">
             <a:spAutoFit/>
           </a:bodyPr>
           <a:lstStyle/>
@@ -9431,12 +9557,12 @@
       </p:sp>
       <p:sp>
         <p:nvSpPr>
-          <p:cNvPr name="TextBox 23" id="23"/>
-          <p:cNvSpPr txBox="true"/>
+          <p:cNvPr id="23" name="TextBox 23"/>
+          <p:cNvSpPr txBox="1"/>
           <p:nvPr/>
         </p:nvSpPr>
         <p:spPr>
-          <a:xfrm rot="0">
+          <a:xfrm>
             <a:off x="1188720" y="2971800"/>
             <a:ext cx="14356080" cy="5669280"/>
           </a:xfrm>
@@ -9445,7 +9571,7 @@
           </a:prstGeom>
         </p:spPr>
         <p:txBody>
-          <a:bodyPr anchor="t" rtlCol="false" tIns="0" lIns="0" bIns="0" rIns="0" wrap="square">
+          <a:bodyPr wrap="square" lIns="0" tIns="0" rIns="0" bIns="0" rtlCol="0" anchor="t">
             <a:spAutoFit/>
           </a:bodyPr>
           <a:lstStyle/>
@@ -9595,12 +9721,12 @@
       </p:sp>
       <p:sp>
         <p:nvSpPr>
-          <p:cNvPr name="Freeform 24" id="24"/>
+          <p:cNvPr id="24" name="Freeform 24"/>
           <p:cNvSpPr/>
           <p:nvPr/>
         </p:nvSpPr>
         <p:spPr>
-          <a:xfrm flipH="false" flipV="false" rot="0">
+          <a:xfrm>
             <a:off x="264376" y="407706"/>
             <a:ext cx="3092172" cy="1030724"/>
           </a:xfrm>
@@ -9609,9 +9735,9 @@
             <a:gdLst/>
             <a:ahLst/>
             <a:cxnLst/>
-            <a:rect r="r" b="b" t="t" l="l"/>
+            <a:rect l="l" t="t" r="r" b="b"/>
             <a:pathLst>
-              <a:path h="1030724" w="3092172">
+              <a:path w="3092172" h="1030724">
                 <a:moveTo>
                   <a:pt x="0" y="0"/>
                 </a:moveTo>
@@ -9634,7 +9760,7 @@
           <a:blipFill>
             <a:blip r:embed="rId6"/>
             <a:stretch>
-              <a:fillRect l="0" t="0" r="0" b="0"/>
+              <a:fillRect/>
             </a:stretch>
           </a:blipFill>
         </p:spPr>
@@ -9648,13 +9774,14 @@
 </file>
 
 <file path=ppt/slides/slide6.xml><?xml version="1.0" encoding="utf-8"?>
-<p:sld xmlns:p="http://schemas.openxmlformats.org/presentationml/2006/main" xmlns:a="http://schemas.openxmlformats.org/drawingml/2006/main" xmlns:r="http://schemas.openxmlformats.org/officeDocument/2006/relationships">
+<p:sld xmlns:a="http://schemas.openxmlformats.org/drawingml/2006/main" xmlns:r="http://schemas.openxmlformats.org/officeDocument/2006/relationships" xmlns:p="http://schemas.openxmlformats.org/presentationml/2006/main">
   <p:cSld>
     <p:bg>
       <p:bgPr>
         <a:solidFill>
           <a:srgbClr val="E0E0E0"/>
         </a:solidFill>
+        <a:effectLst/>
       </p:bgPr>
     </p:bg>
     <p:spTree>
@@ -9673,12 +9800,12 @@
       </p:grpSpPr>
       <p:grpSp>
         <p:nvGrpSpPr>
-          <p:cNvPr name="Group 2" id="2"/>
+          <p:cNvPr id="2" name="Group 2"/>
           <p:cNvGrpSpPr/>
           <p:nvPr/>
         </p:nvGrpSpPr>
         <p:grpSpPr>
-          <a:xfrm rot="0">
+          <a:xfrm>
             <a:off x="-1597105" y="2516808"/>
             <a:ext cx="2625805" cy="830953"/>
             <a:chOff x="0" y="0"/>
@@ -9687,12 +9814,12 @@
         </p:grpSpPr>
         <p:sp>
           <p:nvSpPr>
-            <p:cNvPr name="Freeform 3" id="3"/>
+            <p:cNvPr id="3" name="Freeform 3"/>
             <p:cNvSpPr/>
             <p:nvPr/>
           </p:nvSpPr>
           <p:spPr>
-            <a:xfrm flipH="false" flipV="false" rot="0">
+            <a:xfrm>
               <a:off x="0" y="0"/>
               <a:ext cx="5816600" cy="1840738"/>
             </a:xfrm>
@@ -9701,9 +9828,9 @@
               <a:gdLst/>
               <a:ahLst/>
               <a:cxnLst/>
-              <a:rect r="r" b="b" t="t" l="l"/>
+              <a:rect l="l" t="t" r="r" b="b"/>
               <a:pathLst>
-                <a:path h="1840738" w="5816600">
+                <a:path w="5816600" h="1840738">
                   <a:moveTo>
                     <a:pt x="0" y="0"/>
                   </a:moveTo>
@@ -9726,7 +9853,7 @@
             <a:blipFill>
               <a:blip r:embed="rId2"/>
               <a:stretch>
-                <a:fillRect l="0" t="0" r="0" b="2"/>
+                <a:fillRect b="2"/>
               </a:stretch>
             </a:blipFill>
           </p:spPr>
@@ -9734,12 +9861,12 @@
       </p:grpSp>
       <p:grpSp>
         <p:nvGrpSpPr>
-          <p:cNvPr name="Group 4" id="4"/>
+          <p:cNvPr id="4" name="Group 4"/>
           <p:cNvGrpSpPr/>
           <p:nvPr/>
         </p:nvGrpSpPr>
         <p:grpSpPr>
-          <a:xfrm rot="0">
+          <a:xfrm>
             <a:off x="2928206" y="9780631"/>
             <a:ext cx="2625805" cy="830953"/>
             <a:chOff x="0" y="0"/>
@@ -9748,12 +9875,12 @@
         </p:grpSpPr>
         <p:sp>
           <p:nvSpPr>
-            <p:cNvPr name="Freeform 5" id="5"/>
+            <p:cNvPr id="5" name="Freeform 5"/>
             <p:cNvSpPr/>
             <p:nvPr/>
           </p:nvSpPr>
           <p:spPr>
-            <a:xfrm flipH="false" flipV="false" rot="0">
+            <a:xfrm>
               <a:off x="0" y="0"/>
               <a:ext cx="5816600" cy="1840738"/>
             </a:xfrm>
@@ -9762,9 +9889,9 @@
               <a:gdLst/>
               <a:ahLst/>
               <a:cxnLst/>
-              <a:rect r="r" b="b" t="t" l="l"/>
+              <a:rect l="l" t="t" r="r" b="b"/>
               <a:pathLst>
-                <a:path h="1840738" w="5816600">
+                <a:path w="5816600" h="1840738">
                   <a:moveTo>
                     <a:pt x="0" y="0"/>
                   </a:moveTo>
@@ -9787,7 +9914,7 @@
             <a:blipFill>
               <a:blip r:embed="rId2"/>
               <a:stretch>
-                <a:fillRect l="0" t="0" r="0" b="2"/>
+                <a:fillRect b="2"/>
               </a:stretch>
             </a:blipFill>
           </p:spPr>
@@ -9795,12 +9922,12 @@
       </p:grpSp>
       <p:grpSp>
         <p:nvGrpSpPr>
-          <p:cNvPr name="Group 6" id="6"/>
+          <p:cNvPr id="6" name="Group 6"/>
           <p:cNvGrpSpPr/>
           <p:nvPr/>
         </p:nvGrpSpPr>
         <p:grpSpPr>
-          <a:xfrm rot="0">
+          <a:xfrm>
             <a:off x="13367623" y="9656173"/>
             <a:ext cx="2625805" cy="830953"/>
             <a:chOff x="0" y="0"/>
@@ -9809,12 +9936,12 @@
         </p:grpSpPr>
         <p:sp>
           <p:nvSpPr>
-            <p:cNvPr name="Freeform 7" id="7"/>
+            <p:cNvPr id="7" name="Freeform 7"/>
             <p:cNvSpPr/>
             <p:nvPr/>
           </p:nvSpPr>
           <p:spPr>
-            <a:xfrm flipH="false" flipV="false" rot="0">
+            <a:xfrm>
               <a:off x="0" y="0"/>
               <a:ext cx="5816600" cy="1840738"/>
             </a:xfrm>
@@ -9823,9 +9950,9 @@
               <a:gdLst/>
               <a:ahLst/>
               <a:cxnLst/>
-              <a:rect r="r" b="b" t="t" l="l"/>
+              <a:rect l="l" t="t" r="r" b="b"/>
               <a:pathLst>
-                <a:path h="1840738" w="5816600">
+                <a:path w="5816600" h="1840738">
                   <a:moveTo>
                     <a:pt x="0" y="0"/>
                   </a:moveTo>
@@ -9848,7 +9975,7 @@
             <a:blipFill>
               <a:blip r:embed="rId2"/>
               <a:stretch>
-                <a:fillRect l="0" t="0" r="0" b="2"/>
+                <a:fillRect b="2"/>
               </a:stretch>
             </a:blipFill>
           </p:spPr>
@@ -9856,12 +9983,12 @@
       </p:grpSp>
       <p:grpSp>
         <p:nvGrpSpPr>
-          <p:cNvPr name="Group 8" id="8"/>
+          <p:cNvPr id="8" name="Group 8"/>
           <p:cNvGrpSpPr/>
           <p:nvPr/>
         </p:nvGrpSpPr>
         <p:grpSpPr>
-          <a:xfrm rot="0">
+          <a:xfrm>
             <a:off x="7990242" y="9984655"/>
             <a:ext cx="173987" cy="173987"/>
             <a:chOff x="0" y="0"/>
@@ -9870,12 +9997,12 @@
         </p:grpSpPr>
         <p:sp>
           <p:nvSpPr>
-            <p:cNvPr name="Freeform 9" id="9"/>
+            <p:cNvPr id="9" name="Freeform 9"/>
             <p:cNvSpPr/>
             <p:nvPr/>
           </p:nvSpPr>
           <p:spPr>
-            <a:xfrm flipH="false" flipV="false" rot="0">
+            <a:xfrm>
               <a:off x="0" y="0"/>
               <a:ext cx="812800" cy="812800"/>
             </a:xfrm>
@@ -9884,9 +10011,9 @@
               <a:gdLst/>
               <a:ahLst/>
               <a:cxnLst/>
-              <a:rect r="r" b="b" t="t" l="l"/>
+              <a:rect l="l" t="t" r="r" b="b"/>
               <a:pathLst>
-                <a:path h="812800" w="812800">
+                <a:path w="812800" h="812800">
                   <a:moveTo>
                     <a:pt x="406400" y="0"/>
                   </a:moveTo>
@@ -9921,8 +10048,8 @@
         </p:sp>
         <p:sp>
           <p:nvSpPr>
-            <p:cNvPr name="TextBox 10" id="10"/>
-            <p:cNvSpPr txBox="true"/>
+            <p:cNvPr id="10" name="TextBox 10"/>
+            <p:cNvSpPr txBox="1"/>
             <p:nvPr/>
           </p:nvSpPr>
           <p:spPr>
@@ -9935,7 +10062,7 @@
             </a:prstGeom>
           </p:spPr>
           <p:txBody>
-            <a:bodyPr anchor="ctr" rtlCol="false" tIns="50800" lIns="50800" bIns="50800" rIns="50800"/>
+            <a:bodyPr lIns="50800" tIns="50800" rIns="50800" bIns="50800" rtlCol="0" anchor="ctr"/>
             <a:lstStyle/>
             <a:p>
               <a:pPr algn="ctr">
@@ -9943,18 +10070,19 @@
                   <a:spcPts val="2239"/>
                 </a:lnSpc>
               </a:pPr>
+              <a:endParaRPr/>
             </a:p>
           </p:txBody>
         </p:sp>
       </p:grpSp>
       <p:grpSp>
         <p:nvGrpSpPr>
-          <p:cNvPr name="Group 11" id="11"/>
+          <p:cNvPr id="11" name="Group 11"/>
           <p:cNvGrpSpPr/>
           <p:nvPr/>
         </p:nvGrpSpPr>
         <p:grpSpPr>
-          <a:xfrm rot="0">
+          <a:xfrm>
             <a:off x="10353346" y="9948585"/>
             <a:ext cx="173987" cy="173987"/>
             <a:chOff x="0" y="0"/>
@@ -9963,12 +10091,12 @@
         </p:grpSpPr>
         <p:sp>
           <p:nvSpPr>
-            <p:cNvPr name="Freeform 12" id="12"/>
+            <p:cNvPr id="12" name="Freeform 12"/>
             <p:cNvSpPr/>
             <p:nvPr/>
           </p:nvSpPr>
           <p:spPr>
-            <a:xfrm flipH="false" flipV="false" rot="0">
+            <a:xfrm>
               <a:off x="0" y="0"/>
               <a:ext cx="812800" cy="812800"/>
             </a:xfrm>
@@ -9977,9 +10105,9 @@
               <a:gdLst/>
               <a:ahLst/>
               <a:cxnLst/>
-              <a:rect r="r" b="b" t="t" l="l"/>
+              <a:rect l="l" t="t" r="r" b="b"/>
               <a:pathLst>
-                <a:path h="812800" w="812800">
+                <a:path w="812800" h="812800">
                   <a:moveTo>
                     <a:pt x="406400" y="0"/>
                   </a:moveTo>
@@ -10014,8 +10142,8 @@
         </p:sp>
         <p:sp>
           <p:nvSpPr>
-            <p:cNvPr name="TextBox 13" id="13"/>
-            <p:cNvSpPr txBox="true"/>
+            <p:cNvPr id="13" name="TextBox 13"/>
+            <p:cNvSpPr txBox="1"/>
             <p:nvPr/>
           </p:nvSpPr>
           <p:spPr>
@@ -10028,7 +10156,7 @@
             </a:prstGeom>
           </p:spPr>
           <p:txBody>
-            <a:bodyPr anchor="ctr" rtlCol="false" tIns="50800" lIns="50800" bIns="50800" rIns="50800"/>
+            <a:bodyPr lIns="50800" tIns="50800" rIns="50800" bIns="50800" rtlCol="0" anchor="ctr"/>
             <a:lstStyle/>
             <a:p>
               <a:pPr algn="ctr">
@@ -10036,18 +10164,19 @@
                   <a:spcPts val="2239"/>
                 </a:lnSpc>
               </a:pPr>
+              <a:endParaRPr/>
             </a:p>
           </p:txBody>
         </p:sp>
       </p:grpSp>
       <p:grpSp>
         <p:nvGrpSpPr>
-          <p:cNvPr name="Group 14" id="14"/>
+          <p:cNvPr id="14" name="Group 14"/>
           <p:cNvGrpSpPr/>
           <p:nvPr/>
         </p:nvGrpSpPr>
         <p:grpSpPr>
-          <a:xfrm rot="0">
+          <a:xfrm>
             <a:off x="5797750" y="1893761"/>
             <a:ext cx="5382396" cy="641986"/>
             <a:chOff x="0" y="0"/>
@@ -10056,12 +10185,12 @@
         </p:grpSpPr>
         <p:sp>
           <p:nvSpPr>
-            <p:cNvPr name="Freeform 15" id="15"/>
+            <p:cNvPr id="15" name="Freeform 15"/>
             <p:cNvSpPr/>
             <p:nvPr/>
           </p:nvSpPr>
           <p:spPr>
-            <a:xfrm flipH="false" flipV="false" rot="0">
+            <a:xfrm>
               <a:off x="0" y="0"/>
               <a:ext cx="1417586" cy="169083"/>
             </a:xfrm>
@@ -10070,9 +10199,9 @@
               <a:gdLst/>
               <a:ahLst/>
               <a:cxnLst/>
-              <a:rect r="r" b="b" t="t" l="l"/>
+              <a:rect l="l" t="t" r="r" b="b"/>
               <a:pathLst>
-                <a:path h="169083" w="1417586">
+                <a:path w="1417586" h="169083">
                   <a:moveTo>
                     <a:pt x="84541" y="0"/>
                   </a:moveTo>
@@ -10139,8 +10268,8 @@
         </p:sp>
         <p:sp>
           <p:nvSpPr>
-            <p:cNvPr name="TextBox 16" id="16"/>
-            <p:cNvSpPr txBox="true"/>
+            <p:cNvPr id="16" name="TextBox 16"/>
+            <p:cNvSpPr txBox="1"/>
             <p:nvPr/>
           </p:nvSpPr>
           <p:spPr>
@@ -10153,7 +10282,7 @@
             </a:prstGeom>
           </p:spPr>
           <p:txBody>
-            <a:bodyPr anchor="ctr" rtlCol="false" tIns="50800" lIns="50800" bIns="50800" rIns="50800"/>
+            <a:bodyPr lIns="50800" tIns="50800" rIns="50800" bIns="50800" rtlCol="0" anchor="ctr"/>
             <a:lstStyle/>
             <a:p>
               <a:pPr algn="ctr">
@@ -10161,18 +10290,19 @@
                   <a:spcPts val="2239"/>
                 </a:lnSpc>
               </a:pPr>
+              <a:endParaRPr/>
             </a:p>
           </p:txBody>
         </p:sp>
       </p:grpSp>
       <p:sp>
         <p:nvSpPr>
-          <p:cNvPr name="Freeform 17" id="17"/>
+          <p:cNvPr id="17" name="Freeform 17"/>
           <p:cNvSpPr/>
           <p:nvPr/>
         </p:nvSpPr>
         <p:spPr>
-          <a:xfrm flipH="false" flipV="false" rot="0">
+          <a:xfrm>
             <a:off x="13002366" y="-47625"/>
             <a:ext cx="5063940" cy="1941386"/>
           </a:xfrm>
@@ -10181,9 +10311,9 @@
             <a:gdLst/>
             <a:ahLst/>
             <a:cxnLst/>
-            <a:rect r="r" b="b" t="t" l="l"/>
+            <a:rect l="l" t="t" r="r" b="b"/>
             <a:pathLst>
-              <a:path h="1941386" w="5063940">
+              <a:path w="5063940" h="1941386">
                 <a:moveTo>
                   <a:pt x="0" y="0"/>
                 </a:moveTo>
@@ -10206,19 +10336,19 @@
           <a:blipFill>
             <a:blip r:embed="rId3"/>
             <a:stretch>
-              <a:fillRect l="0" t="0" r="0" b="0"/>
+              <a:fillRect/>
             </a:stretch>
           </a:blipFill>
         </p:spPr>
       </p:sp>
       <p:sp>
         <p:nvSpPr>
-          <p:cNvPr name="TextBox 18" id="18"/>
-          <p:cNvSpPr txBox="true"/>
+          <p:cNvPr id="18" name="TextBox 18"/>
+          <p:cNvSpPr txBox="1"/>
           <p:nvPr/>
         </p:nvSpPr>
         <p:spPr>
-          <a:xfrm rot="0">
+          <a:xfrm>
             <a:off x="8316142" y="9882546"/>
             <a:ext cx="1743273" cy="264135"/>
           </a:xfrm>
@@ -10227,7 +10357,7 @@
           </a:prstGeom>
         </p:spPr>
         <p:txBody>
-          <a:bodyPr anchor="t" rtlCol="false" tIns="0" lIns="0" bIns="0" rIns="0">
+          <a:bodyPr lIns="0" tIns="0" rIns="0" bIns="0" rtlCol="0" anchor="t">
             <a:spAutoFit/>
           </a:bodyPr>
           <a:lstStyle/>
@@ -10254,12 +10384,12 @@
       </p:sp>
       <p:sp>
         <p:nvSpPr>
-          <p:cNvPr name="Freeform 19" id="19"/>
+          <p:cNvPr id="19" name="Freeform 19"/>
           <p:cNvSpPr/>
           <p:nvPr/>
         </p:nvSpPr>
         <p:spPr>
-          <a:xfrm flipH="false" flipV="false" rot="0">
+          <a:xfrm>
             <a:off x="7514703" y="-217781"/>
             <a:ext cx="2134862" cy="2130592"/>
           </a:xfrm>
@@ -10268,9 +10398,9 @@
             <a:gdLst/>
             <a:ahLst/>
             <a:cxnLst/>
-            <a:rect r="r" b="b" t="t" l="l"/>
+            <a:rect l="l" t="t" r="r" b="b"/>
             <a:pathLst>
-              <a:path h="2130592" w="2134862">
+              <a:path w="2134862" h="2130592">
                 <a:moveTo>
                   <a:pt x="0" y="0"/>
                 </a:moveTo>
@@ -10293,19 +10423,19 @@
           <a:blipFill>
             <a:blip r:embed="rId4"/>
             <a:stretch>
-              <a:fillRect l="0" t="0" r="0" b="0"/>
+              <a:fillRect/>
             </a:stretch>
           </a:blipFill>
         </p:spPr>
       </p:sp>
       <p:grpSp>
         <p:nvGrpSpPr>
-          <p:cNvPr name="Group 20" id="20"/>
+          <p:cNvPr id="20" name="Group 20"/>
           <p:cNvGrpSpPr/>
           <p:nvPr/>
         </p:nvGrpSpPr>
         <p:grpSpPr>
-          <a:xfrm rot="0">
+          <a:xfrm>
             <a:off x="16388711" y="8987334"/>
             <a:ext cx="1677594" cy="1065265"/>
             <a:chOff x="0" y="0"/>
@@ -10314,12 +10444,12 @@
         </p:grpSpPr>
         <p:sp>
           <p:nvSpPr>
-            <p:cNvPr name="Freeform 21" id="21"/>
+            <p:cNvPr id="21" name="Freeform 21"/>
             <p:cNvSpPr/>
             <p:nvPr/>
           </p:nvSpPr>
           <p:spPr>
-            <a:xfrm flipH="false" flipV="false" rot="0">
+            <a:xfrm>
               <a:off x="0" y="0"/>
               <a:ext cx="4028567" cy="2558161"/>
             </a:xfrm>
@@ -10328,9 +10458,9 @@
               <a:gdLst/>
               <a:ahLst/>
               <a:cxnLst/>
-              <a:rect r="r" b="b" t="t" l="l"/>
+              <a:rect l="l" t="t" r="r" b="b"/>
               <a:pathLst>
-                <a:path h="2558161" w="4028567">
+                <a:path w="4028567" h="2558161">
                   <a:moveTo>
                     <a:pt x="0" y="0"/>
                   </a:moveTo>
@@ -10353,7 +10483,7 @@
             <a:blipFill>
               <a:blip r:embed="rId5"/>
               <a:stretch>
-                <a:fillRect l="0" t="0" r="0" b="1"/>
+                <a:fillRect b="1"/>
               </a:stretch>
             </a:blipFill>
           </p:spPr>
@@ -10361,12 +10491,12 @@
       </p:grpSp>
       <p:sp>
         <p:nvSpPr>
-          <p:cNvPr name="TextBox 22" id="22"/>
-          <p:cNvSpPr txBox="true"/>
+          <p:cNvPr id="22" name="TextBox 22"/>
+          <p:cNvSpPr txBox="1"/>
           <p:nvPr/>
         </p:nvSpPr>
         <p:spPr>
-          <a:xfrm rot="0">
+          <a:xfrm>
             <a:off x="6298992" y="1988059"/>
             <a:ext cx="4566285" cy="405766"/>
           </a:xfrm>
@@ -10375,7 +10505,7 @@
           </a:prstGeom>
         </p:spPr>
         <p:txBody>
-          <a:bodyPr anchor="t" rtlCol="false" tIns="0" lIns="0" bIns="0" rIns="0" wrap="none">
+          <a:bodyPr wrap="none" lIns="0" tIns="0" rIns="0" bIns="0" rtlCol="0" anchor="t">
             <a:spAutoFit/>
           </a:bodyPr>
           <a:lstStyle/>
@@ -10405,21 +10535,21 @@
       </p:sp>
       <p:sp>
         <p:nvSpPr>
-          <p:cNvPr name="TextBox 23" id="23"/>
-          <p:cNvSpPr txBox="true"/>
+          <p:cNvPr id="23" name="TextBox 23"/>
+          <p:cNvSpPr txBox="1"/>
           <p:nvPr/>
         </p:nvSpPr>
         <p:spPr>
-          <a:xfrm rot="0">
+          <a:xfrm>
             <a:off x="1188720" y="2743200"/>
-            <a:ext cx="14356080" cy="5669280"/>
+            <a:ext cx="14356080" cy="6183744"/>
           </a:xfrm>
           <a:prstGeom prst="rect">
             <a:avLst/>
           </a:prstGeom>
         </p:spPr>
         <p:txBody>
-          <a:bodyPr anchor="t" rtlCol="false" tIns="0" lIns="0" bIns="0" rIns="0" wrap="square">
+          <a:bodyPr wrap="square" lIns="0" tIns="0" rIns="0" bIns="0" rtlCol="0" anchor="t">
             <a:spAutoFit/>
           </a:bodyPr>
           <a:lstStyle/>
@@ -10436,10 +10566,7 @@
               </a:spcAft>
             </a:pPr>
             <a:r>
-              <a:rPr sz="2400" b="1">
-                <a:solidFill>
-                  <a:srgbClr val="FF3131"/>
-                </a:solidFill>
+              <a:rPr sz="3200" b="1" dirty="0">
                 <a:latin typeface="IBM Plex Sans"/>
               </a:rPr>
               <a:t>Pipeline</a:t>
@@ -10452,7 +10579,7 @@
               </a:spcAft>
             </a:pPr>
             <a:r>
-              <a:rPr sz="1320" b="0">
+              <a:rPr sz="1600" b="0" dirty="0">
                 <a:solidFill>
                   <a:srgbClr val="FF3131"/>
                 </a:solidFill>
@@ -10461,13 +10588,49 @@
               <a:t>■  </a:t>
             </a:r>
             <a:r>
-              <a:rPr sz="2200" b="0">
+              <a:rPr sz="2800" b="0" dirty="0">
                 <a:solidFill>
                   <a:srgbClr val="000000"/>
                 </a:solidFill>
                 <a:latin typeface="IBM Plex Sans"/>
               </a:rPr>
-              <a:t>Calibration snapshot  →  Batch builder (canaries + workload, shuffled)  →  IBM QPU (Qiskit Runtime Sampler, twirling and dynamical decoupling off)  →  Collect, plus the calibration live at execution time  →  Forger (Qiskit Aer + noise model from that calibration)  →  Signature (12 features per time chunk)  →  Detector  →  Verdict + dashboard</a:t>
+              <a:t>Calibration snapshot  →  Batch builder (canaries + workload, shuffled)  →  IBM QPU (</a:t>
+            </a:r>
+            <a:r>
+              <a:rPr sz="2800" b="0" dirty="0" err="1">
+                <a:solidFill>
+                  <a:srgbClr val="000000"/>
+                </a:solidFill>
+                <a:latin typeface="IBM Plex Sans"/>
+              </a:rPr>
+              <a:t>Qiskit</a:t>
+            </a:r>
+            <a:r>
+              <a:rPr sz="2800" b="0" dirty="0">
+                <a:solidFill>
+                  <a:srgbClr val="000000"/>
+                </a:solidFill>
+                <a:latin typeface="IBM Plex Sans"/>
+              </a:rPr>
+              <a:t> Runtime Sampler, twirling and dynamical decoupling off)  →  Collect, plus the calibration live at execution time  →  Forger (</a:t>
+            </a:r>
+            <a:r>
+              <a:rPr sz="2800" b="0" dirty="0" err="1">
+                <a:solidFill>
+                  <a:srgbClr val="000000"/>
+                </a:solidFill>
+                <a:latin typeface="IBM Plex Sans"/>
+              </a:rPr>
+              <a:t>Qiskit</a:t>
+            </a:r>
+            <a:r>
+              <a:rPr sz="2800" b="0" dirty="0">
+                <a:solidFill>
+                  <a:srgbClr val="000000"/>
+                </a:solidFill>
+                <a:latin typeface="IBM Plex Sans"/>
+              </a:rPr>
+              <a:t> Aer + noise model from that calibration)  →  Signature (12 features per time chunk)  →  Detector  →  Verdict + dashboard</a:t>
             </a:r>
           </a:p>
           <a:p>
@@ -10477,7 +10640,7 @@
               </a:spcAft>
             </a:pPr>
             <a:r>
-              <a:rPr sz="1320" b="0">
+              <a:rPr sz="1600" b="0" dirty="0">
                 <a:solidFill>
                   <a:srgbClr val="FF3131"/>
                 </a:solidFill>
@@ -10486,7 +10649,7 @@
               <a:t>■  </a:t>
             </a:r>
             <a:r>
-              <a:rPr sz="2200" b="1">
+              <a:rPr sz="2800" b="1" dirty="0">
                 <a:solidFill>
                   <a:srgbClr val="000000"/>
                 </a:solidFill>
@@ -10495,13 +10658,31 @@
               <a:t>Quantum components: </a:t>
             </a:r>
             <a:r>
-              <a:rPr sz="2200" b="0">
+              <a:rPr sz="2800" b="0" dirty="0">
                 <a:solidFill>
                   <a:srgbClr val="000000"/>
                 </a:solidFill>
                 <a:latin typeface="IBM Plex Sans"/>
               </a:rPr>
-              <a:t>3 canary families (coherent amplification, spectator Ramsey, readout context) on 4 isolated qubit pairs, transpiled at level 0 so they run exactly as written.</a:t>
+              <a:t>3 canary families (coherent amplification, spectator Ramsey, readout context) on 4 isolated qubit pairs, </a:t>
+            </a:r>
+            <a:r>
+              <a:rPr sz="2800" b="0" dirty="0" err="1">
+                <a:solidFill>
+                  <a:srgbClr val="000000"/>
+                </a:solidFill>
+                <a:latin typeface="IBM Plex Sans"/>
+              </a:rPr>
+              <a:t>transpiled</a:t>
+            </a:r>
+            <a:r>
+              <a:rPr sz="2800" b="0" dirty="0">
+                <a:solidFill>
+                  <a:srgbClr val="000000"/>
+                </a:solidFill>
+                <a:latin typeface="IBM Plex Sans"/>
+              </a:rPr>
+              <a:t> at level 0 so they run exactly as written.</a:t>
             </a:r>
           </a:p>
           <a:p>
@@ -10511,7 +10692,7 @@
               </a:spcAft>
             </a:pPr>
             <a:r>
-              <a:rPr sz="1320" b="0">
+              <a:rPr sz="1600" b="0" dirty="0">
                 <a:solidFill>
                   <a:srgbClr val="FF3131"/>
                 </a:solidFill>
@@ -10520,7 +10701,7 @@
               <a:t>■  </a:t>
             </a:r>
             <a:r>
-              <a:rPr sz="2200" b="1">
+              <a:rPr sz="2800" b="1" dirty="0">
                 <a:solidFill>
                   <a:srgbClr val="000000"/>
                 </a:solidFill>
@@ -10529,13 +10710,67 @@
               <a:t>Classical components: </a:t>
             </a:r>
             <a:r>
-              <a:rPr sz="2200" b="0">
+              <a:rPr sz="2800" b="0" dirty="0">
                 <a:solidFill>
                   <a:srgbClr val="000000"/>
                 </a:solidFill>
                 <a:latin typeface="IBM Plex Sans"/>
               </a:rPr>
-              <a:t>Python, Qiskit 2.5, Qiskit Aer, scikit-learn logistic regression, Streamlit + Altair dashboard.</a:t>
+              <a:t>Python, </a:t>
+            </a:r>
+            <a:r>
+              <a:rPr sz="2800" b="0" dirty="0" err="1">
+                <a:solidFill>
+                  <a:srgbClr val="000000"/>
+                </a:solidFill>
+                <a:latin typeface="IBM Plex Sans"/>
+              </a:rPr>
+              <a:t>Qiskit</a:t>
+            </a:r>
+            <a:r>
+              <a:rPr sz="2800" b="0" dirty="0">
+                <a:solidFill>
+                  <a:srgbClr val="000000"/>
+                </a:solidFill>
+                <a:latin typeface="IBM Plex Sans"/>
+              </a:rPr>
+              <a:t> 2.5, </a:t>
+            </a:r>
+            <a:r>
+              <a:rPr sz="2800" b="0" dirty="0" err="1">
+                <a:solidFill>
+                  <a:srgbClr val="000000"/>
+                </a:solidFill>
+                <a:latin typeface="IBM Plex Sans"/>
+              </a:rPr>
+              <a:t>Qiskit</a:t>
+            </a:r>
+            <a:r>
+              <a:rPr sz="2800" b="0" dirty="0">
+                <a:solidFill>
+                  <a:srgbClr val="000000"/>
+                </a:solidFill>
+                <a:latin typeface="IBM Plex Sans"/>
+              </a:rPr>
+              <a:t> Aer, scikit-learn logistic regression, </a:t>
+            </a:r>
+            <a:r>
+              <a:rPr sz="2800" b="0" dirty="0" err="1">
+                <a:solidFill>
+                  <a:srgbClr val="000000"/>
+                </a:solidFill>
+                <a:latin typeface="IBM Plex Sans"/>
+              </a:rPr>
+              <a:t>Streamlit</a:t>
+            </a:r>
+            <a:r>
+              <a:rPr sz="2800" b="0" dirty="0">
+                <a:solidFill>
+                  <a:srgbClr val="000000"/>
+                </a:solidFill>
+                <a:latin typeface="IBM Plex Sans"/>
+              </a:rPr>
+              <a:t> + Altair dashboard.</a:t>
             </a:r>
           </a:p>
           <a:p>
@@ -10545,7 +10780,7 @@
               </a:spcAft>
             </a:pPr>
             <a:r>
-              <a:rPr sz="1320" b="0">
+              <a:rPr sz="1600" b="0" dirty="0">
                 <a:solidFill>
                   <a:srgbClr val="FF3131"/>
                 </a:solidFill>
@@ -10554,7 +10789,7 @@
               <a:t>■  </a:t>
             </a:r>
             <a:r>
-              <a:rPr sz="2200" b="1">
+              <a:rPr sz="2800" b="1" dirty="0">
                 <a:solidFill>
                   <a:srgbClr val="000000"/>
                 </a:solidFill>
@@ -10563,7 +10798,7 @@
               <a:t>Engineering: </a:t>
             </a:r>
             <a:r>
-              <a:rPr sz="2200" b="0">
+              <a:rPr sz="2800" b="0" dirty="0">
                 <a:solidFill>
                   <a:srgbClr val="000000"/>
                 </a:solidFill>
@@ -10576,12 +10811,12 @@
       </p:sp>
       <p:sp>
         <p:nvSpPr>
-          <p:cNvPr name="Freeform 24" id="24"/>
+          <p:cNvPr id="24" name="Freeform 24"/>
           <p:cNvSpPr/>
           <p:nvPr/>
         </p:nvSpPr>
         <p:spPr>
-          <a:xfrm flipH="false" flipV="false" rot="0">
+          <a:xfrm>
             <a:off x="264376" y="407706"/>
             <a:ext cx="3092172" cy="1030724"/>
           </a:xfrm>
@@ -10590,9 +10825,9 @@
             <a:gdLst/>
             <a:ahLst/>
             <a:cxnLst/>
-            <a:rect r="r" b="b" t="t" l="l"/>
+            <a:rect l="l" t="t" r="r" b="b"/>
             <a:pathLst>
-              <a:path h="1030724" w="3092172">
+              <a:path w="3092172" h="1030724">
                 <a:moveTo>
                   <a:pt x="0" y="0"/>
                 </a:moveTo>
@@ -10615,7 +10850,7 @@
           <a:blipFill>
             <a:blip r:embed="rId6"/>
             <a:stretch>
-              <a:fillRect l="0" t="0" r="0" b="0"/>
+              <a:fillRect/>
             </a:stretch>
           </a:blipFill>
         </p:spPr>
@@ -10629,13 +10864,14 @@
 </file>
 
 <file path=ppt/slides/slide7.xml><?xml version="1.0" encoding="utf-8"?>
-<p:sld xmlns:p="http://schemas.openxmlformats.org/presentationml/2006/main" xmlns:a="http://schemas.openxmlformats.org/drawingml/2006/main" xmlns:r="http://schemas.openxmlformats.org/officeDocument/2006/relationships">
+<p:sld xmlns:a="http://schemas.openxmlformats.org/drawingml/2006/main" xmlns:r="http://schemas.openxmlformats.org/officeDocument/2006/relationships" xmlns:p="http://schemas.openxmlformats.org/presentationml/2006/main">
   <p:cSld>
     <p:bg>
       <p:bgPr>
         <a:solidFill>
           <a:srgbClr val="E0E0E0"/>
         </a:solidFill>
+        <a:effectLst/>
       </p:bgPr>
     </p:bg>
     <p:spTree>
@@ -10654,12 +10890,12 @@
       </p:grpSpPr>
       <p:grpSp>
         <p:nvGrpSpPr>
-          <p:cNvPr name="Group 2" id="2"/>
+          <p:cNvPr id="2" name="Group 2"/>
           <p:cNvGrpSpPr/>
           <p:nvPr/>
         </p:nvGrpSpPr>
         <p:grpSpPr>
-          <a:xfrm rot="0">
+          <a:xfrm>
             <a:off x="-1597105" y="2516808"/>
             <a:ext cx="2625805" cy="830953"/>
             <a:chOff x="0" y="0"/>
@@ -10668,12 +10904,12 @@
         </p:grpSpPr>
         <p:sp>
           <p:nvSpPr>
-            <p:cNvPr name="Freeform 3" id="3"/>
+            <p:cNvPr id="3" name="Freeform 3"/>
             <p:cNvSpPr/>
             <p:nvPr/>
           </p:nvSpPr>
           <p:spPr>
-            <a:xfrm flipH="false" flipV="false" rot="0">
+            <a:xfrm>
               <a:off x="0" y="0"/>
               <a:ext cx="5816600" cy="1840738"/>
             </a:xfrm>
@@ -10682,9 +10918,9 @@
               <a:gdLst/>
               <a:ahLst/>
               <a:cxnLst/>
-              <a:rect r="r" b="b" t="t" l="l"/>
+              <a:rect l="l" t="t" r="r" b="b"/>
               <a:pathLst>
-                <a:path h="1840738" w="5816600">
+                <a:path w="5816600" h="1840738">
                   <a:moveTo>
                     <a:pt x="0" y="0"/>
                   </a:moveTo>
@@ -10707,7 +10943,7 @@
             <a:blipFill>
               <a:blip r:embed="rId2"/>
               <a:stretch>
-                <a:fillRect l="0" t="0" r="0" b="2"/>
+                <a:fillRect b="2"/>
               </a:stretch>
             </a:blipFill>
           </p:spPr>
@@ -10715,12 +10951,12 @@
       </p:grpSp>
       <p:grpSp>
         <p:nvGrpSpPr>
-          <p:cNvPr name="Group 4" id="4"/>
+          <p:cNvPr id="4" name="Group 4"/>
           <p:cNvGrpSpPr/>
           <p:nvPr/>
         </p:nvGrpSpPr>
         <p:grpSpPr>
-          <a:xfrm rot="0">
+          <a:xfrm>
             <a:off x="2928206" y="9780631"/>
             <a:ext cx="2625805" cy="830953"/>
             <a:chOff x="0" y="0"/>
@@ -10729,12 +10965,12 @@
         </p:grpSpPr>
         <p:sp>
           <p:nvSpPr>
-            <p:cNvPr name="Freeform 5" id="5"/>
+            <p:cNvPr id="5" name="Freeform 5"/>
             <p:cNvSpPr/>
             <p:nvPr/>
           </p:nvSpPr>
           <p:spPr>
-            <a:xfrm flipH="false" flipV="false" rot="0">
+            <a:xfrm>
               <a:off x="0" y="0"/>
               <a:ext cx="5816600" cy="1840738"/>
             </a:xfrm>
@@ -10743,9 +10979,9 @@
               <a:gdLst/>
               <a:ahLst/>
               <a:cxnLst/>
-              <a:rect r="r" b="b" t="t" l="l"/>
+              <a:rect l="l" t="t" r="r" b="b"/>
               <a:pathLst>
-                <a:path h="1840738" w="5816600">
+                <a:path w="5816600" h="1840738">
                   <a:moveTo>
                     <a:pt x="0" y="0"/>
                   </a:moveTo>
@@ -10768,7 +11004,7 @@
             <a:blipFill>
               <a:blip r:embed="rId2"/>
               <a:stretch>
-                <a:fillRect l="0" t="0" r="0" b="2"/>
+                <a:fillRect b="2"/>
               </a:stretch>
             </a:blipFill>
           </p:spPr>
@@ -10776,12 +11012,12 @@
       </p:grpSp>
       <p:grpSp>
         <p:nvGrpSpPr>
-          <p:cNvPr name="Group 6" id="6"/>
+          <p:cNvPr id="6" name="Group 6"/>
           <p:cNvGrpSpPr/>
           <p:nvPr/>
         </p:nvGrpSpPr>
         <p:grpSpPr>
-          <a:xfrm rot="0">
+          <a:xfrm>
             <a:off x="13367623" y="9656173"/>
             <a:ext cx="2625805" cy="830953"/>
             <a:chOff x="0" y="0"/>
@@ -10790,12 +11026,12 @@
         </p:grpSpPr>
         <p:sp>
           <p:nvSpPr>
-            <p:cNvPr name="Freeform 7" id="7"/>
+            <p:cNvPr id="7" name="Freeform 7"/>
             <p:cNvSpPr/>
             <p:nvPr/>
           </p:nvSpPr>
           <p:spPr>
-            <a:xfrm flipH="false" flipV="false" rot="0">
+            <a:xfrm>
               <a:off x="0" y="0"/>
               <a:ext cx="5816600" cy="1840738"/>
             </a:xfrm>
@@ -10804,9 +11040,9 @@
               <a:gdLst/>
               <a:ahLst/>
               <a:cxnLst/>
-              <a:rect r="r" b="b" t="t" l="l"/>
+              <a:rect l="l" t="t" r="r" b="b"/>
               <a:pathLst>
-                <a:path h="1840738" w="5816600">
+                <a:path w="5816600" h="1840738">
                   <a:moveTo>
                     <a:pt x="0" y="0"/>
                   </a:moveTo>
@@ -10829,7 +11065,7 @@
             <a:blipFill>
               <a:blip r:embed="rId2"/>
               <a:stretch>
-                <a:fillRect l="0" t="0" r="0" b="2"/>
+                <a:fillRect b="2"/>
               </a:stretch>
             </a:blipFill>
           </p:spPr>
@@ -10837,12 +11073,12 @@
       </p:grpSp>
       <p:grpSp>
         <p:nvGrpSpPr>
-          <p:cNvPr name="Group 8" id="8"/>
+          <p:cNvPr id="8" name="Group 8"/>
           <p:cNvGrpSpPr/>
           <p:nvPr/>
         </p:nvGrpSpPr>
         <p:grpSpPr>
-          <a:xfrm rot="0">
+          <a:xfrm>
             <a:off x="7990242" y="9984655"/>
             <a:ext cx="173987" cy="173987"/>
             <a:chOff x="0" y="0"/>
@@ -10851,12 +11087,12 @@
         </p:grpSpPr>
         <p:sp>
           <p:nvSpPr>
-            <p:cNvPr name="Freeform 9" id="9"/>
+            <p:cNvPr id="9" name="Freeform 9"/>
             <p:cNvSpPr/>
             <p:nvPr/>
           </p:nvSpPr>
           <p:spPr>
-            <a:xfrm flipH="false" flipV="false" rot="0">
+            <a:xfrm>
               <a:off x="0" y="0"/>
               <a:ext cx="812800" cy="812800"/>
             </a:xfrm>
@@ -10865,9 +11101,9 @@
               <a:gdLst/>
               <a:ahLst/>
               <a:cxnLst/>
-              <a:rect r="r" b="b" t="t" l="l"/>
+              <a:rect l="l" t="t" r="r" b="b"/>
               <a:pathLst>
-                <a:path h="812800" w="812800">
+                <a:path w="812800" h="812800">
                   <a:moveTo>
                     <a:pt x="406400" y="0"/>
                   </a:moveTo>
@@ -10902,8 +11138,8 @@
         </p:sp>
         <p:sp>
           <p:nvSpPr>
-            <p:cNvPr name="TextBox 10" id="10"/>
-            <p:cNvSpPr txBox="true"/>
+            <p:cNvPr id="10" name="TextBox 10"/>
+            <p:cNvSpPr txBox="1"/>
             <p:nvPr/>
           </p:nvSpPr>
           <p:spPr>
@@ -10916,7 +11152,7 @@
             </a:prstGeom>
           </p:spPr>
           <p:txBody>
-            <a:bodyPr anchor="ctr" rtlCol="false" tIns="50800" lIns="50800" bIns="50800" rIns="50800"/>
+            <a:bodyPr lIns="50800" tIns="50800" rIns="50800" bIns="50800" rtlCol="0" anchor="ctr"/>
             <a:lstStyle/>
             <a:p>
               <a:pPr algn="ctr">
@@ -10924,18 +11160,19 @@
                   <a:spcPts val="2239"/>
                 </a:lnSpc>
               </a:pPr>
+              <a:endParaRPr/>
             </a:p>
           </p:txBody>
         </p:sp>
       </p:grpSp>
       <p:grpSp>
         <p:nvGrpSpPr>
-          <p:cNvPr name="Group 11" id="11"/>
+          <p:cNvPr id="11" name="Group 11"/>
           <p:cNvGrpSpPr/>
           <p:nvPr/>
         </p:nvGrpSpPr>
         <p:grpSpPr>
-          <a:xfrm rot="0">
+          <a:xfrm>
             <a:off x="10353346" y="9948585"/>
             <a:ext cx="173987" cy="173987"/>
             <a:chOff x="0" y="0"/>
@@ -10944,12 +11181,12 @@
         </p:grpSpPr>
         <p:sp>
           <p:nvSpPr>
-            <p:cNvPr name="Freeform 12" id="12"/>
+            <p:cNvPr id="12" name="Freeform 12"/>
             <p:cNvSpPr/>
             <p:nvPr/>
           </p:nvSpPr>
           <p:spPr>
-            <a:xfrm flipH="false" flipV="false" rot="0">
+            <a:xfrm>
               <a:off x="0" y="0"/>
               <a:ext cx="812800" cy="812800"/>
             </a:xfrm>
@@ -10958,9 +11195,9 @@
               <a:gdLst/>
               <a:ahLst/>
               <a:cxnLst/>
-              <a:rect r="r" b="b" t="t" l="l"/>
+              <a:rect l="l" t="t" r="r" b="b"/>
               <a:pathLst>
-                <a:path h="812800" w="812800">
+                <a:path w="812800" h="812800">
                   <a:moveTo>
                     <a:pt x="406400" y="0"/>
                   </a:moveTo>
@@ -10995,8 +11232,8 @@
         </p:sp>
         <p:sp>
           <p:nvSpPr>
-            <p:cNvPr name="TextBox 13" id="13"/>
-            <p:cNvSpPr txBox="true"/>
+            <p:cNvPr id="13" name="TextBox 13"/>
+            <p:cNvSpPr txBox="1"/>
             <p:nvPr/>
           </p:nvSpPr>
           <p:spPr>
@@ -11009,7 +11246,7 @@
             </a:prstGeom>
           </p:spPr>
           <p:txBody>
-            <a:bodyPr anchor="ctr" rtlCol="false" tIns="50800" lIns="50800" bIns="50800" rIns="50800"/>
+            <a:bodyPr lIns="50800" tIns="50800" rIns="50800" bIns="50800" rtlCol="0" anchor="ctr"/>
             <a:lstStyle/>
             <a:p>
               <a:pPr algn="ctr">
@@ -11017,18 +11254,19 @@
                   <a:spcPts val="2239"/>
                 </a:lnSpc>
               </a:pPr>
+              <a:endParaRPr/>
             </a:p>
           </p:txBody>
         </p:sp>
       </p:grpSp>
       <p:grpSp>
         <p:nvGrpSpPr>
-          <p:cNvPr name="Group 14" id="14"/>
+          <p:cNvPr id="14" name="Group 14"/>
           <p:cNvGrpSpPr/>
           <p:nvPr/>
         </p:nvGrpSpPr>
         <p:grpSpPr>
-          <a:xfrm rot="0">
+          <a:xfrm>
             <a:off x="6868821" y="1903286"/>
             <a:ext cx="3925250" cy="641986"/>
             <a:chOff x="0" y="0"/>
@@ -11037,12 +11275,12 @@
         </p:grpSpPr>
         <p:sp>
           <p:nvSpPr>
-            <p:cNvPr name="Freeform 15" id="15"/>
+            <p:cNvPr id="15" name="Freeform 15"/>
             <p:cNvSpPr/>
             <p:nvPr/>
           </p:nvSpPr>
           <p:spPr>
-            <a:xfrm flipH="false" flipV="false" rot="0">
+            <a:xfrm>
               <a:off x="0" y="0"/>
               <a:ext cx="1033811" cy="169083"/>
             </a:xfrm>
@@ -11051,9 +11289,9 @@
               <a:gdLst/>
               <a:ahLst/>
               <a:cxnLst/>
-              <a:rect r="r" b="b" t="t" l="l"/>
+              <a:rect l="l" t="t" r="r" b="b"/>
               <a:pathLst>
-                <a:path h="169083" w="1033811">
+                <a:path w="1033811" h="169083">
                   <a:moveTo>
                     <a:pt x="84541" y="0"/>
                   </a:moveTo>
@@ -11120,8 +11358,8 @@
         </p:sp>
         <p:sp>
           <p:nvSpPr>
-            <p:cNvPr name="TextBox 16" id="16"/>
-            <p:cNvSpPr txBox="true"/>
+            <p:cNvPr id="16" name="TextBox 16"/>
+            <p:cNvSpPr txBox="1"/>
             <p:nvPr/>
           </p:nvSpPr>
           <p:spPr>
@@ -11134,7 +11372,7 @@
             </a:prstGeom>
           </p:spPr>
           <p:txBody>
-            <a:bodyPr anchor="ctr" rtlCol="false" tIns="50800" lIns="50800" bIns="50800" rIns="50800"/>
+            <a:bodyPr lIns="50800" tIns="50800" rIns="50800" bIns="50800" rtlCol="0" anchor="ctr"/>
             <a:lstStyle/>
             <a:p>
               <a:pPr algn="ctr">
@@ -11142,18 +11380,19 @@
                   <a:spcPts val="2239"/>
                 </a:lnSpc>
               </a:pPr>
+              <a:endParaRPr/>
             </a:p>
           </p:txBody>
         </p:sp>
       </p:grpSp>
       <p:sp>
         <p:nvSpPr>
-          <p:cNvPr name="Freeform 17" id="17"/>
+          <p:cNvPr id="17" name="Freeform 17"/>
           <p:cNvSpPr/>
           <p:nvPr/>
         </p:nvSpPr>
         <p:spPr>
-          <a:xfrm flipH="false" flipV="false" rot="0">
+          <a:xfrm>
             <a:off x="13002366" y="-47625"/>
             <a:ext cx="5063940" cy="1941386"/>
           </a:xfrm>
@@ -11162,9 +11401,9 @@
             <a:gdLst/>
             <a:ahLst/>
             <a:cxnLst/>
-            <a:rect r="r" b="b" t="t" l="l"/>
+            <a:rect l="l" t="t" r="r" b="b"/>
             <a:pathLst>
-              <a:path h="1941386" w="5063940">
+              <a:path w="5063940" h="1941386">
                 <a:moveTo>
                   <a:pt x="0" y="0"/>
                 </a:moveTo>
@@ -11187,19 +11426,19 @@
           <a:blipFill>
             <a:blip r:embed="rId3"/>
             <a:stretch>
-              <a:fillRect l="0" t="0" r="0" b="0"/>
+              <a:fillRect/>
             </a:stretch>
           </a:blipFill>
         </p:spPr>
       </p:sp>
       <p:sp>
         <p:nvSpPr>
-          <p:cNvPr name="TextBox 18" id="18"/>
-          <p:cNvSpPr txBox="true"/>
+          <p:cNvPr id="18" name="TextBox 18"/>
+          <p:cNvSpPr txBox="1"/>
           <p:nvPr/>
         </p:nvSpPr>
         <p:spPr>
-          <a:xfrm rot="0">
+          <a:xfrm>
             <a:off x="8316142" y="9882546"/>
             <a:ext cx="1743273" cy="264135"/>
           </a:xfrm>
@@ -11208,7 +11447,7 @@
           </a:prstGeom>
         </p:spPr>
         <p:txBody>
-          <a:bodyPr anchor="t" rtlCol="false" tIns="0" lIns="0" bIns="0" rIns="0">
+          <a:bodyPr lIns="0" tIns="0" rIns="0" bIns="0" rtlCol="0" anchor="t">
             <a:spAutoFit/>
           </a:bodyPr>
           <a:lstStyle/>
@@ -11235,12 +11474,12 @@
       </p:sp>
       <p:sp>
         <p:nvSpPr>
-          <p:cNvPr name="Freeform 19" id="19"/>
+          <p:cNvPr id="19" name="Freeform 19"/>
           <p:cNvSpPr/>
           <p:nvPr/>
         </p:nvSpPr>
         <p:spPr>
-          <a:xfrm flipH="false" flipV="false" rot="0">
+          <a:xfrm>
             <a:off x="7514703" y="-217781"/>
             <a:ext cx="2134862" cy="2130592"/>
           </a:xfrm>
@@ -11249,9 +11488,9 @@
             <a:gdLst/>
             <a:ahLst/>
             <a:cxnLst/>
-            <a:rect r="r" b="b" t="t" l="l"/>
+            <a:rect l="l" t="t" r="r" b="b"/>
             <a:pathLst>
-              <a:path h="2130592" w="2134862">
+              <a:path w="2134862" h="2130592">
                 <a:moveTo>
                   <a:pt x="0" y="0"/>
                 </a:moveTo>
@@ -11274,19 +11513,19 @@
           <a:blipFill>
             <a:blip r:embed="rId4"/>
             <a:stretch>
-              <a:fillRect l="0" t="0" r="0" b="0"/>
+              <a:fillRect/>
             </a:stretch>
           </a:blipFill>
         </p:spPr>
       </p:sp>
       <p:grpSp>
         <p:nvGrpSpPr>
-          <p:cNvPr name="Group 20" id="20"/>
+          <p:cNvPr id="20" name="Group 20"/>
           <p:cNvGrpSpPr/>
           <p:nvPr/>
         </p:nvGrpSpPr>
         <p:grpSpPr>
-          <a:xfrm rot="0">
+          <a:xfrm>
             <a:off x="16388711" y="8987334"/>
             <a:ext cx="1677594" cy="1065265"/>
             <a:chOff x="0" y="0"/>
@@ -11295,12 +11534,12 @@
         </p:grpSpPr>
         <p:sp>
           <p:nvSpPr>
-            <p:cNvPr name="Freeform 21" id="21"/>
+            <p:cNvPr id="21" name="Freeform 21"/>
             <p:cNvSpPr/>
             <p:nvPr/>
           </p:nvSpPr>
           <p:spPr>
-            <a:xfrm flipH="false" flipV="false" rot="0">
+            <a:xfrm>
               <a:off x="0" y="0"/>
               <a:ext cx="4028567" cy="2558161"/>
             </a:xfrm>
@@ -11309,9 +11548,9 @@
               <a:gdLst/>
               <a:ahLst/>
               <a:cxnLst/>
-              <a:rect r="r" b="b" t="t" l="l"/>
+              <a:rect l="l" t="t" r="r" b="b"/>
               <a:pathLst>
-                <a:path h="2558161" w="4028567">
+                <a:path w="4028567" h="2558161">
                   <a:moveTo>
                     <a:pt x="0" y="0"/>
                   </a:moveTo>
@@ -11334,7 +11573,7 @@
             <a:blipFill>
               <a:blip r:embed="rId5"/>
               <a:stretch>
-                <a:fillRect l="0" t="0" r="0" b="1"/>
+                <a:fillRect b="1"/>
               </a:stretch>
             </a:blipFill>
           </p:spPr>
@@ -11342,12 +11581,12 @@
       </p:grpSp>
       <p:sp>
         <p:nvSpPr>
-          <p:cNvPr name="TextBox 22" id="22"/>
-          <p:cNvSpPr txBox="true"/>
+          <p:cNvPr id="22" name="TextBox 22"/>
+          <p:cNvSpPr txBox="1"/>
           <p:nvPr/>
         </p:nvSpPr>
         <p:spPr>
-          <a:xfrm rot="0">
+          <a:xfrm>
             <a:off x="7362389" y="1945514"/>
             <a:ext cx="2915245" cy="481331"/>
           </a:xfrm>
@@ -11356,7 +11595,7 @@
           </a:prstGeom>
         </p:spPr>
         <p:txBody>
-          <a:bodyPr anchor="t" rtlCol="false" tIns="0" lIns="0" bIns="0" rIns="0" wrap="none">
+          <a:bodyPr wrap="none" lIns="0" tIns="0" rIns="0" bIns="0" rtlCol="0" anchor="t">
             <a:spAutoFit/>
           </a:bodyPr>
           <a:lstStyle/>
@@ -11386,21 +11625,21 @@
       </p:sp>
       <p:sp>
         <p:nvSpPr>
-          <p:cNvPr name="TextBox 23" id="23"/>
-          <p:cNvSpPr txBox="true"/>
+          <p:cNvPr id="23" name="TextBox 23"/>
+          <p:cNvSpPr txBox="1"/>
           <p:nvPr/>
         </p:nvSpPr>
         <p:spPr>
-          <a:xfrm rot="0">
+          <a:xfrm>
             <a:off x="1188720" y="2834640"/>
-            <a:ext cx="14356080" cy="5669280"/>
+            <a:ext cx="14356080" cy="5134739"/>
           </a:xfrm>
           <a:prstGeom prst="rect">
             <a:avLst/>
           </a:prstGeom>
         </p:spPr>
         <p:txBody>
-          <a:bodyPr anchor="t" rtlCol="false" tIns="0" lIns="0" bIns="0" rIns="0" wrap="square">
+          <a:bodyPr wrap="square" lIns="0" tIns="0" rIns="0" bIns="0" rtlCol="0" anchor="t">
             <a:spAutoFit/>
           </a:bodyPr>
           <a:lstStyle/>
@@ -11417,7 +11656,7 @@
               </a:spcAft>
             </a:pPr>
             <a:r>
-              <a:rPr sz="1560" b="0">
+              <a:rPr sz="1600" b="0" dirty="0">
                 <a:solidFill>
                   <a:srgbClr val="FF3131"/>
                 </a:solidFill>
@@ -11426,7 +11665,7 @@
               <a:t>■  </a:t>
             </a:r>
             <a:r>
-              <a:rPr sz="2600" b="1">
+              <a:rPr sz="2800" b="1" dirty="0">
                 <a:solidFill>
                   <a:srgbClr val="000000"/>
                 </a:solidFill>
@@ -11435,13 +11674,31 @@
               <a:t>Working end-to-end tool </a:t>
             </a:r>
             <a:r>
-              <a:rPr sz="2600" b="0">
+              <a:rPr sz="2800" b="0" dirty="0">
                 <a:solidFill>
                   <a:srgbClr val="000000"/>
                 </a:solidFill>
                 <a:latin typeface="IBM Plex Sans"/>
               </a:rPr>
-              <a:t>(GitHub repo): python -m ghostqpu submit / collect / evaluate / null-test.</a:t>
+              <a:t>(GitHub repo): python -m </a:t>
+            </a:r>
+            <a:r>
+              <a:rPr sz="2800" b="0" dirty="0" err="1">
+                <a:solidFill>
+                  <a:srgbClr val="000000"/>
+                </a:solidFill>
+                <a:latin typeface="IBM Plex Sans"/>
+              </a:rPr>
+              <a:t>ghostqpu</a:t>
+            </a:r>
+            <a:r>
+              <a:rPr sz="2800" b="0" dirty="0">
+                <a:solidFill>
+                  <a:srgbClr val="000000"/>
+                </a:solidFill>
+                <a:latin typeface="IBM Plex Sans"/>
+              </a:rPr>
+              <a:t> submit / collect / evaluate / null-test.</a:t>
             </a:r>
           </a:p>
           <a:p>
@@ -11451,7 +11708,7 @@
               </a:spcAft>
             </a:pPr>
             <a:r>
-              <a:rPr sz="1560" b="0">
+              <a:rPr sz="1600" b="0" dirty="0">
                 <a:solidFill>
                   <a:srgbClr val="FF3131"/>
                 </a:solidFill>
@@ -11460,7 +11717,7 @@
               <a:t>■  </a:t>
             </a:r>
             <a:r>
-              <a:rPr sz="2600" b="1">
+              <a:rPr sz="2800" b="1" dirty="0">
                 <a:solidFill>
                   <a:srgbClr val="000000"/>
                 </a:solidFill>
@@ -11469,13 +11726,31 @@
               <a:t>Real hardware runs: </a:t>
             </a:r>
             <a:r>
-              <a:rPr sz="2600" b="0">
+              <a:rPr sz="2800" b="0" dirty="0">
                 <a:solidFill>
                   <a:srgbClr val="000000"/>
                 </a:solidFill>
                 <a:latin typeface="IBM Plex Sans"/>
               </a:rPr>
-              <a:t>2 jobs on IBM ibm_marrakesh, 34 circuits x 1000 shots, 11 QPU seconds each, each with a forged twin.</a:t>
+              <a:t>2 jobs on IBM </a:t>
+            </a:r>
+            <a:r>
+              <a:rPr sz="2800" b="0" dirty="0" err="1">
+                <a:solidFill>
+                  <a:srgbClr val="000000"/>
+                </a:solidFill>
+                <a:latin typeface="IBM Plex Sans"/>
+              </a:rPr>
+              <a:t>ibm_marrakesh</a:t>
+            </a:r>
+            <a:r>
+              <a:rPr sz="2800" b="0" dirty="0">
+                <a:solidFill>
+                  <a:srgbClr val="000000"/>
+                </a:solidFill>
+                <a:latin typeface="IBM Plex Sans"/>
+              </a:rPr>
+              <a:t>, 34 circuits x 1000 shots, 11 QPU seconds each, each with a forged twin.</a:t>
             </a:r>
           </a:p>
           <a:p>
@@ -11485,7 +11760,7 @@
               </a:spcAft>
             </a:pPr>
             <a:r>
-              <a:rPr sz="1560" b="0">
+              <a:rPr sz="1600" b="0" dirty="0">
                 <a:solidFill>
                   <a:srgbClr val="FF3131"/>
                 </a:solidFill>
@@ -11494,7 +11769,7 @@
               <a:t>■  </a:t>
             </a:r>
             <a:r>
-              <a:rPr sz="2600" b="1">
+              <a:rPr sz="2800" b="1" dirty="0">
                 <a:solidFill>
                   <a:srgbClr val="000000"/>
                 </a:solidFill>
@@ -11503,7 +11778,7 @@
               <a:t>Dashboard, Verify a job: </a:t>
             </a:r>
             <a:r>
-              <a:rPr sz="2600" b="0">
+              <a:rPr sz="2800" b="0" dirty="0">
                 <a:solidFill>
                   <a:srgbClr val="000000"/>
                 </a:solidFill>
@@ -11519,7 +11794,7 @@
               </a:spcAft>
             </a:pPr>
             <a:r>
-              <a:rPr sz="1560" b="0">
+              <a:rPr sz="1600" b="0" dirty="0">
                 <a:solidFill>
                   <a:srgbClr val="FF3131"/>
                 </a:solidFill>
@@ -11528,7 +11803,7 @@
               <a:t>■  </a:t>
             </a:r>
             <a:r>
-              <a:rPr sz="2600" b="1">
+              <a:rPr sz="2800" b="1" dirty="0">
                 <a:solidFill>
                   <a:srgbClr val="000000"/>
                 </a:solidFill>
@@ -11537,7 +11812,7 @@
               <a:t>Dashboard, Evidence: </a:t>
             </a:r>
             <a:r>
-              <a:rPr sz="2600" b="0">
+              <a:rPr sz="2800" b="0" dirty="0">
                 <a:solidFill>
                   <a:srgbClr val="000000"/>
                 </a:solidFill>
@@ -11553,7 +11828,7 @@
               </a:spcAft>
             </a:pPr>
             <a:r>
-              <a:rPr sz="1560" b="0">
+              <a:rPr sz="1600" b="0" dirty="0">
                 <a:solidFill>
                   <a:srgbClr val="FF3131"/>
                 </a:solidFill>
@@ -11562,7 +11837,7 @@
               <a:t>■  </a:t>
             </a:r>
             <a:r>
-              <a:rPr sz="2600" b="1">
+              <a:rPr sz="2800" b="1" dirty="0">
                 <a:solidFill>
                   <a:srgbClr val="000000"/>
                 </a:solidFill>
@@ -11571,7 +11846,7 @@
               <a:t>Dashboard, Detector: </a:t>
             </a:r>
             <a:r>
-              <a:rPr sz="2600" b="0">
+              <a:rPr sz="2800" b="0" dirty="0">
                 <a:solidFill>
                   <a:srgbClr val="000000"/>
                 </a:solidFill>
@@ -11587,7 +11862,7 @@
               </a:spcAft>
             </a:pPr>
             <a:r>
-              <a:rPr sz="1560" b="0">
+              <a:rPr sz="1600" b="0" dirty="0">
                 <a:solidFill>
                   <a:srgbClr val="FF3131"/>
                 </a:solidFill>
@@ -11596,7 +11871,7 @@
               <a:t>■  </a:t>
             </a:r>
             <a:r>
-              <a:rPr sz="2600" b="1">
+              <a:rPr sz="2800" b="1" dirty="0">
                 <a:solidFill>
                   <a:srgbClr val="000000"/>
                 </a:solidFill>
@@ -11605,7 +11880,7 @@
               <a:t>Extras: </a:t>
             </a:r>
             <a:r>
-              <a:rPr sz="2600" b="0">
+              <a:rPr sz="2800" b="0" dirty="0">
                 <a:solidFill>
                   <a:srgbClr val="000000"/>
                 </a:solidFill>
@@ -11618,12 +11893,12 @@
       </p:sp>
       <p:sp>
         <p:nvSpPr>
-          <p:cNvPr name="Freeform 24" id="24"/>
+          <p:cNvPr id="24" name="Freeform 24"/>
           <p:cNvSpPr/>
           <p:nvPr/>
         </p:nvSpPr>
         <p:spPr>
-          <a:xfrm flipH="false" flipV="false" rot="0">
+          <a:xfrm>
             <a:off x="264376" y="407706"/>
             <a:ext cx="3092172" cy="1030724"/>
           </a:xfrm>
@@ -11632,9 +11907,9 @@
             <a:gdLst/>
             <a:ahLst/>
             <a:cxnLst/>
-            <a:rect r="r" b="b" t="t" l="l"/>
+            <a:rect l="l" t="t" r="r" b="b"/>
             <a:pathLst>
-              <a:path h="1030724" w="3092172">
+              <a:path w="3092172" h="1030724">
                 <a:moveTo>
                   <a:pt x="0" y="0"/>
                 </a:moveTo>
@@ -11657,7 +11932,7 @@
           <a:blipFill>
             <a:blip r:embed="rId6"/>
             <a:stretch>
-              <a:fillRect l="0" t="0" r="0" b="0"/>
+              <a:fillRect/>
             </a:stretch>
           </a:blipFill>
         </p:spPr>
@@ -11671,13 +11946,14 @@
 </file>
 
 <file path=ppt/slides/slide8.xml><?xml version="1.0" encoding="utf-8"?>
-<p:sld xmlns:p="http://schemas.openxmlformats.org/presentationml/2006/main" xmlns:a="http://schemas.openxmlformats.org/drawingml/2006/main" xmlns:r="http://schemas.openxmlformats.org/officeDocument/2006/relationships">
+<p:sld xmlns:a="http://schemas.openxmlformats.org/drawingml/2006/main" xmlns:r="http://schemas.openxmlformats.org/officeDocument/2006/relationships" xmlns:p="http://schemas.openxmlformats.org/presentationml/2006/main">
   <p:cSld>
     <p:bg>
       <p:bgPr>
         <a:solidFill>
           <a:srgbClr val="B48AF7"/>
         </a:solidFill>
+        <a:effectLst/>
       </p:bgPr>
     </p:bg>
     <p:spTree>
@@ -11696,12 +11972,12 @@
       </p:grpSpPr>
       <p:grpSp>
         <p:nvGrpSpPr>
-          <p:cNvPr name="Group 2" id="2"/>
+          <p:cNvPr id="2" name="Group 2"/>
           <p:cNvGrpSpPr/>
           <p:nvPr/>
         </p:nvGrpSpPr>
         <p:grpSpPr>
-          <a:xfrm rot="0">
+          <a:xfrm>
             <a:off x="-1597105" y="2516808"/>
             <a:ext cx="2625805" cy="830953"/>
             <a:chOff x="0" y="0"/>
@@ -11710,12 +11986,12 @@
         </p:grpSpPr>
         <p:sp>
           <p:nvSpPr>
-            <p:cNvPr name="Freeform 3" id="3"/>
+            <p:cNvPr id="3" name="Freeform 3"/>
             <p:cNvSpPr/>
             <p:nvPr/>
           </p:nvSpPr>
           <p:spPr>
-            <a:xfrm flipH="false" flipV="false" rot="0">
+            <a:xfrm>
               <a:off x="0" y="0"/>
               <a:ext cx="5816600" cy="1840738"/>
             </a:xfrm>
@@ -11724,9 +12000,9 @@
               <a:gdLst/>
               <a:ahLst/>
               <a:cxnLst/>
-              <a:rect r="r" b="b" t="t" l="l"/>
+              <a:rect l="l" t="t" r="r" b="b"/>
               <a:pathLst>
-                <a:path h="1840738" w="5816600">
+                <a:path w="5816600" h="1840738">
                   <a:moveTo>
                     <a:pt x="0" y="0"/>
                   </a:moveTo>
@@ -11749,7 +12025,7 @@
             <a:blipFill>
               <a:blip r:embed="rId2"/>
               <a:stretch>
-                <a:fillRect l="0" t="0" r="0" b="2"/>
+                <a:fillRect b="2"/>
               </a:stretch>
             </a:blipFill>
           </p:spPr>
@@ -11757,12 +12033,12 @@
       </p:grpSp>
       <p:grpSp>
         <p:nvGrpSpPr>
-          <p:cNvPr name="Group 4" id="4"/>
+          <p:cNvPr id="4" name="Group 4"/>
           <p:cNvGrpSpPr/>
           <p:nvPr/>
         </p:nvGrpSpPr>
         <p:grpSpPr>
-          <a:xfrm rot="0">
+          <a:xfrm>
             <a:off x="2928206" y="9780631"/>
             <a:ext cx="2625805" cy="830953"/>
             <a:chOff x="0" y="0"/>
@@ -11771,12 +12047,12 @@
         </p:grpSpPr>
         <p:sp>
           <p:nvSpPr>
-            <p:cNvPr name="Freeform 5" id="5"/>
+            <p:cNvPr id="5" name="Freeform 5"/>
             <p:cNvSpPr/>
             <p:nvPr/>
           </p:nvSpPr>
           <p:spPr>
-            <a:xfrm flipH="false" flipV="false" rot="0">
+            <a:xfrm>
               <a:off x="0" y="0"/>
               <a:ext cx="5816600" cy="1840738"/>
             </a:xfrm>
@@ -11785,9 +12061,9 @@
               <a:gdLst/>
               <a:ahLst/>
               <a:cxnLst/>
-              <a:rect r="r" b="b" t="t" l="l"/>
+              <a:rect l="l" t="t" r="r" b="b"/>
               <a:pathLst>
-                <a:path h="1840738" w="5816600">
+                <a:path w="5816600" h="1840738">
                   <a:moveTo>
                     <a:pt x="0" y="0"/>
                   </a:moveTo>
@@ -11810,7 +12086,7 @@
             <a:blipFill>
               <a:blip r:embed="rId2"/>
               <a:stretch>
-                <a:fillRect l="0" t="0" r="0" b="2"/>
+                <a:fillRect b="2"/>
               </a:stretch>
             </a:blipFill>
           </p:spPr>
@@ -11818,12 +12094,12 @@
       </p:grpSp>
       <p:grpSp>
         <p:nvGrpSpPr>
-          <p:cNvPr name="Group 6" id="6"/>
+          <p:cNvPr id="6" name="Group 6"/>
           <p:cNvGrpSpPr/>
           <p:nvPr/>
         </p:nvGrpSpPr>
         <p:grpSpPr>
-          <a:xfrm rot="0">
+          <a:xfrm>
             <a:off x="13367623" y="9656173"/>
             <a:ext cx="2625805" cy="830953"/>
             <a:chOff x="0" y="0"/>
@@ -11832,12 +12108,12 @@
         </p:grpSpPr>
         <p:sp>
           <p:nvSpPr>
-            <p:cNvPr name="Freeform 7" id="7"/>
+            <p:cNvPr id="7" name="Freeform 7"/>
             <p:cNvSpPr/>
             <p:nvPr/>
           </p:nvSpPr>
           <p:spPr>
-            <a:xfrm flipH="false" flipV="false" rot="0">
+            <a:xfrm>
               <a:off x="0" y="0"/>
               <a:ext cx="5816600" cy="1840738"/>
             </a:xfrm>
@@ -11846,9 +12122,9 @@
               <a:gdLst/>
               <a:ahLst/>
               <a:cxnLst/>
-              <a:rect r="r" b="b" t="t" l="l"/>
+              <a:rect l="l" t="t" r="r" b="b"/>
               <a:pathLst>
-                <a:path h="1840738" w="5816600">
+                <a:path w="5816600" h="1840738">
                   <a:moveTo>
                     <a:pt x="0" y="0"/>
                   </a:moveTo>
@@ -11871,7 +12147,7 @@
             <a:blipFill>
               <a:blip r:embed="rId2"/>
               <a:stretch>
-                <a:fillRect l="0" t="0" r="0" b="2"/>
+                <a:fillRect b="2"/>
               </a:stretch>
             </a:blipFill>
           </p:spPr>
@@ -11879,12 +12155,12 @@
       </p:grpSp>
       <p:grpSp>
         <p:nvGrpSpPr>
-          <p:cNvPr name="Group 8" id="8"/>
+          <p:cNvPr id="8" name="Group 8"/>
           <p:cNvGrpSpPr/>
           <p:nvPr/>
         </p:nvGrpSpPr>
         <p:grpSpPr>
-          <a:xfrm rot="0">
+          <a:xfrm>
             <a:off x="7990242" y="9984655"/>
             <a:ext cx="173987" cy="173987"/>
             <a:chOff x="0" y="0"/>
@@ -11893,12 +12169,12 @@
         </p:grpSpPr>
         <p:sp>
           <p:nvSpPr>
-            <p:cNvPr name="Freeform 9" id="9"/>
+            <p:cNvPr id="9" name="Freeform 9"/>
             <p:cNvSpPr/>
             <p:nvPr/>
           </p:nvSpPr>
           <p:spPr>
-            <a:xfrm flipH="false" flipV="false" rot="0">
+            <a:xfrm>
               <a:off x="0" y="0"/>
               <a:ext cx="812800" cy="812800"/>
             </a:xfrm>
@@ -11907,9 +12183,9 @@
               <a:gdLst/>
               <a:ahLst/>
               <a:cxnLst/>
-              <a:rect r="r" b="b" t="t" l="l"/>
+              <a:rect l="l" t="t" r="r" b="b"/>
               <a:pathLst>
-                <a:path h="812800" w="812800">
+                <a:path w="812800" h="812800">
                   <a:moveTo>
                     <a:pt x="406400" y="0"/>
                   </a:moveTo>
@@ -11944,8 +12220,8 @@
         </p:sp>
         <p:sp>
           <p:nvSpPr>
-            <p:cNvPr name="TextBox 10" id="10"/>
-            <p:cNvSpPr txBox="true"/>
+            <p:cNvPr id="10" name="TextBox 10"/>
+            <p:cNvSpPr txBox="1"/>
             <p:nvPr/>
           </p:nvSpPr>
           <p:spPr>
@@ -11958,7 +12234,7 @@
             </a:prstGeom>
           </p:spPr>
           <p:txBody>
-            <a:bodyPr anchor="ctr" rtlCol="false" tIns="50800" lIns="50800" bIns="50800" rIns="50800"/>
+            <a:bodyPr lIns="50800" tIns="50800" rIns="50800" bIns="50800" rtlCol="0" anchor="ctr"/>
             <a:lstStyle/>
             <a:p>
               <a:pPr algn="ctr">
@@ -11966,18 +12242,19 @@
                   <a:spcPts val="2239"/>
                 </a:lnSpc>
               </a:pPr>
+              <a:endParaRPr/>
             </a:p>
           </p:txBody>
         </p:sp>
       </p:grpSp>
       <p:grpSp>
         <p:nvGrpSpPr>
-          <p:cNvPr name="Group 11" id="11"/>
+          <p:cNvPr id="11" name="Group 11"/>
           <p:cNvGrpSpPr/>
           <p:nvPr/>
         </p:nvGrpSpPr>
         <p:grpSpPr>
-          <a:xfrm rot="0">
+          <a:xfrm>
             <a:off x="10353346" y="9948585"/>
             <a:ext cx="173987" cy="173987"/>
             <a:chOff x="0" y="0"/>
@@ -11986,12 +12263,12 @@
         </p:grpSpPr>
         <p:sp>
           <p:nvSpPr>
-            <p:cNvPr name="Freeform 12" id="12"/>
+            <p:cNvPr id="12" name="Freeform 12"/>
             <p:cNvSpPr/>
             <p:nvPr/>
           </p:nvSpPr>
           <p:spPr>
-            <a:xfrm flipH="false" flipV="false" rot="0">
+            <a:xfrm>
               <a:off x="0" y="0"/>
               <a:ext cx="812800" cy="812800"/>
             </a:xfrm>
@@ -12000,9 +12277,9 @@
               <a:gdLst/>
               <a:ahLst/>
               <a:cxnLst/>
-              <a:rect r="r" b="b" t="t" l="l"/>
+              <a:rect l="l" t="t" r="r" b="b"/>
               <a:pathLst>
-                <a:path h="812800" w="812800">
+                <a:path w="812800" h="812800">
                   <a:moveTo>
                     <a:pt x="406400" y="0"/>
                   </a:moveTo>
@@ -12037,8 +12314,8 @@
         </p:sp>
         <p:sp>
           <p:nvSpPr>
-            <p:cNvPr name="TextBox 13" id="13"/>
-            <p:cNvSpPr txBox="true"/>
+            <p:cNvPr id="13" name="TextBox 13"/>
+            <p:cNvSpPr txBox="1"/>
             <p:nvPr/>
           </p:nvSpPr>
           <p:spPr>
@@ -12051,7 +12328,7 @@
             </a:prstGeom>
           </p:spPr>
           <p:txBody>
-            <a:bodyPr anchor="ctr" rtlCol="false" tIns="50800" lIns="50800" bIns="50800" rIns="50800"/>
+            <a:bodyPr lIns="50800" tIns="50800" rIns="50800" bIns="50800" rtlCol="0" anchor="ctr"/>
             <a:lstStyle/>
             <a:p>
               <a:pPr algn="ctr">
@@ -12059,18 +12336,19 @@
                   <a:spcPts val="2239"/>
                 </a:lnSpc>
               </a:pPr>
+              <a:endParaRPr/>
             </a:p>
           </p:txBody>
         </p:sp>
       </p:grpSp>
       <p:grpSp>
         <p:nvGrpSpPr>
-          <p:cNvPr name="Group 14" id="14"/>
+          <p:cNvPr id="14" name="Group 14"/>
           <p:cNvGrpSpPr/>
           <p:nvPr/>
         </p:nvGrpSpPr>
         <p:grpSpPr>
-          <a:xfrm rot="0">
+          <a:xfrm>
             <a:off x="7045033" y="1893761"/>
             <a:ext cx="3482300" cy="641986"/>
             <a:chOff x="0" y="0"/>
@@ -12079,12 +12357,12 @@
         </p:grpSpPr>
         <p:sp>
           <p:nvSpPr>
-            <p:cNvPr name="Freeform 15" id="15"/>
+            <p:cNvPr id="15" name="Freeform 15"/>
             <p:cNvSpPr/>
             <p:nvPr/>
           </p:nvSpPr>
           <p:spPr>
-            <a:xfrm flipH="false" flipV="false" rot="0">
+            <a:xfrm>
               <a:off x="0" y="0"/>
               <a:ext cx="917149" cy="169083"/>
             </a:xfrm>
@@ -12093,9 +12371,9 @@
               <a:gdLst/>
               <a:ahLst/>
               <a:cxnLst/>
-              <a:rect r="r" b="b" t="t" l="l"/>
+              <a:rect l="l" t="t" r="r" b="b"/>
               <a:pathLst>
-                <a:path h="169083" w="917149">
+                <a:path w="917149" h="169083">
                   <a:moveTo>
                     <a:pt x="84541" y="0"/>
                   </a:moveTo>
@@ -12162,8 +12440,8 @@
         </p:sp>
         <p:sp>
           <p:nvSpPr>
-            <p:cNvPr name="TextBox 16" id="16"/>
-            <p:cNvSpPr txBox="true"/>
+            <p:cNvPr id="16" name="TextBox 16"/>
+            <p:cNvSpPr txBox="1"/>
             <p:nvPr/>
           </p:nvSpPr>
           <p:spPr>
@@ -12176,7 +12454,7 @@
             </a:prstGeom>
           </p:spPr>
           <p:txBody>
-            <a:bodyPr anchor="ctr" rtlCol="false" tIns="50800" lIns="50800" bIns="50800" rIns="50800"/>
+            <a:bodyPr lIns="50800" tIns="50800" rIns="50800" bIns="50800" rtlCol="0" anchor="ctr"/>
             <a:lstStyle/>
             <a:p>
               <a:pPr algn="ctr">
@@ -12184,18 +12462,19 @@
                   <a:spcPts val="2239"/>
                 </a:lnSpc>
               </a:pPr>
+              <a:endParaRPr/>
             </a:p>
           </p:txBody>
         </p:sp>
       </p:grpSp>
       <p:sp>
         <p:nvSpPr>
-          <p:cNvPr name="Freeform 17" id="17"/>
+          <p:cNvPr id="17" name="Freeform 17"/>
           <p:cNvSpPr/>
           <p:nvPr/>
         </p:nvSpPr>
         <p:spPr>
-          <a:xfrm flipH="false" flipV="false" rot="0">
+          <a:xfrm>
             <a:off x="13002366" y="-47625"/>
             <a:ext cx="5063940" cy="1941386"/>
           </a:xfrm>
@@ -12204,9 +12483,9 @@
             <a:gdLst/>
             <a:ahLst/>
             <a:cxnLst/>
-            <a:rect r="r" b="b" t="t" l="l"/>
+            <a:rect l="l" t="t" r="r" b="b"/>
             <a:pathLst>
-              <a:path h="1941386" w="5063940">
+              <a:path w="5063940" h="1941386">
                 <a:moveTo>
                   <a:pt x="0" y="0"/>
                 </a:moveTo>
@@ -12229,19 +12508,19 @@
           <a:blipFill>
             <a:blip r:embed="rId3"/>
             <a:stretch>
-              <a:fillRect l="0" t="0" r="0" b="0"/>
+              <a:fillRect/>
             </a:stretch>
           </a:blipFill>
         </p:spPr>
       </p:sp>
       <p:sp>
         <p:nvSpPr>
-          <p:cNvPr name="TextBox 18" id="18"/>
-          <p:cNvSpPr txBox="true"/>
+          <p:cNvPr id="18" name="TextBox 18"/>
+          <p:cNvSpPr txBox="1"/>
           <p:nvPr/>
         </p:nvSpPr>
         <p:spPr>
-          <a:xfrm rot="0">
+          <a:xfrm>
             <a:off x="8316142" y="9882546"/>
             <a:ext cx="1743273" cy="264135"/>
           </a:xfrm>
@@ -12250,7 +12529,7 @@
           </a:prstGeom>
         </p:spPr>
         <p:txBody>
-          <a:bodyPr anchor="t" rtlCol="false" tIns="0" lIns="0" bIns="0" rIns="0">
+          <a:bodyPr lIns="0" tIns="0" rIns="0" bIns="0" rtlCol="0" anchor="t">
             <a:spAutoFit/>
           </a:bodyPr>
           <a:lstStyle/>
@@ -12277,12 +12556,12 @@
       </p:sp>
       <p:sp>
         <p:nvSpPr>
-          <p:cNvPr name="Freeform 19" id="19"/>
+          <p:cNvPr id="19" name="Freeform 19"/>
           <p:cNvSpPr/>
           <p:nvPr/>
         </p:nvSpPr>
         <p:spPr>
-          <a:xfrm flipH="false" flipV="false" rot="0">
+          <a:xfrm>
             <a:off x="7590903" y="-208256"/>
             <a:ext cx="2134862" cy="2130592"/>
           </a:xfrm>
@@ -12291,9 +12570,9 @@
             <a:gdLst/>
             <a:ahLst/>
             <a:cxnLst/>
-            <a:rect r="r" b="b" t="t" l="l"/>
+            <a:rect l="l" t="t" r="r" b="b"/>
             <a:pathLst>
-              <a:path h="2130592" w="2134862">
+              <a:path w="2134862" h="2130592">
                 <a:moveTo>
                   <a:pt x="0" y="0"/>
                 </a:moveTo>
@@ -12316,19 +12595,19 @@
           <a:blipFill>
             <a:blip r:embed="rId4"/>
             <a:stretch>
-              <a:fillRect l="0" t="0" r="0" b="0"/>
+              <a:fillRect/>
             </a:stretch>
           </a:blipFill>
         </p:spPr>
       </p:sp>
       <p:grpSp>
         <p:nvGrpSpPr>
-          <p:cNvPr name="Group 20" id="20"/>
+          <p:cNvPr id="20" name="Group 20"/>
           <p:cNvGrpSpPr/>
           <p:nvPr/>
         </p:nvGrpSpPr>
         <p:grpSpPr>
-          <a:xfrm rot="0">
+          <a:xfrm>
             <a:off x="16388711" y="8987334"/>
             <a:ext cx="1677594" cy="1065265"/>
             <a:chOff x="0" y="0"/>
@@ -12337,12 +12616,12 @@
         </p:grpSpPr>
         <p:sp>
           <p:nvSpPr>
-            <p:cNvPr name="Freeform 21" id="21"/>
+            <p:cNvPr id="21" name="Freeform 21"/>
             <p:cNvSpPr/>
             <p:nvPr/>
           </p:nvSpPr>
           <p:spPr>
-            <a:xfrm flipH="false" flipV="false" rot="0">
+            <a:xfrm>
               <a:off x="0" y="0"/>
               <a:ext cx="4028567" cy="2558161"/>
             </a:xfrm>
@@ -12351,9 +12630,9 @@
               <a:gdLst/>
               <a:ahLst/>
               <a:cxnLst/>
-              <a:rect r="r" b="b" t="t" l="l"/>
+              <a:rect l="l" t="t" r="r" b="b"/>
               <a:pathLst>
-                <a:path h="2558161" w="4028567">
+                <a:path w="4028567" h="2558161">
                   <a:moveTo>
                     <a:pt x="0" y="0"/>
                   </a:moveTo>
@@ -12376,7 +12655,7 @@
             <a:blipFill>
               <a:blip r:embed="rId5"/>
               <a:stretch>
-                <a:fillRect l="0" t="0" r="0" b="1"/>
+                <a:fillRect b="1"/>
               </a:stretch>
             </a:blipFill>
           </p:spPr>
@@ -12384,12 +12663,12 @@
       </p:grpSp>
       <p:grpSp>
         <p:nvGrpSpPr>
-          <p:cNvPr name="Group 22" id="22"/>
+          <p:cNvPr id="22" name="Group 22"/>
           <p:cNvGrpSpPr/>
           <p:nvPr/>
         </p:nvGrpSpPr>
         <p:grpSpPr>
-          <a:xfrm rot="0">
+          <a:xfrm>
             <a:off x="16564806" y="3523271"/>
             <a:ext cx="2625805" cy="830953"/>
             <a:chOff x="0" y="0"/>
@@ -12398,12 +12677,12 @@
         </p:grpSpPr>
         <p:sp>
           <p:nvSpPr>
-            <p:cNvPr name="Freeform 23" id="23"/>
+            <p:cNvPr id="23" name="Freeform 23"/>
             <p:cNvSpPr/>
             <p:nvPr/>
           </p:nvSpPr>
           <p:spPr>
-            <a:xfrm flipH="false" flipV="false" rot="0">
+            <a:xfrm>
               <a:off x="0" y="0"/>
               <a:ext cx="5816600" cy="1840738"/>
             </a:xfrm>
@@ -12412,9 +12691,9 @@
               <a:gdLst/>
               <a:ahLst/>
               <a:cxnLst/>
-              <a:rect r="r" b="b" t="t" l="l"/>
+              <a:rect l="l" t="t" r="r" b="b"/>
               <a:pathLst>
-                <a:path h="1840738" w="5816600">
+                <a:path w="5816600" h="1840738">
                   <a:moveTo>
                     <a:pt x="0" y="0"/>
                   </a:moveTo>
@@ -12437,7 +12716,7 @@
             <a:blipFill>
               <a:blip r:embed="rId2"/>
               <a:stretch>
-                <a:fillRect l="0" t="0" r="0" b="2"/>
+                <a:fillRect b="2"/>
               </a:stretch>
             </a:blipFill>
           </p:spPr>
@@ -12445,12 +12724,12 @@
       </p:grpSp>
       <p:sp>
         <p:nvSpPr>
-          <p:cNvPr name="TextBox 24" id="24"/>
-          <p:cNvSpPr txBox="true"/>
+          <p:cNvPr id="24" name="TextBox 24"/>
+          <p:cNvSpPr txBox="1"/>
           <p:nvPr/>
         </p:nvSpPr>
         <p:spPr>
-          <a:xfrm rot="0">
+          <a:xfrm>
             <a:off x="7550865" y="1969009"/>
             <a:ext cx="2641044" cy="405766"/>
           </a:xfrm>
@@ -12459,7 +12738,7 @@
           </a:prstGeom>
         </p:spPr>
         <p:txBody>
-          <a:bodyPr anchor="t" rtlCol="false" tIns="0" lIns="0" bIns="0" rIns="0" wrap="none">
+          <a:bodyPr wrap="none" lIns="0" tIns="0" rIns="0" bIns="0" rtlCol="0" anchor="t">
             <a:spAutoFit/>
           </a:bodyPr>
           <a:lstStyle/>
@@ -12489,12 +12768,12 @@
       </p:sp>
       <p:sp>
         <p:nvSpPr>
-          <p:cNvPr name="TextBox 25" id="25"/>
-          <p:cNvSpPr txBox="true"/>
+          <p:cNvPr id="25" name="TextBox 25"/>
+          <p:cNvSpPr txBox="1"/>
           <p:nvPr/>
         </p:nvSpPr>
         <p:spPr>
-          <a:xfrm rot="0">
+          <a:xfrm>
             <a:off x="1188720" y="5852160"/>
             <a:ext cx="14356080" cy="3291840"/>
           </a:xfrm>
@@ -12503,7 +12782,7 @@
           </a:prstGeom>
         </p:spPr>
         <p:txBody>
-          <a:bodyPr anchor="t" rtlCol="false" tIns="0" lIns="0" bIns="0" rIns="0" wrap="square">
+          <a:bodyPr wrap="square" lIns="0" tIns="0" rIns="0" bIns="0" rtlCol="0" anchor="t">
             <a:spAutoFit/>
           </a:bodyPr>
           <a:lstStyle/>
@@ -12650,12 +12929,12 @@
       </p:sp>
       <p:sp>
         <p:nvSpPr>
-          <p:cNvPr name="Freeform 26" id="26"/>
+          <p:cNvPr id="26" name="Freeform 26"/>
           <p:cNvSpPr/>
           <p:nvPr/>
         </p:nvSpPr>
         <p:spPr>
-          <a:xfrm flipH="false" flipV="false" rot="0">
+          <a:xfrm>
             <a:off x="264376" y="407706"/>
             <a:ext cx="3092172" cy="1030724"/>
           </a:xfrm>
@@ -12664,9 +12943,9 @@
             <a:gdLst/>
             <a:ahLst/>
             <a:cxnLst/>
-            <a:rect r="r" b="b" t="t" l="l"/>
+            <a:rect l="l" t="t" r="r" b="b"/>
             <a:pathLst>
-              <a:path h="1030724" w="3092172">
+              <a:path w="3092172" h="1030724">
                 <a:moveTo>
                   <a:pt x="0" y="0"/>
                 </a:moveTo>
@@ -12689,7 +12968,7 @@
           <a:blipFill>
             <a:blip r:embed="rId6"/>
             <a:stretch>
-              <a:fillRect l="0" t="0" r="0" b="0"/>
+              <a:fillRect/>
             </a:stretch>
           </a:blipFill>
         </p:spPr>
@@ -12713,9 +12992,27 @@
                 <a:tableStyleId>{5C22544A-7EE6-4342-B048-85BDC9FD1C3A}</a:tableStyleId>
               </a:tblPr>
               <a:tblGrid>
-                <a:gridCol w="7406640"/>
-                <a:gridCol w="3474720"/>
-                <a:gridCol w="3474720"/>
+                <a:gridCol w="7406640">
+                  <a:extLst>
+                    <a:ext uri="{9D8B030D-6E8A-4147-A177-3AD203B41FA5}">
+                      <a16:colId xmlns:a16="http://schemas.microsoft.com/office/drawing/2014/main" val="20000"/>
+                    </a:ext>
+                  </a:extLst>
+                </a:gridCol>
+                <a:gridCol w="3474720">
+                  <a:extLst>
+                    <a:ext uri="{9D8B030D-6E8A-4147-A177-3AD203B41FA5}">
+                      <a16:colId xmlns:a16="http://schemas.microsoft.com/office/drawing/2014/main" val="20001"/>
+                    </a:ext>
+                  </a:extLst>
+                </a:gridCol>
+                <a:gridCol w="3474720">
+                  <a:extLst>
+                    <a:ext uri="{9D8B030D-6E8A-4147-A177-3AD203B41FA5}">
+                      <a16:colId xmlns:a16="http://schemas.microsoft.com/office/drawing/2014/main" val="20002"/>
+                    </a:ext>
+                  </a:extLst>
+                </a:gridCol>
               </a:tblGrid>
               <a:tr h="662940">
                 <a:tc>
@@ -12787,6 +13084,11 @@
                     </a:solidFill>
                   </a:tcPr>
                 </a:tc>
+                <a:extLst>
+                  <a:ext uri="{0D108BD9-81ED-4DB2-BD59-A6C34878D82A}">
+                    <a16:rowId xmlns:a16="http://schemas.microsoft.com/office/drawing/2014/main" val="10000"/>
+                  </a:ext>
+                </a:extLst>
               </a:tr>
               <a:tr h="662940">
                 <a:tc>
@@ -12858,6 +13160,11 @@
                     </a:solidFill>
                   </a:tcPr>
                 </a:tc>
+                <a:extLst>
+                  <a:ext uri="{0D108BD9-81ED-4DB2-BD59-A6C34878D82A}">
+                    <a16:rowId xmlns:a16="http://schemas.microsoft.com/office/drawing/2014/main" val="10001"/>
+                  </a:ext>
+                </a:extLst>
               </a:tr>
               <a:tr h="662940">
                 <a:tc>
@@ -12929,6 +13236,11 @@
                     </a:solidFill>
                   </a:tcPr>
                 </a:tc>
+                <a:extLst>
+                  <a:ext uri="{0D108BD9-81ED-4DB2-BD59-A6C34878D82A}">
+                    <a16:rowId xmlns:a16="http://schemas.microsoft.com/office/drawing/2014/main" val="10002"/>
+                  </a:ext>
+                </a:extLst>
               </a:tr>
               <a:tr h="662940">
                 <a:tc>
@@ -13000,6 +13312,11 @@
                     </a:solidFill>
                   </a:tcPr>
                 </a:tc>
+                <a:extLst>
+                  <a:ext uri="{0D108BD9-81ED-4DB2-BD59-A6C34878D82A}">
+                    <a16:rowId xmlns:a16="http://schemas.microsoft.com/office/drawing/2014/main" val="10003"/>
+                  </a:ext>
+                </a:extLst>
               </a:tr>
             </a:tbl>
           </a:graphicData>
@@ -13014,13 +13331,14 @@
 </file>
 
 <file path=ppt/slides/slide9.xml><?xml version="1.0" encoding="utf-8"?>
-<p:sld xmlns:p="http://schemas.openxmlformats.org/presentationml/2006/main" xmlns:a="http://schemas.openxmlformats.org/drawingml/2006/main" xmlns:r="http://schemas.openxmlformats.org/officeDocument/2006/relationships">
+<p:sld xmlns:a="http://schemas.openxmlformats.org/drawingml/2006/main" xmlns:r="http://schemas.openxmlformats.org/officeDocument/2006/relationships" xmlns:p="http://schemas.openxmlformats.org/presentationml/2006/main">
   <p:cSld>
     <p:bg>
       <p:bgPr>
         <a:solidFill>
           <a:srgbClr val="E0E0E0"/>
         </a:solidFill>
+        <a:effectLst/>
       </p:bgPr>
     </p:bg>
     <p:spTree>
@@ -13039,12 +13357,12 @@
       </p:grpSpPr>
       <p:grpSp>
         <p:nvGrpSpPr>
-          <p:cNvPr name="Group 2" id="2"/>
+          <p:cNvPr id="2" name="Group 2"/>
           <p:cNvGrpSpPr/>
           <p:nvPr/>
         </p:nvGrpSpPr>
         <p:grpSpPr>
-          <a:xfrm rot="0">
+          <a:xfrm>
             <a:off x="-1597105" y="2516808"/>
             <a:ext cx="2625805" cy="830953"/>
             <a:chOff x="0" y="0"/>
@@ -13053,12 +13371,12 @@
         </p:grpSpPr>
         <p:sp>
           <p:nvSpPr>
-            <p:cNvPr name="Freeform 3" id="3"/>
+            <p:cNvPr id="3" name="Freeform 3"/>
             <p:cNvSpPr/>
             <p:nvPr/>
           </p:nvSpPr>
           <p:spPr>
-            <a:xfrm flipH="false" flipV="false" rot="0">
+            <a:xfrm>
               <a:off x="0" y="0"/>
               <a:ext cx="5816600" cy="1840738"/>
             </a:xfrm>
@@ -13067,9 +13385,9 @@
               <a:gdLst/>
               <a:ahLst/>
               <a:cxnLst/>
-              <a:rect r="r" b="b" t="t" l="l"/>
+              <a:rect l="l" t="t" r="r" b="b"/>
               <a:pathLst>
-                <a:path h="1840738" w="5816600">
+                <a:path w="5816600" h="1840738">
                   <a:moveTo>
                     <a:pt x="0" y="0"/>
                   </a:moveTo>
@@ -13092,7 +13410,7 @@
             <a:blipFill>
               <a:blip r:embed="rId2"/>
               <a:stretch>
-                <a:fillRect l="0" t="0" r="0" b="2"/>
+                <a:fillRect b="2"/>
               </a:stretch>
             </a:blipFill>
           </p:spPr>
@@ -13100,12 +13418,12 @@
       </p:grpSp>
       <p:grpSp>
         <p:nvGrpSpPr>
-          <p:cNvPr name="Group 4" id="4"/>
+          <p:cNvPr id="4" name="Group 4"/>
           <p:cNvGrpSpPr/>
           <p:nvPr/>
         </p:nvGrpSpPr>
         <p:grpSpPr>
-          <a:xfrm rot="0">
+          <a:xfrm>
             <a:off x="2928206" y="9780631"/>
             <a:ext cx="2625805" cy="830953"/>
             <a:chOff x="0" y="0"/>
@@ -13114,12 +13432,12 @@
         </p:grpSpPr>
         <p:sp>
           <p:nvSpPr>
-            <p:cNvPr name="Freeform 5" id="5"/>
+            <p:cNvPr id="5" name="Freeform 5"/>
             <p:cNvSpPr/>
             <p:nvPr/>
           </p:nvSpPr>
           <p:spPr>
-            <a:xfrm flipH="false" flipV="false" rot="0">
+            <a:xfrm>
               <a:off x="0" y="0"/>
               <a:ext cx="5816600" cy="1840738"/>
             </a:xfrm>
@@ -13128,9 +13446,9 @@
               <a:gdLst/>
               <a:ahLst/>
               <a:cxnLst/>
-              <a:rect r="r" b="b" t="t" l="l"/>
+              <a:rect l="l" t="t" r="r" b="b"/>
               <a:pathLst>
-                <a:path h="1840738" w="5816600">
+                <a:path w="5816600" h="1840738">
                   <a:moveTo>
                     <a:pt x="0" y="0"/>
                   </a:moveTo>
@@ -13153,7 +13471,7 @@
             <a:blipFill>
               <a:blip r:embed="rId2"/>
               <a:stretch>
-                <a:fillRect l="0" t="0" r="0" b="2"/>
+                <a:fillRect b="2"/>
               </a:stretch>
             </a:blipFill>
           </p:spPr>
@@ -13161,12 +13479,12 @@
       </p:grpSp>
       <p:grpSp>
         <p:nvGrpSpPr>
-          <p:cNvPr name="Group 6" id="6"/>
+          <p:cNvPr id="6" name="Group 6"/>
           <p:cNvGrpSpPr/>
           <p:nvPr/>
         </p:nvGrpSpPr>
         <p:grpSpPr>
-          <a:xfrm rot="0">
+          <a:xfrm>
             <a:off x="13367623" y="9656173"/>
             <a:ext cx="2625805" cy="830953"/>
             <a:chOff x="0" y="0"/>
@@ -13175,12 +13493,12 @@
         </p:grpSpPr>
         <p:sp>
           <p:nvSpPr>
-            <p:cNvPr name="Freeform 7" id="7"/>
+            <p:cNvPr id="7" name="Freeform 7"/>
             <p:cNvSpPr/>
             <p:nvPr/>
           </p:nvSpPr>
           <p:spPr>
-            <a:xfrm flipH="false" flipV="false" rot="0">
+            <a:xfrm>
               <a:off x="0" y="0"/>
               <a:ext cx="5816600" cy="1840738"/>
             </a:xfrm>
@@ -13189,9 +13507,9 @@
               <a:gdLst/>
               <a:ahLst/>
               <a:cxnLst/>
-              <a:rect r="r" b="b" t="t" l="l"/>
+              <a:rect l="l" t="t" r="r" b="b"/>
               <a:pathLst>
-                <a:path h="1840738" w="5816600">
+                <a:path w="5816600" h="1840738">
                   <a:moveTo>
                     <a:pt x="0" y="0"/>
                   </a:moveTo>
@@ -13214,7 +13532,7 @@
             <a:blipFill>
               <a:blip r:embed="rId2"/>
               <a:stretch>
-                <a:fillRect l="0" t="0" r="0" b="2"/>
+                <a:fillRect b="2"/>
               </a:stretch>
             </a:blipFill>
           </p:spPr>
@@ -13222,12 +13540,12 @@
       </p:grpSp>
       <p:grpSp>
         <p:nvGrpSpPr>
-          <p:cNvPr name="Group 8" id="8"/>
+          <p:cNvPr id="8" name="Group 8"/>
           <p:cNvGrpSpPr/>
           <p:nvPr/>
         </p:nvGrpSpPr>
         <p:grpSpPr>
-          <a:xfrm rot="0">
+          <a:xfrm>
             <a:off x="7990242" y="9984655"/>
             <a:ext cx="173987" cy="173987"/>
             <a:chOff x="0" y="0"/>
@@ -13236,12 +13554,12 @@
         </p:grpSpPr>
         <p:sp>
           <p:nvSpPr>
-            <p:cNvPr name="Freeform 9" id="9"/>
+            <p:cNvPr id="9" name="Freeform 9"/>
             <p:cNvSpPr/>
             <p:nvPr/>
           </p:nvSpPr>
           <p:spPr>
-            <a:xfrm flipH="false" flipV="false" rot="0">
+            <a:xfrm>
               <a:off x="0" y="0"/>
               <a:ext cx="812800" cy="812800"/>
             </a:xfrm>
@@ -13250,9 +13568,9 @@
               <a:gdLst/>
               <a:ahLst/>
               <a:cxnLst/>
-              <a:rect r="r" b="b" t="t" l="l"/>
+              <a:rect l="l" t="t" r="r" b="b"/>
               <a:pathLst>
-                <a:path h="812800" w="812800">
+                <a:path w="812800" h="812800">
                   <a:moveTo>
                     <a:pt x="406400" y="0"/>
                   </a:moveTo>
@@ -13287,8 +13605,8 @@
         </p:sp>
         <p:sp>
           <p:nvSpPr>
-            <p:cNvPr name="TextBox 10" id="10"/>
-            <p:cNvSpPr txBox="true"/>
+            <p:cNvPr id="10" name="TextBox 10"/>
+            <p:cNvSpPr txBox="1"/>
             <p:nvPr/>
           </p:nvSpPr>
           <p:spPr>
@@ -13301,7 +13619,7 @@
             </a:prstGeom>
           </p:spPr>
           <p:txBody>
-            <a:bodyPr anchor="ctr" rtlCol="false" tIns="50800" lIns="50800" bIns="50800" rIns="50800"/>
+            <a:bodyPr lIns="50800" tIns="50800" rIns="50800" bIns="50800" rtlCol="0" anchor="ctr"/>
             <a:lstStyle/>
             <a:p>
               <a:pPr algn="ctr">
@@ -13309,18 +13627,19 @@
                   <a:spcPts val="2239"/>
                 </a:lnSpc>
               </a:pPr>
+              <a:endParaRPr/>
             </a:p>
           </p:txBody>
         </p:sp>
       </p:grpSp>
       <p:grpSp>
         <p:nvGrpSpPr>
-          <p:cNvPr name="Group 11" id="11"/>
+          <p:cNvPr id="11" name="Group 11"/>
           <p:cNvGrpSpPr/>
           <p:nvPr/>
         </p:nvGrpSpPr>
         <p:grpSpPr>
-          <a:xfrm rot="0">
+          <a:xfrm>
             <a:off x="10353346" y="9948585"/>
             <a:ext cx="173987" cy="173987"/>
             <a:chOff x="0" y="0"/>
@@ -13329,12 +13648,12 @@
         </p:grpSpPr>
         <p:sp>
           <p:nvSpPr>
-            <p:cNvPr name="Freeform 12" id="12"/>
+            <p:cNvPr id="12" name="Freeform 12"/>
             <p:cNvSpPr/>
             <p:nvPr/>
           </p:nvSpPr>
           <p:spPr>
-            <a:xfrm flipH="false" flipV="false" rot="0">
+            <a:xfrm>
               <a:off x="0" y="0"/>
               <a:ext cx="812800" cy="812800"/>
             </a:xfrm>
@@ -13343,9 +13662,9 @@
               <a:gdLst/>
               <a:ahLst/>
               <a:cxnLst/>
-              <a:rect r="r" b="b" t="t" l="l"/>
+              <a:rect l="l" t="t" r="r" b="b"/>
               <a:pathLst>
-                <a:path h="812800" w="812800">
+                <a:path w="812800" h="812800">
                   <a:moveTo>
                     <a:pt x="406400" y="0"/>
                   </a:moveTo>
@@ -13380,8 +13699,8 @@
         </p:sp>
         <p:sp>
           <p:nvSpPr>
-            <p:cNvPr name="TextBox 13" id="13"/>
-            <p:cNvSpPr txBox="true"/>
+            <p:cNvPr id="13" name="TextBox 13"/>
+            <p:cNvSpPr txBox="1"/>
             <p:nvPr/>
           </p:nvSpPr>
           <p:spPr>
@@ -13394,7 +13713,7 @@
             </a:prstGeom>
           </p:spPr>
           <p:txBody>
-            <a:bodyPr anchor="ctr" rtlCol="false" tIns="50800" lIns="50800" bIns="50800" rIns="50800"/>
+            <a:bodyPr lIns="50800" tIns="50800" rIns="50800" bIns="50800" rtlCol="0" anchor="ctr"/>
             <a:lstStyle/>
             <a:p>
               <a:pPr algn="ctr">
@@ -13402,18 +13721,19 @@
                   <a:spcPts val="2239"/>
                 </a:lnSpc>
               </a:pPr>
+              <a:endParaRPr/>
             </a:p>
           </p:txBody>
         </p:sp>
       </p:grpSp>
       <p:grpSp>
         <p:nvGrpSpPr>
-          <p:cNvPr name="Group 14" id="14"/>
+          <p:cNvPr id="14" name="Group 14"/>
           <p:cNvGrpSpPr/>
           <p:nvPr/>
         </p:nvGrpSpPr>
         <p:grpSpPr>
-          <a:xfrm rot="0">
+          <a:xfrm>
             <a:off x="7798248" y="1922336"/>
             <a:ext cx="2642092" cy="641986"/>
             <a:chOff x="0" y="0"/>
@@ -13422,12 +13742,12 @@
         </p:grpSpPr>
         <p:sp>
           <p:nvSpPr>
-            <p:cNvPr name="Freeform 15" id="15"/>
+            <p:cNvPr id="15" name="Freeform 15"/>
             <p:cNvSpPr/>
             <p:nvPr/>
           </p:nvSpPr>
           <p:spPr>
-            <a:xfrm flipH="false" flipV="false" rot="0">
+            <a:xfrm>
               <a:off x="0" y="0"/>
               <a:ext cx="695860" cy="169083"/>
             </a:xfrm>
@@ -13436,9 +13756,9 @@
               <a:gdLst/>
               <a:ahLst/>
               <a:cxnLst/>
-              <a:rect r="r" b="b" t="t" l="l"/>
+              <a:rect l="l" t="t" r="r" b="b"/>
               <a:pathLst>
-                <a:path h="169083" w="695860">
+                <a:path w="695860" h="169083">
                   <a:moveTo>
                     <a:pt x="84541" y="0"/>
                   </a:moveTo>
@@ -13505,8 +13825,8 @@
         </p:sp>
         <p:sp>
           <p:nvSpPr>
-            <p:cNvPr name="TextBox 16" id="16"/>
-            <p:cNvSpPr txBox="true"/>
+            <p:cNvPr id="16" name="TextBox 16"/>
+            <p:cNvSpPr txBox="1"/>
             <p:nvPr/>
           </p:nvSpPr>
           <p:spPr>
@@ -13519,7 +13839,7 @@
             </a:prstGeom>
           </p:spPr>
           <p:txBody>
-            <a:bodyPr anchor="ctr" rtlCol="false" tIns="50800" lIns="50800" bIns="50800" rIns="50800"/>
+            <a:bodyPr lIns="50800" tIns="50800" rIns="50800" bIns="50800" rtlCol="0" anchor="ctr"/>
             <a:lstStyle/>
             <a:p>
               <a:pPr algn="ctr">
@@ -13527,18 +13847,19 @@
                   <a:spcPts val="2239"/>
                 </a:lnSpc>
               </a:pPr>
+              <a:endParaRPr/>
             </a:p>
           </p:txBody>
         </p:sp>
       </p:grpSp>
       <p:sp>
         <p:nvSpPr>
-          <p:cNvPr name="Freeform 17" id="17"/>
+          <p:cNvPr id="17" name="Freeform 17"/>
           <p:cNvSpPr/>
           <p:nvPr/>
         </p:nvSpPr>
         <p:spPr>
-          <a:xfrm flipH="false" flipV="false" rot="0">
+          <a:xfrm>
             <a:off x="13002366" y="-47625"/>
             <a:ext cx="5063940" cy="1941386"/>
           </a:xfrm>
@@ -13547,9 +13868,9 @@
             <a:gdLst/>
             <a:ahLst/>
             <a:cxnLst/>
-            <a:rect r="r" b="b" t="t" l="l"/>
+            <a:rect l="l" t="t" r="r" b="b"/>
             <a:pathLst>
-              <a:path h="1941386" w="5063940">
+              <a:path w="5063940" h="1941386">
                 <a:moveTo>
                   <a:pt x="0" y="0"/>
                 </a:moveTo>
@@ -13572,19 +13893,19 @@
           <a:blipFill>
             <a:blip r:embed="rId3"/>
             <a:stretch>
-              <a:fillRect l="0" t="0" r="0" b="0"/>
+              <a:fillRect/>
             </a:stretch>
           </a:blipFill>
         </p:spPr>
       </p:sp>
       <p:sp>
         <p:nvSpPr>
-          <p:cNvPr name="TextBox 18" id="18"/>
-          <p:cNvSpPr txBox="true"/>
+          <p:cNvPr id="18" name="TextBox 18"/>
+          <p:cNvSpPr txBox="1"/>
           <p:nvPr/>
         </p:nvSpPr>
         <p:spPr>
-          <a:xfrm rot="0">
+          <a:xfrm>
             <a:off x="8316142" y="9882546"/>
             <a:ext cx="1743273" cy="264135"/>
           </a:xfrm>
@@ -13593,7 +13914,7 @@
           </a:prstGeom>
         </p:spPr>
         <p:txBody>
-          <a:bodyPr anchor="t" rtlCol="false" tIns="0" lIns="0" bIns="0" rIns="0">
+          <a:bodyPr lIns="0" tIns="0" rIns="0" bIns="0" rtlCol="0" anchor="t">
             <a:spAutoFit/>
           </a:bodyPr>
           <a:lstStyle/>
@@ -13620,12 +13941,12 @@
       </p:sp>
       <p:sp>
         <p:nvSpPr>
-          <p:cNvPr name="Freeform 19" id="19"/>
+          <p:cNvPr id="19" name="Freeform 19"/>
           <p:cNvSpPr/>
           <p:nvPr/>
         </p:nvSpPr>
         <p:spPr>
-          <a:xfrm flipH="false" flipV="false" rot="0">
+          <a:xfrm>
             <a:off x="7990242" y="-236831"/>
             <a:ext cx="2134862" cy="2130592"/>
           </a:xfrm>
@@ -13634,9 +13955,9 @@
             <a:gdLst/>
             <a:ahLst/>
             <a:cxnLst/>
-            <a:rect r="r" b="b" t="t" l="l"/>
+            <a:rect l="l" t="t" r="r" b="b"/>
             <a:pathLst>
-              <a:path h="2130592" w="2134862">
+              <a:path w="2134862" h="2130592">
                 <a:moveTo>
                   <a:pt x="0" y="0"/>
                 </a:moveTo>
@@ -13659,19 +13980,19 @@
           <a:blipFill>
             <a:blip r:embed="rId4"/>
             <a:stretch>
-              <a:fillRect l="0" t="0" r="0" b="0"/>
+              <a:fillRect/>
             </a:stretch>
           </a:blipFill>
         </p:spPr>
       </p:sp>
       <p:grpSp>
         <p:nvGrpSpPr>
-          <p:cNvPr name="Group 20" id="20"/>
+          <p:cNvPr id="20" name="Group 20"/>
           <p:cNvGrpSpPr/>
           <p:nvPr/>
         </p:nvGrpSpPr>
         <p:grpSpPr>
-          <a:xfrm rot="0">
+          <a:xfrm>
             <a:off x="16200432" y="8538631"/>
             <a:ext cx="1365659" cy="1173861"/>
             <a:chOff x="0" y="0"/>
@@ -13680,12 +14001,12 @@
         </p:grpSpPr>
         <p:sp>
           <p:nvSpPr>
-            <p:cNvPr name="Freeform 21" id="21"/>
+            <p:cNvPr id="21" name="Freeform 21"/>
             <p:cNvSpPr/>
             <p:nvPr/>
           </p:nvSpPr>
           <p:spPr>
-            <a:xfrm flipH="false" flipV="false" rot="0">
+            <a:xfrm>
               <a:off x="0" y="0"/>
               <a:ext cx="4028567" cy="3462782"/>
             </a:xfrm>
@@ -13694,9 +14015,9 @@
               <a:gdLst/>
               <a:ahLst/>
               <a:cxnLst/>
-              <a:rect r="r" b="b" t="t" l="l"/>
+              <a:rect l="l" t="t" r="r" b="b"/>
               <a:pathLst>
-                <a:path h="3462782" w="4028567">
+                <a:path w="4028567" h="3462782">
                   <a:moveTo>
                     <a:pt x="0" y="0"/>
                   </a:moveTo>
@@ -13719,7 +14040,7 @@
             <a:blipFill>
               <a:blip r:embed="rId5"/>
               <a:stretch>
-                <a:fillRect l="0" t="0" r="0" b="0"/>
+                <a:fillRect/>
               </a:stretch>
             </a:blipFill>
           </p:spPr>
@@ -13727,12 +14048,12 @@
       </p:grpSp>
       <p:sp>
         <p:nvSpPr>
-          <p:cNvPr name="TextBox 22" id="22"/>
-          <p:cNvSpPr txBox="true"/>
+          <p:cNvPr id="22" name="TextBox 22"/>
+          <p:cNvSpPr txBox="1"/>
           <p:nvPr/>
         </p:nvSpPr>
         <p:spPr>
-          <a:xfrm rot="0">
+          <a:xfrm>
             <a:off x="8499623" y="1988059"/>
             <a:ext cx="1306116" cy="405766"/>
           </a:xfrm>
@@ -13741,7 +14062,7 @@
           </a:prstGeom>
         </p:spPr>
         <p:txBody>
-          <a:bodyPr anchor="t" rtlCol="false" tIns="0" lIns="0" bIns="0" rIns="0" wrap="none">
+          <a:bodyPr wrap="none" lIns="0" tIns="0" rIns="0" bIns="0" rtlCol="0" anchor="t">
             <a:spAutoFit/>
           </a:bodyPr>
           <a:lstStyle/>
@@ -13771,12 +14092,12 @@
       </p:sp>
       <p:sp>
         <p:nvSpPr>
-          <p:cNvPr name="TextBox 23" id="23"/>
-          <p:cNvSpPr txBox="true"/>
+          <p:cNvPr id="23" name="TextBox 23"/>
+          <p:cNvSpPr txBox="1"/>
           <p:nvPr/>
         </p:nvSpPr>
         <p:spPr>
-          <a:xfrm rot="0">
+          <a:xfrm>
             <a:off x="1188720" y="2971800"/>
             <a:ext cx="14356080" cy="5669280"/>
           </a:xfrm>
@@ -13785,7 +14106,7 @@
           </a:prstGeom>
         </p:spPr>
         <p:txBody>
-          <a:bodyPr anchor="t" rtlCol="false" tIns="0" lIns="0" bIns="0" rIns="0" wrap="square">
+          <a:bodyPr wrap="square" lIns="0" tIns="0" rIns="0" bIns="0" rtlCol="0" anchor="t">
             <a:spAutoFit/>
           </a:bodyPr>
           <a:lstStyle/>
@@ -13969,12 +14290,12 @@
       </p:sp>
       <p:sp>
         <p:nvSpPr>
-          <p:cNvPr name="Freeform 24" id="24"/>
+          <p:cNvPr id="24" name="Freeform 24"/>
           <p:cNvSpPr/>
           <p:nvPr/>
         </p:nvSpPr>
         <p:spPr>
-          <a:xfrm flipH="false" flipV="false" rot="0">
+          <a:xfrm>
             <a:off x="264376" y="407706"/>
             <a:ext cx="3092172" cy="1030724"/>
           </a:xfrm>
@@ -13983,9 +14304,9 @@
             <a:gdLst/>
             <a:ahLst/>
             <a:cxnLst/>
-            <a:rect r="r" b="b" t="t" l="l"/>
+            <a:rect l="l" t="t" r="r" b="b"/>
             <a:pathLst>
-              <a:path h="1030724" w="3092172">
+              <a:path w="3092172" h="1030724">
                 <a:moveTo>
                   <a:pt x="0" y="0"/>
                 </a:moveTo>
@@ -14008,7 +14329,7 @@
           <a:blipFill>
             <a:blip r:embed="rId6"/>
             <a:stretch>
-              <a:fillRect l="0" t="0" r="0" b="0"/>
+              <a:fillRect/>
             </a:stretch>
           </a:blipFill>
         </p:spPr>

--- a/docs/GhostQPU_QHack_India26.pptx
+++ b/docs/GhostQPU_QHack_India26.pptx
@@ -12902,7 +12902,7 @@
                 </a:solidFill>
                 <a:latin typeface="IBM Plex Sans"/>
               </a:rPr>
-              <a:t>Limitation: </a:t>
+              <a:t>Smarter Forger: </a:t>
             </a:r>
             <a:r>
               <a:rPr sz="2200" b="0">
@@ -12911,7 +12911,7 @@
                 </a:solidFill>
                 <a:latin typeface="IBM Plex Sans"/>
               </a:rPr>
-              <a:t>a Forger that learns from one real job fooled the original Detector (scored 0.07, 0.11).</a:t>
+              <a:t>learning from a real job fooled the frozen Detector 12/13; retrained, caught 12/13.</a:t>
             </a:r>
           </a:p>
         </p:txBody>

--- a/docs/GhostQPU_QHack_India26.pptx
+++ b/docs/GhostQPU_QHack_India26.pptx
@@ -11632,7 +11632,7 @@
                 </a:solidFill>
                 <a:latin typeface="IBM Plex Sans"/>
               </a:rPr>
-              <a:t>23 jobs on ibm_marrakesh, ibm_fez and ibm_kingston over 18 calibration cycles and 4 days, each with a forged twin.</a:t>
+              <a:t>24 jobs on ibm_marrakesh, ibm_fez and ibm_kingston over 18 calibration cycles and 4 days, each with a forged twin.</a:t>
             </a:r>
           </a:p>
           <a:p>
@@ -12726,7 +12726,7 @@
                 </a:solidFill>
                 <a:latin typeface="IBM Plex Sans"/>
               </a:rPr>
-              <a:t>46 of 46 later jobs correct (23 real, 23 forged), 18 cycles, 3 machines.</a:t>
+              <a:t>48 of 48 later jobs correct (24 real, 24 forged), 18 cycles, 3 machines.</a:t>
             </a:r>
           </a:p>
           <a:p>
@@ -12763,7 +12763,7 @@
                 </a:solidFill>
                 <a:latin typeface="IBM Plex Sans"/>
               </a:rPr>
-              <a:t>AUC 1.00, 50 of 50 over 19 cycles. Trained only on earlier days: 46 of 46.</a:t>
+              <a:t>AUC 1.00, 52 of 52 over 19 cycles. Trained only on earlier days: 48 of 48.</a:t>
             </a:r>
           </a:p>
           <a:p>
@@ -12837,7 +12837,7 @@
                 </a:solidFill>
                 <a:latin typeface="IBM Plex Sans"/>
               </a:rPr>
-              <a:t>1.5 QPU seconds of canaries still calls all 50 jobs right.</a:t>
+              <a:t>1.5 QPU seconds of canaries still calls all 52 jobs right.</a:t>
             </a:r>
           </a:p>
           <a:p>

--- a/docs/GhostQPU_QHack_India26.pptx
+++ b/docs/GhostQPU_QHack_India26.pptx
@@ -11632,7 +11632,7 @@
                 </a:solidFill>
                 <a:latin typeface="IBM Plex Sans"/>
               </a:rPr>
-              <a:t>24 jobs on ibm_marrakesh, ibm_fez and ibm_kingston over 18 calibration cycles and 4 days, each with a forged twin.</a:t>
+              <a:t>28 jobs on ibm_marrakesh, ibm_fez and ibm_kingston over 20 calibration cycles and 4 days, each with a forged twin.</a:t>
             </a:r>
           </a:p>
           <a:p>
@@ -12726,7 +12726,7 @@
                 </a:solidFill>
                 <a:latin typeface="IBM Plex Sans"/>
               </a:rPr>
-              <a:t>48 of 48 later jobs correct (24 real, 24 forged), 18 cycles, 3 machines.</a:t>
+              <a:t>56 of 56 later jobs correct (28 real, 28 forged), 20 cycles, 3 machines.</a:t>
             </a:r>
           </a:p>
           <a:p>
@@ -12763,7 +12763,7 @@
                 </a:solidFill>
                 <a:latin typeface="IBM Plex Sans"/>
               </a:rPr>
-              <a:t>AUC 1.00, 52 of 52 over 19 cycles. Trained only on earlier days: 48 of 48.</a:t>
+              <a:t>AUC 1.00, 60 of 60 over 21 cycles. Earlier days only: 56 of 56. Trained on 10 jobs: 40 of 40.</a:t>
             </a:r>
           </a:p>
           <a:p>
@@ -12837,7 +12837,7 @@
                 </a:solidFill>
                 <a:latin typeface="IBM Plex Sans"/>
               </a:rPr>
-              <a:t>1.5 QPU seconds of canaries still calls all 52 jobs right.</a:t>
+              <a:t>1.5 QPU seconds of canaries still calls all 60 jobs right.</a:t>
             </a:r>
           </a:p>
           <a:p>

--- a/docs/GhostQPU_QHack_India26.pptx
+++ b/docs/GhostQPU_QHack_India26.pptx
@@ -11632,7 +11632,7 @@
                 </a:solidFill>
                 <a:latin typeface="IBM Plex Sans"/>
               </a:rPr>
-              <a:t>28 jobs on ibm_marrakesh, ibm_fez and ibm_kingston over 20 calibration cycles and 4 days, each with a forged twin.</a:t>
+              <a:t>44 IBM jobs on marrakesh, fez and kingston over 4 days: 30 full batches with forged twins, plus 6 short, 5 CNOT and 3 disguised-canary jobs.</a:t>
             </a:r>
           </a:p>
           <a:p>

--- a/docs/GhostQPU_QHack_India26.pptx
+++ b/docs/GhostQPU_QHack_India26.pptx
@@ -4359,7 +4359,7 @@
               </a:lnSpc>
             </a:pPr>
             <a:r>
-              <a:rPr lang="en-US" sz="3399">
+              <a:rPr lang="en-US" sz="3000">
                 <a:solidFill>
                   <a:srgbClr val="000000"/>
                 </a:solidFill>
@@ -4400,7 +4400,7 @@
               </a:lnSpc>
             </a:pPr>
             <a:r>
-              <a:rPr lang="en-US" sz="3599">
+              <a:rPr lang="en-US" sz="3000">
                 <a:solidFill>
                   <a:srgbClr val="000000"/>
                 </a:solidFill>
@@ -4441,7 +4441,7 @@
               </a:lnSpc>
             </a:pPr>
             <a:r>
-              <a:rPr lang="en-US" sz="3499">
+              <a:rPr lang="en-US" sz="3000">
                 <a:solidFill>
                   <a:srgbClr val="000000"/>
                 </a:solidFill>
@@ -4482,7 +4482,7 @@
               </a:lnSpc>
             </a:pPr>
             <a:r>
-              <a:rPr lang="en-US" sz="3499">
+              <a:rPr lang="en-US" sz="3000">
                 <a:solidFill>
                   <a:srgbClr val="000000"/>
                 </a:solidFill>
@@ -8481,8 +8481,8 @@
         </p:nvSpPr>
         <p:spPr>
           <a:xfrm>
-            <a:off x="7326063" y="1937259"/>
-            <a:ext cx="3027283" cy="497841"/>
+            <a:off x="6962023" y="1937259"/>
+            <a:ext cx="3755364" cy="497841"/>
           </a:xfrm>
           <a:prstGeom prst="rect">
             <a:avLst/>
@@ -9512,8 +9512,8 @@
         </p:nvSpPr>
         <p:spPr>
           <a:xfrm>
-            <a:off x="7514703" y="1963294"/>
-            <a:ext cx="2342555" cy="455296"/>
+            <a:off x="7451998" y="1963294"/>
+            <a:ext cx="2467965" cy="455296"/>
           </a:xfrm>
           <a:prstGeom prst="rect">
             <a:avLst/>
@@ -10508,8 +10508,8 @@
         </p:nvSpPr>
         <p:spPr>
           <a:xfrm>
-            <a:off x="6298992" y="1988059"/>
-            <a:ext cx="4566285" cy="405766"/>
+            <a:off x="5748676" y="1988059"/>
+            <a:ext cx="5666917" cy="405766"/>
           </a:xfrm>
           <a:prstGeom prst="rect">
             <a:avLst/>
@@ -12636,8 +12636,8 @@
         </p:nvSpPr>
         <p:spPr>
           <a:xfrm>
-            <a:off x="7550865" y="1969009"/>
-            <a:ext cx="2641044" cy="405766"/>
+            <a:off x="7043349" y="1969009"/>
+            <a:ext cx="3656076" cy="405766"/>
           </a:xfrm>
           <a:prstGeom prst="rect">
             <a:avLst/>
